--- a/docs/Diapositivas_Video_SegundoCorte.pptx
+++ b/docs/Diapositivas_Video_SegundoCorte.pptx
@@ -120,18 +120,18 @@
   <p:extLst>
     <p:ext uri="{521415D9-36F7-43E2-AB2F-B90AF26B5E84}">
       <p14:sectionLst xmlns:p14="http://schemas.microsoft.com/office/powerpoint/2010/main">
-        <p14:section name="Apertura" id="{ebf1d8ff-7965-7c52-0be1-7fddd2d8a44a}">
+        <p14:section name="Apertura" id="{ff9af3a3-119a-047f-c92e-6b29b734e9b5}">
           <p14:sldIdLst>
             <p14:sldId id="256"/>
           </p14:sldIdLst>
         </p14:section>
-        <p14:section name="Arquitectura" id="{d475965f-41ed-5d92-d3a2-7b5175257b57}">
+        <p14:section name="Arquitectura" id="{a34c86af-43b2-6975-fcdd-c9080eb8dbef}">
           <p14:sldIdLst>
             <p14:sldId id="257"/>
             <p14:sldId id="258"/>
           </p14:sldIdLst>
         </p14:section>
-        <p14:section name="Implementación" id="{d1980fc9-6303-5f7a-5288-d266b0e2673d}">
+        <p14:section name="Implementación" id="{791ce639-5182-ea96-b5ac-62c3e28745a4}">
           <p14:sldIdLst>
             <p14:sldId id="259"/>
             <p14:sldId id="260"/>
@@ -139,20 +139,20 @@
             <p14:sldId id="262"/>
           </p14:sldIdLst>
         </p14:section>
-        <p14:section name="Validación" id="{a3076931-42bd-c58e-084d-77ae73f85af9}">
+        <p14:section name="Validación" id="{61c9f881-0ccd-503d-12de-b39067d4c726}">
           <p14:sldIdLst>
             <p14:sldId id="263"/>
             <p14:sldId id="264"/>
             <p14:sldId id="265"/>
           </p14:sldIdLst>
         </p14:section>
-        <p14:section name="Preguntas" id="{332513ec-a085-8c4f-a3b5-195409c8178d}">
+        <p14:section name="Preguntas" id="{fd60c503-d443-0b5e-1a05-e34f1ea41fb4}">
           <p14:sldIdLst>
             <p14:sldId id="266"/>
             <p14:sldId id="267"/>
           </p14:sldIdLst>
         </p14:section>
-        <p14:section name="Cierre" id="{02d786a8-6a34-3f04-9666-e3356ad0415d}">
+        <p14:section name="Cierre" id="{4cb7791a-28f3-9dd1-1539-ba9bb958c868}">
           <p14:sldIdLst>
             <p14:sldId id="268"/>
             <p14:sldId id="269"/>
@@ -1374,7 +1374,7 @@
             <a:r>
               <a:rPr lang="en-US" dirty="0"/>
               <a:t>[En pantalla: terminal con "python firmware/firmware_simulador.py" corriendo y las tramas JSON visibles]
-Acá tengo el firmware simulado corriendo de verdad, no una captura de pantalla. Es un servidor TCP que escucha en el puerto 8765 y, cada segundo, emite una trama JSON con el identificador del dispositivo, temperatura, humedad y vibración. Cada siete ciclos, inyecta deliberadamente una anomalía en una de las tres variables, para que la aplicación tenga algo real que clasificar como condición anómala. Todo esto corre con la librería estándar de Python, sin ninguna dependencia externa ni hardware.</a:t>
+Con un doble clic en DEMO.bat se levantan el firmware, la aplicación y este panel de monitoreo. Acá tengo el firmware simulado corriendo de verdad, no una captura de pantalla. Es un servidor TCP que escucha en el puerto 8765 y, cada segundo, emite una trama JSON con el identificador del dispositivo, temperatura, humedad y vibración. Cada siete ciclos, inyecta deliberadamente una anomalía en una de las tres variables, para que la aplicación tenga algo real que clasificar como condición anómala. Todo esto corre con la librería estándar de Python, sin ninguna dependencia externa ni hardware.</a:t>
             </a:r>
             <a:endParaRPr lang="en-US" dirty="0"/>
           </a:p>
@@ -1640,8 +1640,8 @@
           <a:p>
             <a:r>
               <a:rPr lang="en-US" dirty="0"/>
-              <a:t>[En pantalla: terminal ejecutando "pytest tests/ -v" en vivo, 28 en verde; luego docs/Matriz_Pruebas.md]
-El proyecto tiene veintiocho pruebas automáticas con pytest, escritas con test primero, implementación después — es decir, TDD real. Las voy a correr ahora mismo [ejecutar pytest tests/ -v en pantalla]. Como se ve, las veintiocho pasan. La matriz de pruebas del documento técnico cruza cada requisito funcional con su prueba automática y, cuando corresponde, con una corrida manual real contra el sistema completo — no son pruebas teóricas, son pruebas que de verdad se ejecutaron.</a:t>
+              <a:t>[En pantalla: terminal ejecutando "pytest tests/ -v" en vivo, 64 en verde; luego docs/Matriz_Pruebas.md]
+El proyecto tiene sesenta y cuatro pruebas automáticas con pytest, escritas con test primero, implementación después — es decir, TDD real. Las voy a correr ahora mismo [ejecutar pytest tests/ -v en pantalla]. Como se ve, las sesenta y cuatro pasan. La matriz de pruebas del documento técnico cruza cada requisito funcional con su prueba automática y, cuando corresponde, con una corrida manual real contra el sistema completo — no son pruebas teóricas, son pruebas que de verdad se ejecutaron.</a:t>
             </a:r>
             <a:endParaRPr lang="en-US" dirty="0"/>
           </a:p>
@@ -1730,7 +1730,7 @@
             <a:r>
               <a:rPr lang="en-US" dirty="0"/>
               <a:t>[En pantalla: logs/sistema.log y el fallo 6 de docs/Fallos_Controlados.md]
-Este es el log del sistema, con fecha, hora, nivel y evento de cada lectura procesada. Y esto es evidencia real de uno de los seis fallos controlados que exige la guía: maté el proceso del firmware a mitad de una corrida de cuarenta lecturas, y lo volví a levantar unos segundos después. Acá se ve el error real de Windows cuando se cae la conexión, los reintentos con espera creciente, y la línea donde la aplicación confirma que recuperó la conexión — tres coma cincuenta y siete segundos después — y sigue procesando sin que el proceso se haya caído en ningún momento. Los otros cinco fallos, con la misma evidencia real, están documentados en el repositorio.</a:t>
+Ahora lo más importante: qué pasa cuando algo falla. Desde este panel provoco fallos reales. Fuerzo una anomalía y aparece el punto rojo. Mando un dato corrupto y un valor fuera de rango: suben los contadores, y el sistema sigue leyendo. Ahora detengo el firmware: el estado pasa a reconectando y en el registro se ven los reintentos con espera creciente. Lo reinicio, y la aplicación se reconecta sola, sin reiniciarla. Por último saturo la CPU: la gráfica sube casi al cien por ciento y la integración sigue funcionando. Estos seis fallos, con su salida de consola real, están documentados en el repositorio.</a:t>
             </a:r>
             <a:endParaRPr lang="en-US" dirty="0"/>
           </a:p>
@@ -7517,7 +7517,7 @@
                   <a:schemeClr val="tx1"/>
                 </a:solidFill>
               </a:rPr>
-              <a:t>TDD: 28 pruebas escritas antes que el código</a:t>
+              <a:t>TDD: 64 pruebas escritas antes que el código</a:t>
             </a:r>
             <a:endParaRPr lang="en-US" sz="1400" dirty="0"/>
           </a:p>
@@ -8984,7 +8984,7 @@
                 <a:ea typeface="Courier New" pitchFamily="34" charset="-122"/>
                 <a:cs typeface="Courier New" pitchFamily="34" charset="-120"/>
               </a:rPr>
-              <a:t>28 pruebas pytest</a:t>
+              <a:t>64 pruebas pytest</a:t>
             </a:r>
             <a:endParaRPr lang="en-US" sz="1300" dirty="0"/>
           </a:p>
@@ -9205,7 +9205,7 @@
                   <a:schemeClr val="accent4"/>
                 </a:solidFill>
               </a:rPr>
-              <a:t>28</a:t>
+              <a:t>64</a:t>
             </a:r>
             <a:endParaRPr lang="en-US" sz="4400" dirty="0"/>
           </a:p>
@@ -14760,7 +14760,7 @@
                             <a:schemeClr val="tx1"/>
                           </a:solidFill>
                         </a:rPr>
-                        <a:t>3 pruebas + snapshot real en el reporte</a:t>
+                        <a:t>5 pruebas + snapshot real en el reporte</a:t>
                       </a:r>
                       <a:endParaRPr lang="en-US" sz="1200" dirty="0"/>
                     </a:p>
@@ -15685,7 +15685,7 @@
                   <a:schemeClr val="tx1"/>
                 </a:solidFill>
               </a:rPr>
-              <a:t>28 de 28 pruebas pytest en verde · detalle completo en docs/Matriz_Pruebas.md</a:t>
+              <a:t>64 de 64 pruebas pytest en verde · detalle completo en docs/Matriz_Pruebas.md</a:t>
             </a:r>
             <a:endParaRPr lang="en-US" sz="1400" dirty="0"/>
           </a:p>

--- a/docs/Diapositivas_Video_SegundoCorte.pptx
+++ b/docs/Diapositivas_Video_SegundoCorte.pptx
@@ -19,9 +19,10 @@
     <p:sldId id="267" r:id="rId13"/>
     <p:sldId id="268" r:id="rId14"/>
     <p:sldId id="269" r:id="rId15"/>
+    <p:sldId id="270" r:id="rId16"/>
   </p:sldIdLst>
   <p:notesMasterIdLst>
-    <p:notesMasterId r:id="rId16"/>
+    <p:notesMasterId r:id="rId17"/>
   </p:notesMasterIdLst>
   <p:sldSz cx="9144000" cy="5143500"/>
   <p:notesSz cx="5143500" cy="9144000"/>
@@ -120,42 +121,43 @@
   <p:extLst>
     <p:ext uri="{521415D9-36F7-43E2-AB2F-B90AF26B5E84}">
       <p14:sectionLst xmlns:p14="http://schemas.microsoft.com/office/powerpoint/2010/main">
-        <p14:section name="Apertura" id="{ff9af3a3-119a-047f-c92e-6b29b734e9b5}">
+        <p14:section name="Apertura" id="{2d305e10-dce3-4d33-15aa-0f3a0098d1b7}">
           <p14:sldIdLst>
             <p14:sldId id="256"/>
           </p14:sldIdLst>
         </p14:section>
-        <p14:section name="Arquitectura" id="{a34c86af-43b2-6975-fcdd-c9080eb8dbef}">
+        <p14:section name="Arquitectura" id="{6e91371b-01a4-951f-df69-d5e966b45735}">
           <p14:sldIdLst>
             <p14:sldId id="257"/>
             <p14:sldId id="258"/>
           </p14:sldIdLst>
         </p14:section>
-        <p14:section name="Implementación" id="{791ce639-5182-ea96-b5ac-62c3e28745a4}">
+        <p14:section name="Implementación" id="{c9ed07e1-af28-4d54-c5f6-a5d161f7b1db}">
           <p14:sldIdLst>
             <p14:sldId id="259"/>
             <p14:sldId id="260"/>
             <p14:sldId id="261"/>
             <p14:sldId id="262"/>
+            <p14:sldId id="263"/>
           </p14:sldIdLst>
         </p14:section>
-        <p14:section name="Validación" id="{61c9f881-0ccd-503d-12de-b39067d4c726}">
+        <p14:section name="Validación" id="{d46972bc-dd35-f88c-7136-be19b05c8746}">
           <p14:sldIdLst>
-            <p14:sldId id="263"/>
             <p14:sldId id="264"/>
             <p14:sldId id="265"/>
+            <p14:sldId id="266"/>
           </p14:sldIdLst>
         </p14:section>
-        <p14:section name="Preguntas" id="{fd60c503-d443-0b5e-1a05-e34f1ea41fb4}">
+        <p14:section name="Preguntas" id="{748c4de0-9bd0-b201-cee7-4acc17af2580}">
           <p14:sldIdLst>
-            <p14:sldId id="266"/>
             <p14:sldId id="267"/>
+            <p14:sldId id="268"/>
           </p14:sldIdLst>
         </p14:section>
-        <p14:section name="Cierre" id="{4cb7791a-28f3-9dd1-1539-ba9bb958c868}">
+        <p14:section name="Cierre" id="{08e35ac9-2791-a53a-2d55-dc7ba1624019}">
           <p14:sldIdLst>
-            <p14:sldId id="268"/>
             <p14:sldId id="269"/>
+            <p14:sldId id="270"/>
           </p14:sldIdLst>
         </p14:section>
       </p14:sectionLst>
@@ -651,8 +653,8 @@
           <a:p>
             <a:r>
               <a:rPr lang="en-US" dirty="0"/>
-              <a:t>[En pantalla: esta diapositiva]
-Con todas esas corridas medí los indicadores que pide la guía. La disponibilidad de comunicación fue de noventa y siete coma seis por ciento, incluso con una caída real del enlace. La latencia promedio fue de un cuarto de milisegundo, sobre la misma máquina. El noventa y ocho coma cuatro por ciento de los datos recibidos fueron válidos, y el tiempo de recuperación tras la caída fue de tres coma cinco segundos. La tasa de errores agregada queda en seis por ciento, pero solo porque incluye las corridas donde inyecté fallos a propósito: en operación normal fue cero.</a:t>
+              <a:t>[En pantalla: logs/sistema.log y el fallo 6 de docs/Fallos_Controlados.md]
+Ahora lo más importante: qué pasa cuando algo falla. Desde este panel provoco fallos reales. Fuerzo una anomalía y aparece el punto rojo. Mando un dato corrupto y un valor fuera de rango: suben los contadores, y el sistema sigue leyendo. Ahora detengo solo el firmware de la bomba: ese equipo pasa a reconectando y su línea se corta, pero el compresor y el motor siguen enviando datos sin enterarse. Lo reinicio, y la aplicación se reconecta sola, sin reiniciarla. Por último saturo la CPU: la gráfica sube casi al cien por ciento y la integración sigue funcionando. Estos seis fallos, con su salida de consola real, están documentados en el repositorio.</a:t>
             </a:r>
             <a:endParaRPr lang="en-US" dirty="0"/>
           </a:p>
@@ -740,14 +742,8 @@
           <a:p>
             <a:r>
               <a:rPr lang="en-US" dirty="0"/>
-              <a:t>[En cámara: responder cada pregunta en una frase]
-Voy a responder, en una frase cada una, las preguntas de integración que pide la guía; el desarrollo completo de cada una está en el documento técnico, sección ocho.
-Uno: el hardware ejecuta y ofrece recursos; el firmware decide qué dato generar y cuándo; cada transformación ocurre en una frontera distinta, desde el firmware hasta la persistencia.
-Dos: la aplicación usa sockets TCP, sistema de archivos y consultas de CPU, memoria, disco y variables de entorno.
-Tres: si el sistema operativo revoca un permiso, la escritura lanza una excepción que mi aplicación captura, cuenta como error y sigue corriendo — lo demostré en vivo en el bloque anterior.
-Cuatro: Python da velocidad de desarrollo y manejo de errores expresivo, pero el GIL le impide paralelismo real de CPU, y no sirve para programar firmware de bajo nivel.
-Cinco: lo que exige temporización estricta va en firmware; lo que exige lógica de negocio y mantenibilidad va en software de aplicación.
-Seis: con cien dispositivos simultáneos, necesitaría un servidor asíncrono y probablemente una cola de mensajes en vez de sockets directos.</a:t>
+              <a:t>[En pantalla: esta diapositiva]
+Con todas esas corridas medí los indicadores que pide la guía. La disponibilidad de comunicación fue de noventa y siete coma seis por ciento, incluso con una caída real del enlace. La latencia promedio fue de un cuarto de milisegundo, sobre la misma máquina. El noventa y ocho coma cuatro por ciento de los datos recibidos fueron válidos, y el tiempo de recuperación tras la caída fue de tres coma cinco segundos. La tasa de errores agregada queda en seis por ciento, pero solo porque incluye las corridas donde inyecté fallos a propósito: en operación normal fue cero.</a:t>
             </a:r>
             <a:endParaRPr lang="en-US" dirty="0"/>
           </a:p>
@@ -836,12 +832,13 @@
             <a:r>
               <a:rPr lang="en-US" dirty="0"/>
               <a:t>[En cámara: responder cada pregunta en una frase]
-Siete: el riesgo principal es tratar el dato externo como código; por eso solo lo parseo como JSON y lo valido campo por campo, nunca lo ejecuto.
-Ocho: la integridad se garantiza con marca de tiempo y estado en cada registro, más logs con evento y resultado.
-Nueve: los mensajes de error de socket difieren entre Windows y Linux, aunque Python los normaliza a la misma jerarquía de excepciones.
-Diez: actualizaría el firmware con una estrategia azul-verde, validando la versión nueva antes de conmutar el tráfico real.
-Once: antes de producción, aplicaría pruebas de carga sostenida, de seguridad y de concurrencia real con varios dispositivos.
-Doce: el punto único de falla es el socket hacia un único firmware; lo volvería tolerante con redundancia y una cola intermedia entre adquisición y persistencia.</a:t>
+Voy a responder, en una frase cada una, las preguntas de integración que pide la guía; el desarrollo completo de cada una está en el documento técnico, sección ocho.
+Uno: el hardware ejecuta y ofrece recursos; el firmware decide qué dato generar y cuándo; cada transformación ocurre en una frontera distinta, desde el firmware hasta la persistencia.
+Dos: la aplicación usa sockets TCP, sistema de archivos y consultas de CPU, memoria, disco y variables de entorno.
+Tres: si el sistema operativo revoca un permiso, la escritura lanza una excepción que mi aplicación captura, cuenta como error y sigue corriendo — lo demostré en vivo en el bloque anterior.
+Cuatro: Python da velocidad de desarrollo y manejo de errores expresivo, pero el GIL le impide paralelismo real de CPU, y no sirve para programar firmware de bajo nivel.
+Cinco: lo que exige temporización estricta va en firmware; lo que exige lógica de negocio y mantenibilidad va en software de aplicación.
+Seis: tres dispositivos simultáneos ya funcionan, con un hilo por equipo; para cien, necesitaría un servidor asíncrono y probablemente una cola de mensajes como MQTT en vez de sockets directos.</a:t>
             </a:r>
             <a:endParaRPr lang="en-US" dirty="0"/>
           </a:p>
@@ -929,8 +926,13 @@
           <a:p>
             <a:r>
               <a:rPr lang="en-US" dirty="0"/>
-              <a:t>[En cámara: rostro visible]
-Para cerrar: este prototipo demuestra, con evidencia real y no simulada a mano, el recorrido completo que pide la guía, desde el dato que genera el firmware hasta el reporte final, pasando por servicios reales del sistema operativo. La disciplina de pruebas primero no fue un formalismo: encontró un defecto real de tolerancia a fallas antes de la entrega, que corregí antes de grabar este video. Y los seis fallos controlados, ejecutados contra procesos reales, confirman que el sistema cumple el requisito de no perder el control ante una falla. La limitación más clara es la escala: hoy funciona para un dispositivo a la vez, y ahí es donde apuntaría el siguiente esfuerzo de ingeniería.</a:t>
+              <a:t>[En cámara: responder cada pregunta en una frase]
+Siete: el riesgo principal es tratar el dato externo como código; por eso solo lo parseo como JSON y lo valido campo por campo, nunca lo ejecuto.
+Ocho: la integridad se garantiza con marca de tiempo y estado en cada registro, más logs con evento y resultado.
+Nueve: los mensajes de error de socket difieren entre Windows y Linux, aunque Python los normaliza a la misma jerarquía de excepciones.
+Diez: actualizaría el firmware con una estrategia azul-verde, validando la versión nueva antes de conmutar el tráfico real.
+Once: antes de producción, aplicaría pruebas de carga sostenida, de seguridad y de concurrencia real con varios dispositivos.
+Doce: el punto de falla es el socket hacia cada firmware; con varios equipos la caída queda aislada, y lo volvería tolerante con redundancia y una cola intermedia entre adquisición y persistencia.</a:t>
             </a:r>
             <a:endParaRPr lang="en-US" dirty="0"/>
           </a:p>
@@ -1018,7 +1020,8 @@
           <a:p>
             <a:r>
               <a:rPr lang="en-US" dirty="0"/>
-              <a:t>Las referencias de este trabajo son: la guía de la práctica de Martínez Barrera, del Aula Virtual de la Universidad Santo Tomás; la documentación oficial de Python, específicamente los módulos socket, json, logging y multiprocessing; la documentación de la librería psutil; y la documentación de Microsoft sobre los códigos de error de Windows Sockets. Todas estas referencias están completas, en formato APA séptima edición, en el documento técnico. Muchas gracias.</a:t>
+              <a:t>[En cámara: rostro visible]
+Para cerrar: este prototipo demuestra, con evidencia real y no simulada a mano, el recorrido completo que pide la guía, desde el dato que genera el firmware hasta el reporte final, pasando por servicios reales del sistema operativo. La disciplina de pruebas primero no fue un formalismo: encontró un defecto real de tolerancia a fallas antes de la entrega, que corregí antes de grabar este video. Y los seis fallos controlados, ejecutados contra procesos reales, confirman que el sistema cumple el requisito de no perder el control ante una falla. Hoy maneja tres equipos en paralelo, aislados entre sí; para llegar a cientos, el siguiente paso sería un servidor asíncrono con un broker MQTT.</a:t>
             </a:r>
             <a:endParaRPr lang="en-US" dirty="0"/>
           </a:p>
@@ -1042,6 +1045,94 @@
             <a:fld id="{F7021451-1387-4CA6-816F-3879F97B5CBC}" type="slidenum">
               <a:rPr lang="en-US"/>
               <a:t>14</a:t>
+            </a:fld>
+            <a:endParaRPr lang="en-US"/>
+          </a:p>
+        </p:txBody>
+      </p:sp>
+    </p:spTree>
+    <p:extLst>
+      <p:ext uri="{BB962C8B-B14F-4D97-AF65-F5344CB8AC3E}">
+        <p14:creationId xmlns:p14="http://schemas.microsoft.com/office/powerpoint/2010/main" val="1024086991"/>
+      </p:ext>
+    </p:extLst>
+  </p:cSld>
+  <p:clrMapOvr>
+    <a:masterClrMapping/>
+  </p:clrMapOvr>
+</p:notes>
+</file>
+
+<file path=ppt/notesSlides/notesSlide15.xml><?xml version="1.0" encoding="utf-8"?>
+<p:notes xmlns:a="http://schemas.openxmlformats.org/drawingml/2006/main" xmlns:r="http://schemas.openxmlformats.org/officeDocument/2006/relationships" xmlns:p="http://schemas.openxmlformats.org/presentationml/2006/main">
+  <p:cSld>
+    <p:spTree>
+      <p:nvGrpSpPr>
+        <p:cNvPr id="1" name=""/>
+        <p:cNvGrpSpPr/>
+        <p:nvPr/>
+      </p:nvGrpSpPr>
+      <p:grpSpPr>
+        <a:xfrm>
+          <a:off x="0" y="0"/>
+          <a:ext cx="0" cy="0"/>
+          <a:chOff x="0" y="0"/>
+          <a:chExt cx="0" cy="0"/>
+        </a:xfrm>
+      </p:grpSpPr>
+      <p:sp>
+        <p:nvSpPr>
+          <p:cNvPr id="2" name="Slide Image Placeholder 1"/>
+          <p:cNvSpPr>
+            <a:spLocks noGrp="1" noRot="1" noChangeAspect="1"/>
+          </p:cNvSpPr>
+          <p:nvPr>
+            <p:ph type="sldImg"/>
+          </p:nvPr>
+        </p:nvSpPr>
+        <p:spPr/>
+      </p:sp>
+      <p:sp>
+        <p:nvSpPr>
+          <p:cNvPr id="3" name="Notes Placeholder 2"/>
+          <p:cNvSpPr>
+            <a:spLocks noGrp="1"/>
+          </p:cNvSpPr>
+          <p:nvPr>
+            <p:ph type="body" idx="1"/>
+          </p:nvPr>
+        </p:nvSpPr>
+        <p:spPr/>
+        <p:txBody>
+          <a:bodyPr/>
+          <a:lstStyle/>
+          <a:p>
+            <a:r>
+              <a:rPr lang="en-US" dirty="0"/>
+              <a:t>Las referencias de este trabajo son: la guía de la práctica de Martínez Barrera, del Aula Virtual de la Universidad Santo Tomás; la documentación oficial de Python, específicamente los módulos socket, json, logging y multiprocessing; la documentación de la librería psutil; y la documentación de Microsoft sobre los códigos de error de Windows Sockets. Todas estas referencias están completas, en formato APA séptima edición, en el documento técnico. Muchas gracias.</a:t>
+            </a:r>
+            <a:endParaRPr lang="en-US" dirty="0"/>
+          </a:p>
+        </p:txBody>
+      </p:sp>
+      <p:sp>
+        <p:nvSpPr>
+          <p:cNvPr id="4" name="Slide Number Placeholder 3"/>
+          <p:cNvSpPr>
+            <a:spLocks noGrp="1"/>
+          </p:cNvSpPr>
+          <p:nvPr>
+            <p:ph type="sldNum" sz="quarter" idx="10"/>
+          </p:nvPr>
+        </p:nvSpPr>
+        <p:spPr/>
+        <p:txBody>
+          <a:bodyPr/>
+          <a:lstStyle/>
+          <a:p>
+            <a:fld id="{F7021451-1387-4CA6-816F-3879F97B5CBC}" type="slidenum">
+              <a:rPr lang="en-US"/>
+              <a:t>15</a:t>
             </a:fld>
             <a:endParaRPr lang="en-US"/>
           </a:p>
@@ -1373,7 +1464,7 @@
           <a:p>
             <a:r>
               <a:rPr lang="en-US" dirty="0"/>
-              <a:t>[En pantalla: terminal con "python firmware/firmware_simulador.py" corriendo y las tramas JSON visibles]
+              <a:t>[En pantalla: doble clic en DEMO.bat; la ventana negra muestra los firmwares arrancando]
 Con un doble clic en DEMO.bat se levantan el firmware, la aplicación y este panel de monitoreo. Acá tengo el firmware simulado corriendo de verdad, no una captura de pantalla. Es un servidor TCP que escucha en el puerto 8765 y, cada segundo, emite una trama JSON con el identificador del dispositivo, temperatura, humedad y vibración. Cada siete ciclos, inyecta deliberadamente una anomalía en una de las tres variables, para que la aplicación tenga algo real que clasificar como condición anómala. Todo esto corre con la librería estándar de Python, sin ninguna dependencia externa ni hardware.</a:t>
             </a:r>
             <a:endParaRPr lang="en-US" dirty="0"/>
@@ -1462,8 +1553,8 @@
           <a:p>
             <a:r>
               <a:rPr lang="en-US" dirty="0"/>
-              <a:t>[En pantalla: editor con hsf_app/ abierto, recorriendo un archivo por responsabilidad]
-La aplicación está dividida en módulos con una responsabilidad cada uno, no en un único script. acquisition.py se conecta al firmware por socket y maneja la reconexión si se pierde la conexión. validation.py revisa que cada lectura tenga la estructura, el tipo y el rango correctos. processing.py clasifica cada lectura como normal o anómala comparando contra umbrales operativos. os_resources.py consulta CPU, memoria, disco y variables de entorno del sistema operativo anfitrión. Y app.py orquesta todo ese ciclo: lee, valida, clasifica, persiste, y nunca deja que un error de comunicación, de dato o de escritura tumbe la aplicación completa — eso es exactamente lo que pide el requisito de recuperarse de una falla sin perder el control, y lo voy a demostrar en vivo más adelante con los fallos controlados.</a:t>
+              <a:t>[En pantalla: dashboard, vista General con los 3 equipos; luego la pestaña de uno]
+Y no es uno solo: la demo levanta tres equipos a la vez, un compresor, una bomba de agua y un motor de banda, cada uno con su propio proceso, su puerto y su ritmo de anomalías. La aplicación abre una conexión por equipo, cada una en su propio hilo. El panel tiene una vista general con toda la flota, donde cada equipo conserva su color, y una pestaña por equipo con su detalle.</a:t>
             </a:r>
             <a:endParaRPr lang="en-US" dirty="0"/>
           </a:p>
@@ -1551,8 +1642,8 @@
           <a:p>
             <a:r>
               <a:rPr lang="en-US" dirty="0"/>
-              <a:t>[En pantalla: data/lecturas.csv y data/reporte_ejecucion.json reales]
-Esta es una corrida real de veinte lecturas. En el CSV se ve cada lectura con su marca de tiempo y su estado: la mayoría normales, y dos marcadas como anómalas, exactamente las que el firmware inyectó a propósito. Y este es el reporte de ejecución en JSON: trae las métricas agregadas — lecturas válidas, anómalas, errores — y además un snapshot real de los recursos del sistema operativo en el momento del cierre: uso de CPU, memoria, disco y el PID del proceso. Ningún dato de este reporte está inventado, es la salida real de haber corrido el sistema.</a:t>
+              <a:t>[En pantalla: editor con hsf_app/ abierto, recorriendo un archivo por responsabilidad]
+La aplicación está dividida en módulos con una responsabilidad cada uno, no en un único script. acquisition.py se conecta al firmware por socket y maneja la reconexión si se pierde la conexión. validation.py revisa que cada lectura tenga la estructura, el tipo y el rango correctos. processing.py clasifica cada lectura como normal o anómala comparando contra umbrales operativos. os_resources.py consulta CPU, memoria, disco y variables de entorno del sistema operativo anfitrión. Y app.py orquesta todo ese ciclo: lee, valida, clasifica, persiste, y nunca deja que un error de comunicación, de dato o de escritura tumbe la aplicación completa — eso es exactamente lo que pide el requisito de recuperarse de una falla sin perder el control, y lo voy a demostrar en vivo más adelante con los fallos controlados.</a:t>
             </a:r>
             <a:endParaRPr lang="en-US" dirty="0"/>
           </a:p>
@@ -1640,8 +1731,8 @@
           <a:p>
             <a:r>
               <a:rPr lang="en-US" dirty="0"/>
-              <a:t>[En pantalla: terminal ejecutando "pytest tests/ -v" en vivo, 64 en verde; luego docs/Matriz_Pruebas.md]
-El proyecto tiene sesenta y cuatro pruebas automáticas con pytest, escritas con test primero, implementación después — es decir, TDD real. Las voy a correr ahora mismo [ejecutar pytest tests/ -v en pantalla]. Como se ve, las sesenta y cuatro pasan. La matriz de pruebas del documento técnico cruza cada requisito funcional con su prueba automática y, cuando corresponde, con una corrida manual real contra el sistema completo — no son pruebas teóricas, son pruebas que de verdad se ejecutaron.</a:t>
+              <a:t>[En pantalla: data/lecturas.csv y data/reporte_ejecucion.json reales]
+Esta es una corrida real de veinte lecturas. En el CSV se ve cada lectura con su marca de tiempo y su estado: la mayoría normales, y dos marcadas como anómalas, exactamente las que el firmware inyectó a propósito. Y este es el reporte de ejecución en JSON: trae las métricas agregadas — lecturas válidas, anómalas, errores — y además un snapshot real de los recursos del sistema operativo en el momento del cierre: uso de CPU, memoria, disco y el PID del proceso. Ningún dato de este reporte está inventado, es la salida real de haber corrido el sistema.</a:t>
             </a:r>
             <a:endParaRPr lang="en-US" dirty="0"/>
           </a:p>
@@ -1729,8 +1820,8 @@
           <a:p>
             <a:r>
               <a:rPr lang="en-US" dirty="0"/>
-              <a:t>[En pantalla: logs/sistema.log y el fallo 6 de docs/Fallos_Controlados.md]
-Ahora lo más importante: qué pasa cuando algo falla. Desde este panel provoco fallos reales. Fuerzo una anomalía y aparece el punto rojo. Mando un dato corrupto y un valor fuera de rango: suben los contadores, y el sistema sigue leyendo. Ahora detengo el firmware: el estado pasa a reconectando y en el registro se ven los reintentos con espera creciente. Lo reinicio, y la aplicación se reconecta sola, sin reiniciarla. Por último saturo la CPU: la gráfica sube casi al cien por ciento y la integración sigue funcionando. Estos seis fallos, con su salida de consola real, están documentados en el repositorio.</a:t>
+              <a:t>[En pantalla: terminal ejecutando "pytest tests/ -v" en vivo, 78 en verde; luego docs/Matriz_Pruebas.md]
+El proyecto tiene setenta y ocho pruebas automáticas con pytest, escritas con test primero, implementación después — es decir, TDD real. Las voy a correr ahora mismo [ejecutar pytest tests/ -v en pantalla]. Como se ve, las setenta y ocho pasan. La matriz de pruebas del documento técnico cruza cada requisito funcional con su prueba automática y, cuando corresponde, con una corrida manual real contra el sistema completo — no son pruebas teóricas, son pruebas que de verdad se ejecutaron.</a:t>
             </a:r>
             <a:endParaRPr lang="en-US" dirty="0"/>
           </a:p>
@@ -3377,7 +3468,7 @@
                   <a:schemeClr val="tx1"/>
                 </a:solidFill>
               </a:rPr>
-              <a:t>Indicadores técnicos</a:t>
+              <a:t>Fallos controlados</a:t>
             </a:r>
             <a:endParaRPr lang="en-US" sz="3600" dirty="0"/>
           </a:p>
@@ -3385,18 +3476,18 @@
       </p:sp>
       <p:sp>
         <p:nvSpPr>
-          <p:cNvPr id="4" name="tarjeta-189"/>
+          <p:cNvPr id="4" name="tarjeta-193"/>
           <p:cNvSpPr/>
           <p:nvPr/>
         </p:nvSpPr>
         <p:spPr>
           <a:xfrm>
-            <a:off x="457200" y="1097280"/>
-            <a:ext cx="3977640" cy="1325880"/>
+            <a:off x="457200" y="1143000"/>
+            <a:ext cx="2560320" cy="1417320"/>
           </a:xfrm>
           <a:prstGeom prst="roundRect">
             <a:avLst>
-              <a:gd name="adj" fmla="val 6897"/>
+              <a:gd name="adj" fmla="val 6452"/>
             </a:avLst>
           </a:prstGeom>
           <a:solidFill>
@@ -3407,14 +3498,52 @@
       </p:sp>
       <p:sp>
         <p:nvSpPr>
-          <p:cNvPr id="5" name="texto-190"/>
+          <p:cNvPr id="5" name="numero-194"/>
           <p:cNvSpPr txBox="1"/>
           <p:nvPr/>
         </p:nvSpPr>
         <p:spPr>
           <a:xfrm>
-            <a:off x="685800" y="1097280"/>
-            <a:ext cx="1691640" cy="1325880"/>
+            <a:off x="640080" y="1325880"/>
+            <a:ext cx="411480" cy="411480"/>
+          </a:xfrm>
+          <a:prstGeom prst="ellipse">
+            <a:avLst/>
+          </a:prstGeom>
+          <a:solidFill>
+            <a:schemeClr val="accent6"/>
+          </a:solidFill>
+          <a:ln/>
+        </p:spPr>
+        <p:txBody>
+          <a:bodyPr wrap="square" lIns="0" tIns="0" rIns="0" bIns="0" rtlCol="0" anchor="ctr"/>
+          <a:lstStyle/>
+          <a:p>
+            <a:pPr algn="ctr" indent="0" marL="0">
+              <a:buNone/>
+            </a:pPr>
+            <a:r>
+              <a:rPr lang="en-US" sz="1400" b="1" dirty="0">
+                <a:solidFill>
+                  <a:schemeClr val="bg1"/>
+                </a:solidFill>
+              </a:rPr>
+              <a:t>1</a:t>
+            </a:r>
+            <a:endParaRPr lang="en-US" sz="1400" dirty="0"/>
+          </a:p>
+        </p:txBody>
+      </p:sp>
+      <p:sp>
+        <p:nvSpPr>
+          <p:cNvPr id="6" name="texto-195"/>
+          <p:cNvSpPr txBox="1"/>
+          <p:nvPr/>
+        </p:nvSpPr>
+        <p:spPr>
+          <a:xfrm>
+            <a:off x="1170432" y="1325880"/>
+            <a:ext cx="1737360" cy="411480"/>
           </a:xfrm>
           <a:prstGeom prst="rect">
             <a:avLst/>
@@ -3430,27 +3559,27 @@
               <a:buNone/>
             </a:pPr>
             <a:r>
-              <a:rPr lang="en-US" sz="3200" b="1" dirty="0">
-                <a:solidFill>
-                  <a:schemeClr val="accent2"/>
-                </a:solidFill>
-              </a:rPr>
-              <a:t>97.6 %</a:t>
-            </a:r>
-            <a:endParaRPr lang="en-US" sz="3200" dirty="0"/>
-          </a:p>
-        </p:txBody>
-      </p:sp>
-      <p:sp>
-        <p:nvSpPr>
-          <p:cNvPr id="6" name="texto-191"/>
+              <a:rPr lang="en-US" sz="1400" b="1" dirty="0">
+                <a:solidFill>
+                  <a:schemeClr val="tx1"/>
+                </a:solidFill>
+              </a:rPr>
+              <a:t>Fuente detenida</a:t>
+            </a:r>
+            <a:endParaRPr lang="en-US" sz="1400" dirty="0"/>
+          </a:p>
+        </p:txBody>
+      </p:sp>
+      <p:sp>
+        <p:nvSpPr>
+          <p:cNvPr id="7" name="texto-196"/>
           <p:cNvSpPr txBox="1"/>
           <p:nvPr/>
         </p:nvSpPr>
         <p:spPr>
           <a:xfrm>
-            <a:off x="2423160" y="1280160"/>
-            <a:ext cx="1920240" cy="960120"/>
+            <a:off x="640080" y="1874520"/>
+            <a:ext cx="2240280" cy="566928"/>
           </a:xfrm>
           <a:prstGeom prst="rect">
             <a:avLst/>
@@ -3459,52 +3588,38 @@
           <a:ln/>
         </p:spPr>
         <p:txBody>
-          <a:bodyPr wrap="square" lIns="0" tIns="0" rIns="0" bIns="0" rtlCol="0" anchor="ctr"/>
-          <a:lstStyle/>
-          <a:p>
-            <a:pPr indent="0" marL="0">
-              <a:buNone/>
-            </a:pPr>
-            <a:r>
-              <a:rPr lang="en-US" sz="1600" b="1" dirty="0">
+          <a:bodyPr wrap="square" lIns="0" tIns="0" rIns="0" bIns="0" rtlCol="0" anchor="t"/>
+          <a:lstStyle/>
+          <a:p>
+            <a:pPr indent="0" marL="0">
+              <a:buNone/>
+            </a:pPr>
+            <a:r>
+              <a:rPr lang="en-US" sz="1400" dirty="0">
                 <a:solidFill>
                   <a:schemeClr val="tx1"/>
                 </a:solidFill>
               </a:rPr>
-              <a:t>Disponibilidad</a:t>
-            </a:r>
-            <a:endParaRPr lang="en-US" sz="1600" dirty="0"/>
-          </a:p>
-          <a:p>
-            <a:pPr indent="0" marL="0">
-              <a:buNone/>
-            </a:pPr>
-            <a:r>
-              <a:rPr lang="en-US" sz="1200" dirty="0">
-                <a:solidFill>
-                  <a:schemeClr val="tx1"/>
-                </a:solidFill>
-              </a:rPr>
-              <a:t>meta ≥ 95 % · 40/41 intentos</a:t>
-            </a:r>
-            <a:endParaRPr lang="en-US" sz="1600" dirty="0"/>
-          </a:p>
-        </p:txBody>
-      </p:sp>
-      <p:sp>
-        <p:nvSpPr>
-          <p:cNvPr id="7" name="tarjeta-192"/>
+              <a:t>3 intentos fallidos y cierre controlado, sin traceback</a:t>
+            </a:r>
+            <a:endParaRPr lang="en-US" sz="1400" dirty="0"/>
+          </a:p>
+        </p:txBody>
+      </p:sp>
+      <p:sp>
+        <p:nvSpPr>
+          <p:cNvPr id="8" name="tarjeta-197"/>
           <p:cNvSpPr/>
           <p:nvPr/>
         </p:nvSpPr>
         <p:spPr>
           <a:xfrm>
-            <a:off x="4709160" y="1097280"/>
-            <a:ext cx="3977640" cy="1325880"/>
+            <a:off x="3291840" y="1143000"/>
+            <a:ext cx="2560320" cy="1417320"/>
           </a:xfrm>
           <a:prstGeom prst="roundRect">
             <a:avLst>
-              <a:gd name="adj" fmla="val 6897"/>
+              <a:gd name="adj" fmla="val 6452"/>
             </a:avLst>
           </a:prstGeom>
           <a:solidFill>
@@ -3515,14 +3630,52 @@
       </p:sp>
       <p:sp>
         <p:nvSpPr>
-          <p:cNvPr id="8" name="texto-193"/>
+          <p:cNvPr id="9" name="numero-198"/>
           <p:cNvSpPr txBox="1"/>
           <p:nvPr/>
         </p:nvSpPr>
         <p:spPr>
           <a:xfrm>
-            <a:off x="4937760" y="1097280"/>
-            <a:ext cx="1691640" cy="1325880"/>
+            <a:off x="3474720" y="1325880"/>
+            <a:ext cx="411480" cy="411480"/>
+          </a:xfrm>
+          <a:prstGeom prst="ellipse">
+            <a:avLst/>
+          </a:prstGeom>
+          <a:solidFill>
+            <a:schemeClr val="accent6"/>
+          </a:solidFill>
+          <a:ln/>
+        </p:spPr>
+        <p:txBody>
+          <a:bodyPr wrap="square" lIns="0" tIns="0" rIns="0" bIns="0" rtlCol="0" anchor="ctr"/>
+          <a:lstStyle/>
+          <a:p>
+            <a:pPr algn="ctr" indent="0" marL="0">
+              <a:buNone/>
+            </a:pPr>
+            <a:r>
+              <a:rPr lang="en-US" sz="1400" b="1" dirty="0">
+                <a:solidFill>
+                  <a:schemeClr val="bg1"/>
+                </a:solidFill>
+              </a:rPr>
+              <a:t>2</a:t>
+            </a:r>
+            <a:endParaRPr lang="en-US" sz="1400" dirty="0"/>
+          </a:p>
+        </p:txBody>
+      </p:sp>
+      <p:sp>
+        <p:nvSpPr>
+          <p:cNvPr id="10" name="texto-199"/>
+          <p:cNvSpPr txBox="1"/>
+          <p:nvPr/>
+        </p:nvSpPr>
+        <p:spPr>
+          <a:xfrm>
+            <a:off x="4005072" y="1325880"/>
+            <a:ext cx="1737360" cy="411480"/>
           </a:xfrm>
           <a:prstGeom prst="rect">
             <a:avLst/>
@@ -3538,27 +3691,27 @@
               <a:buNone/>
             </a:pPr>
             <a:r>
-              <a:rPr lang="en-US" sz="3200" b="1" dirty="0">
-                <a:solidFill>
-                  <a:schemeClr val="accent3"/>
-                </a:solidFill>
-              </a:rPr>
-              <a:t>0.25 ms</a:t>
-            </a:r>
-            <a:endParaRPr lang="en-US" sz="3200" dirty="0"/>
-          </a:p>
-        </p:txBody>
-      </p:sp>
-      <p:sp>
-        <p:nvSpPr>
-          <p:cNvPr id="9" name="texto-194"/>
+              <a:rPr lang="en-US" sz="1400" b="1" dirty="0">
+                <a:solidFill>
+                  <a:schemeClr val="tx1"/>
+                </a:solidFill>
+              </a:rPr>
+              <a:t>Dato corrupto</a:t>
+            </a:r>
+            <a:endParaRPr lang="en-US" sz="1400" dirty="0"/>
+          </a:p>
+        </p:txBody>
+      </p:sp>
+      <p:sp>
+        <p:nvSpPr>
+          <p:cNvPr id="11" name="texto-200"/>
           <p:cNvSpPr txBox="1"/>
           <p:nvPr/>
         </p:nvSpPr>
         <p:spPr>
           <a:xfrm>
-            <a:off x="6675120" y="1280160"/>
-            <a:ext cx="1920240" cy="960120"/>
+            <a:off x="3474720" y="1874520"/>
+            <a:ext cx="2240280" cy="566928"/>
           </a:xfrm>
           <a:prstGeom prst="rect">
             <a:avLst/>
@@ -3567,52 +3720,38 @@
           <a:ln/>
         </p:spPr>
         <p:txBody>
-          <a:bodyPr wrap="square" lIns="0" tIns="0" rIns="0" bIns="0" rtlCol="0" anchor="ctr"/>
-          <a:lstStyle/>
-          <a:p>
-            <a:pPr indent="0" marL="0">
-              <a:buNone/>
-            </a:pPr>
-            <a:r>
-              <a:rPr lang="en-US" sz="1600" b="1" dirty="0">
+          <a:bodyPr wrap="square" lIns="0" tIns="0" rIns="0" bIns="0" rtlCol="0" anchor="t"/>
+          <a:lstStyle/>
+          <a:p>
+            <a:pPr indent="0" marL="0">
+              <a:buNone/>
+            </a:pPr>
+            <a:r>
+              <a:rPr lang="en-US" sz="1400" dirty="0">
                 <a:solidFill>
                   <a:schemeClr val="tx1"/>
                 </a:solidFill>
               </a:rPr>
-              <a:t>Latencia promedio</a:t>
-            </a:r>
-            <a:endParaRPr lang="en-US" sz="1600" dirty="0"/>
-          </a:p>
-          <a:p>
-            <a:pPr indent="0" marL="0">
-              <a:buNone/>
-            </a:pPr>
-            <a:r>
-              <a:rPr lang="en-US" sz="1200" dirty="0">
-                <a:solidFill>
-                  <a:schemeClr val="tx1"/>
-                </a:solidFill>
-              </a:rPr>
-              <a:t>máx. 0.375 ms · loopback</a:t>
-            </a:r>
-            <a:endParaRPr lang="en-US" sz="1600" dirty="0"/>
-          </a:p>
-        </p:txBody>
-      </p:sp>
-      <p:sp>
-        <p:nvSpPr>
-          <p:cNvPr id="10" name="tarjeta-195"/>
+              <a:t>Línea descartada; la conexión sigue leyendo</a:t>
+            </a:r>
+            <a:endParaRPr lang="en-US" sz="1400" dirty="0"/>
+          </a:p>
+        </p:txBody>
+      </p:sp>
+      <p:sp>
+        <p:nvSpPr>
+          <p:cNvPr id="12" name="tarjeta-201"/>
           <p:cNvSpPr/>
           <p:nvPr/>
         </p:nvSpPr>
         <p:spPr>
           <a:xfrm>
-            <a:off x="457200" y="2606040"/>
-            <a:ext cx="3977640" cy="1325880"/>
+            <a:off x="6126480" y="1143000"/>
+            <a:ext cx="2560320" cy="1417320"/>
           </a:xfrm>
           <a:prstGeom prst="roundRect">
             <a:avLst>
-              <a:gd name="adj" fmla="val 6897"/>
+              <a:gd name="adj" fmla="val 6452"/>
             </a:avLst>
           </a:prstGeom>
           <a:solidFill>
@@ -3623,14 +3762,52 @@
       </p:sp>
       <p:sp>
         <p:nvSpPr>
-          <p:cNvPr id="11" name="texto-196"/>
+          <p:cNvPr id="13" name="numero-202"/>
           <p:cNvSpPr txBox="1"/>
           <p:nvPr/>
         </p:nvSpPr>
         <p:spPr>
           <a:xfrm>
-            <a:off x="685800" y="2606040"/>
-            <a:ext cx="1691640" cy="1325880"/>
+            <a:off x="6309360" y="1325880"/>
+            <a:ext cx="411480" cy="411480"/>
+          </a:xfrm>
+          <a:prstGeom prst="ellipse">
+            <a:avLst/>
+          </a:prstGeom>
+          <a:solidFill>
+            <a:schemeClr val="accent6"/>
+          </a:solidFill>
+          <a:ln/>
+        </p:spPr>
+        <p:txBody>
+          <a:bodyPr wrap="square" lIns="0" tIns="0" rIns="0" bIns="0" rtlCol="0" anchor="ctr"/>
+          <a:lstStyle/>
+          <a:p>
+            <a:pPr algn="ctr" indent="0" marL="0">
+              <a:buNone/>
+            </a:pPr>
+            <a:r>
+              <a:rPr lang="en-US" sz="1400" b="1" dirty="0">
+                <a:solidFill>
+                  <a:schemeClr val="bg1"/>
+                </a:solidFill>
+              </a:rPr>
+              <a:t>3</a:t>
+            </a:r>
+            <a:endParaRPr lang="en-US" sz="1400" dirty="0"/>
+          </a:p>
+        </p:txBody>
+      </p:sp>
+      <p:sp>
+        <p:nvSpPr>
+          <p:cNvPr id="14" name="texto-203"/>
+          <p:cNvSpPr txBox="1"/>
+          <p:nvPr/>
+        </p:nvSpPr>
+        <p:spPr>
+          <a:xfrm>
+            <a:off x="6839712" y="1325880"/>
+            <a:ext cx="1737360" cy="411480"/>
           </a:xfrm>
           <a:prstGeom prst="rect">
             <a:avLst/>
@@ -3646,27 +3823,27 @@
               <a:buNone/>
             </a:pPr>
             <a:r>
-              <a:rPr lang="en-US" sz="3200" b="1" dirty="0">
-                <a:solidFill>
-                  <a:schemeClr val="accent4"/>
-                </a:solidFill>
-              </a:rPr>
-              <a:t>98.4 %</a:t>
-            </a:r>
-            <a:endParaRPr lang="en-US" sz="3200" dirty="0"/>
-          </a:p>
-        </p:txBody>
-      </p:sp>
-      <p:sp>
-        <p:nvSpPr>
-          <p:cNvPr id="12" name="texto-197"/>
+              <a:rPr lang="en-US" sz="1400" b="1" dirty="0">
+                <a:solidFill>
+                  <a:schemeClr val="tx1"/>
+                </a:solidFill>
+              </a:rPr>
+              <a:t>Ruta sin permisos</a:t>
+            </a:r>
+            <a:endParaRPr lang="en-US" sz="1400" dirty="0"/>
+          </a:p>
+        </p:txBody>
+      </p:sp>
+      <p:sp>
+        <p:nvSpPr>
+          <p:cNvPr id="15" name="texto-204"/>
           <p:cNvSpPr txBox="1"/>
           <p:nvPr/>
         </p:nvSpPr>
         <p:spPr>
           <a:xfrm>
-            <a:off x="2423160" y="2788920"/>
-            <a:ext cx="1920240" cy="960120"/>
+            <a:off x="6309360" y="1874520"/>
+            <a:ext cx="2240280" cy="566928"/>
           </a:xfrm>
           <a:prstGeom prst="rect">
             <a:avLst/>
@@ -3675,52 +3852,38 @@
           <a:ln/>
         </p:spPr>
         <p:txBody>
-          <a:bodyPr wrap="square" lIns="0" tIns="0" rIns="0" bIns="0" rtlCol="0" anchor="ctr"/>
-          <a:lstStyle/>
-          <a:p>
-            <a:pPr indent="0" marL="0">
-              <a:buNone/>
-            </a:pPr>
-            <a:r>
-              <a:rPr lang="en-US" sz="1600" b="1" dirty="0">
+          <a:bodyPr wrap="square" lIns="0" tIns="0" rIns="0" bIns="0" rtlCol="0" anchor="t"/>
+          <a:lstStyle/>
+          <a:p>
+            <a:pPr indent="0" marL="0">
+              <a:buNone/>
+            </a:pPr>
+            <a:r>
+              <a:rPr lang="en-US" sz="1400" dirty="0">
                 <a:solidFill>
                   <a:schemeClr val="tx1"/>
                 </a:solidFill>
               </a:rPr>
-              <a:t>Datos válidos</a:t>
-            </a:r>
-            <a:endParaRPr lang="en-US" sz="1600" dirty="0"/>
-          </a:p>
-          <a:p>
-            <a:pPr indent="0" marL="0">
-              <a:buNone/>
-            </a:pPr>
-            <a:r>
-              <a:rPr lang="en-US" sz="1200" dirty="0">
-                <a:solidFill>
-                  <a:schemeClr val="tx1"/>
-                </a:solidFill>
-              </a:rPr>
-              <a:t>meta ≥ 98 % · 63/64 lecturas</a:t>
-            </a:r>
-            <a:endParaRPr lang="en-US" sz="1600" dirty="0"/>
-          </a:p>
-        </p:txBody>
-      </p:sp>
-      <p:sp>
-        <p:nvSpPr>
-          <p:cNvPr id="13" name="tarjeta-198"/>
+              <a:t>OSError contado; la app sigue corriendo</a:t>
+            </a:r>
+            <a:endParaRPr lang="en-US" sz="1400" dirty="0"/>
+          </a:p>
+        </p:txBody>
+      </p:sp>
+      <p:sp>
+        <p:nvSpPr>
+          <p:cNvPr id="16" name="tarjeta-205"/>
           <p:cNvSpPr/>
           <p:nvPr/>
         </p:nvSpPr>
         <p:spPr>
           <a:xfrm>
-            <a:off x="4709160" y="2606040"/>
-            <a:ext cx="3977640" cy="1325880"/>
+            <a:off x="457200" y="2788920"/>
+            <a:ext cx="2560320" cy="1417320"/>
           </a:xfrm>
           <a:prstGeom prst="roundRect">
             <a:avLst>
-              <a:gd name="adj" fmla="val 6897"/>
+              <a:gd name="adj" fmla="val 6452"/>
             </a:avLst>
           </a:prstGeom>
           <a:solidFill>
@@ -3731,14 +3894,52 @@
       </p:sp>
       <p:sp>
         <p:nvSpPr>
-          <p:cNvPr id="14" name="texto-199"/>
+          <p:cNvPr id="17" name="numero-206"/>
           <p:cNvSpPr txBox="1"/>
           <p:nvPr/>
         </p:nvSpPr>
         <p:spPr>
           <a:xfrm>
-            <a:off x="4937760" y="2606040"/>
-            <a:ext cx="1691640" cy="1325880"/>
+            <a:off x="640080" y="2971800"/>
+            <a:ext cx="411480" cy="411480"/>
+          </a:xfrm>
+          <a:prstGeom prst="ellipse">
+            <a:avLst/>
+          </a:prstGeom>
+          <a:solidFill>
+            <a:schemeClr val="accent6"/>
+          </a:solidFill>
+          <a:ln/>
+        </p:spPr>
+        <p:txBody>
+          <a:bodyPr wrap="square" lIns="0" tIns="0" rIns="0" bIns="0" rtlCol="0" anchor="ctr"/>
+          <a:lstStyle/>
+          <a:p>
+            <a:pPr algn="ctr" indent="0" marL="0">
+              <a:buNone/>
+            </a:pPr>
+            <a:r>
+              <a:rPr lang="en-US" sz="1400" b="1" dirty="0">
+                <a:solidFill>
+                  <a:schemeClr val="bg1"/>
+                </a:solidFill>
+              </a:rPr>
+              <a:t>4</a:t>
+            </a:r>
+            <a:endParaRPr lang="en-US" sz="1400" dirty="0"/>
+          </a:p>
+        </p:txBody>
+      </p:sp>
+      <p:sp>
+        <p:nvSpPr>
+          <p:cNvPr id="18" name="texto-207"/>
+          <p:cNvSpPr txBox="1"/>
+          <p:nvPr/>
+        </p:nvSpPr>
+        <p:spPr>
+          <a:xfrm>
+            <a:off x="1170432" y="2971800"/>
+            <a:ext cx="1737360" cy="411480"/>
           </a:xfrm>
           <a:prstGeom prst="rect">
             <a:avLst/>
@@ -3754,27 +3955,27 @@
               <a:buNone/>
             </a:pPr>
             <a:r>
-              <a:rPr lang="en-US" sz="3200" b="1" dirty="0">
-                <a:solidFill>
-                  <a:schemeClr val="accent1"/>
-                </a:solidFill>
-              </a:rPr>
-              <a:t>3.57 s</a:t>
-            </a:r>
-            <a:endParaRPr lang="en-US" sz="3200" dirty="0"/>
-          </a:p>
-        </p:txBody>
-      </p:sp>
-      <p:sp>
-        <p:nvSpPr>
-          <p:cNvPr id="15" name="texto-200"/>
+              <a:rPr lang="en-US" sz="1400" b="1" dirty="0">
+                <a:solidFill>
+                  <a:schemeClr val="tx1"/>
+                </a:solidFill>
+              </a:rPr>
+              <a:t>Fuera de rango</a:t>
+            </a:r>
+            <a:endParaRPr lang="en-US" sz="1400" dirty="0"/>
+          </a:p>
+        </p:txBody>
+      </p:sp>
+      <p:sp>
+        <p:nvSpPr>
+          <p:cNvPr id="19" name="texto-208"/>
           <p:cNvSpPr txBox="1"/>
           <p:nvPr/>
         </p:nvSpPr>
         <p:spPr>
           <a:xfrm>
-            <a:off x="6675120" y="2788920"/>
-            <a:ext cx="1920240" cy="960120"/>
+            <a:off x="640080" y="3520440"/>
+            <a:ext cx="2240280" cy="566928"/>
           </a:xfrm>
           <a:prstGeom prst="rect">
             <a:avLst/>
@@ -3783,52 +3984,38 @@
           <a:ln/>
         </p:spPr>
         <p:txBody>
-          <a:bodyPr wrap="square" lIns="0" tIns="0" rIns="0" bIns="0" rtlCol="0" anchor="ctr"/>
-          <a:lstStyle/>
-          <a:p>
-            <a:pPr indent="0" marL="0">
-              <a:buNone/>
-            </a:pPr>
-            <a:r>
-              <a:rPr lang="en-US" sz="1600" b="1" dirty="0">
+          <a:bodyPr wrap="square" lIns="0" tIns="0" rIns="0" bIns="0" rtlCol="0" anchor="t"/>
+          <a:lstStyle/>
+          <a:p>
+            <a:pPr indent="0" marL="0">
+              <a:buNone/>
+            </a:pPr>
+            <a:r>
+              <a:rPr lang="en-US" sz="1400" dirty="0">
                 <a:solidFill>
                   <a:schemeClr val="tx1"/>
                 </a:solidFill>
               </a:rPr>
-              <a:t>Recuperación</a:t>
-            </a:r>
-            <a:endParaRPr lang="en-US" sz="1600" dirty="0"/>
-          </a:p>
-          <a:p>
-            <a:pPr indent="0" marL="0">
-              <a:buNone/>
-            </a:pPr>
-            <a:r>
-              <a:rPr lang="en-US" sz="1200" dirty="0">
-                <a:solidFill>
-                  <a:schemeClr val="tx1"/>
-                </a:solidFill>
-              </a:rPr>
-              <a:t>tras una caída real (fallo 6)</a:t>
-            </a:r>
-            <a:endParaRPr lang="en-US" sz="1600" dirty="0"/>
-          </a:p>
-        </p:txBody>
-      </p:sp>
-      <p:sp>
-        <p:nvSpPr>
-          <p:cNvPr id="16" name="tarjeta-201"/>
+              <a:t>Humedad de 250 % rechazada por validación</a:t>
+            </a:r>
+            <a:endParaRPr lang="en-US" sz="1400" dirty="0"/>
+          </a:p>
+        </p:txBody>
+      </p:sp>
+      <p:sp>
+        <p:nvSpPr>
+          <p:cNvPr id="20" name="tarjeta-209"/>
           <p:cNvSpPr/>
           <p:nvPr/>
         </p:nvSpPr>
         <p:spPr>
           <a:xfrm>
-            <a:off x="457200" y="4114800"/>
-            <a:ext cx="8229600" cy="502920"/>
+            <a:off x="3291840" y="2788920"/>
+            <a:ext cx="2560320" cy="1417320"/>
           </a:xfrm>
           <a:prstGeom prst="roundRect">
             <a:avLst>
-              <a:gd name="adj" fmla="val 18182"/>
+              <a:gd name="adj" fmla="val 6452"/>
             </a:avLst>
           </a:prstGeom>
           <a:solidFill>
@@ -3839,14 +4026,14 @@
       </p:sp>
       <p:sp>
         <p:nvSpPr>
-          <p:cNvPr id="17" name="circulo-202"/>
-          <p:cNvSpPr/>
-          <p:nvPr/>
-        </p:nvSpPr>
-        <p:spPr>
-          <a:xfrm>
-            <a:off x="594360" y="4178808"/>
-            <a:ext cx="365760" cy="365760"/>
+          <p:cNvPr id="21" name="numero-210"/>
+          <p:cNvSpPr txBox="1"/>
+          <p:nvPr/>
+        </p:nvSpPr>
+        <p:spPr>
+          <a:xfrm>
+            <a:off x="3474720" y="2971800"/>
+            <a:ext cx="411480" cy="411480"/>
           </a:xfrm>
           <a:prstGeom prst="ellipse">
             <a:avLst/>
@@ -3856,41 +4043,35 @@
           </a:solidFill>
           <a:ln/>
         </p:spPr>
-      </p:sp>
-      <p:pic>
-        <p:nvPicPr>
-          <p:cNvPr id="18" name="icono-203" descr="preencoded.png">    </p:cNvPr>
-          <p:cNvPicPr>
-            <a:picLocks noChangeAspect="1"/>
-          </p:cNvPicPr>
-          <p:nvPr/>
-        </p:nvPicPr>
-        <p:blipFill>
-          <a:blip r:embed="rId1"/>
-          <a:stretch>
-            <a:fillRect/>
-          </a:stretch>
-        </p:blipFill>
-        <p:spPr>
-          <a:xfrm>
-            <a:off x="674827" y="4259275"/>
-            <a:ext cx="204826" cy="204826"/>
-          </a:xfrm>
-          <a:prstGeom prst="rect">
-            <a:avLst/>
-          </a:prstGeom>
-        </p:spPr>
-      </p:pic>
-      <p:sp>
-        <p:nvSpPr>
-          <p:cNvPr id="19" name="texto-204"/>
+        <p:txBody>
+          <a:bodyPr wrap="square" lIns="0" tIns="0" rIns="0" bIns="0" rtlCol="0" anchor="ctr"/>
+          <a:lstStyle/>
+          <a:p>
+            <a:pPr algn="ctr" indent="0" marL="0">
+              <a:buNone/>
+            </a:pPr>
+            <a:r>
+              <a:rPr lang="en-US" sz="1400" b="1" dirty="0">
+                <a:solidFill>
+                  <a:schemeClr val="bg1"/>
+                </a:solidFill>
+              </a:rPr>
+              <a:t>5</a:t>
+            </a:r>
+            <a:endParaRPr lang="en-US" sz="1400" dirty="0"/>
+          </a:p>
+        </p:txBody>
+      </p:sp>
+      <p:sp>
+        <p:nvSpPr>
+          <p:cNvPr id="22" name="texto-211"/>
           <p:cNvSpPr txBox="1"/>
           <p:nvPr/>
         </p:nvSpPr>
         <p:spPr>
           <a:xfrm>
-            <a:off x="1097280" y="4114800"/>
-            <a:ext cx="7498080" cy="502920"/>
+            <a:off x="4005072" y="2971800"/>
+            <a:ext cx="1737360" cy="411480"/>
           </a:xfrm>
           <a:prstGeom prst="rect">
             <a:avLst/>
@@ -3906,14 +4087,218 @@
               <a:buNone/>
             </a:pPr>
             <a:r>
-              <a:rPr lang="en-US" sz="1200" dirty="0">
+              <a:rPr lang="en-US" sz="1400" b="1" dirty="0">
                 <a:solidFill>
                   <a:schemeClr val="tx1"/>
                 </a:solidFill>
               </a:rPr>
-              <a:t>Tasa de errores: 6.1 % agregada, porque incluye corridas con fallos inyectados a propósito; en operación normal fue 0 %.</a:t>
-            </a:r>
-            <a:endParaRPr lang="en-US" sz="1200" dirty="0"/>
+              <a:t>CPU saturada</a:t>
+            </a:r>
+            <a:endParaRPr lang="en-US" sz="1400" dirty="0"/>
+          </a:p>
+        </p:txBody>
+      </p:sp>
+      <p:sp>
+        <p:nvSpPr>
+          <p:cNvPr id="23" name="texto-212"/>
+          <p:cNvSpPr txBox="1"/>
+          <p:nvPr/>
+        </p:nvSpPr>
+        <p:spPr>
+          <a:xfrm>
+            <a:off x="3474720" y="3520440"/>
+            <a:ext cx="2240280" cy="566928"/>
+          </a:xfrm>
+          <a:prstGeom prst="rect">
+            <a:avLst/>
+          </a:prstGeom>
+          <a:noFill/>
+          <a:ln/>
+        </p:spPr>
+        <p:txBody>
+          <a:bodyPr wrap="square" lIns="0" tIns="0" rIns="0" bIns="0" rtlCol="0" anchor="t"/>
+          <a:lstStyle/>
+          <a:p>
+            <a:pPr indent="0" marL="0">
+              <a:buNone/>
+            </a:pPr>
+            <a:r>
+              <a:rPr lang="en-US" sz="1400" dirty="0">
+                <a:solidFill>
+                  <a:schemeClr val="tx1"/>
+                </a:solidFill>
+              </a:rPr>
+              <a:t>25 % → 93.9 %; el SO sigue respondiendo</a:t>
+            </a:r>
+            <a:endParaRPr lang="en-US" sz="1400" dirty="0"/>
+          </a:p>
+        </p:txBody>
+      </p:sp>
+      <p:sp>
+        <p:nvSpPr>
+          <p:cNvPr id="24" name="tarjeta-213"/>
+          <p:cNvSpPr/>
+          <p:nvPr/>
+        </p:nvSpPr>
+        <p:spPr>
+          <a:xfrm>
+            <a:off x="6126480" y="2788920"/>
+            <a:ext cx="2560320" cy="1417320"/>
+          </a:xfrm>
+          <a:prstGeom prst="roundRect">
+            <a:avLst>
+              <a:gd name="adj" fmla="val 6452"/>
+            </a:avLst>
+          </a:prstGeom>
+          <a:solidFill>
+            <a:schemeClr val="accent4"/>
+          </a:solidFill>
+          <a:ln/>
+        </p:spPr>
+      </p:sp>
+      <p:sp>
+        <p:nvSpPr>
+          <p:cNvPr id="25" name="numero-214"/>
+          <p:cNvSpPr txBox="1"/>
+          <p:nvPr/>
+        </p:nvSpPr>
+        <p:spPr>
+          <a:xfrm>
+            <a:off x="6309360" y="2971800"/>
+            <a:ext cx="411480" cy="411480"/>
+          </a:xfrm>
+          <a:prstGeom prst="ellipse">
+            <a:avLst/>
+          </a:prstGeom>
+          <a:solidFill>
+            <a:schemeClr val="bg1"/>
+          </a:solidFill>
+          <a:ln/>
+        </p:spPr>
+        <p:txBody>
+          <a:bodyPr wrap="square" lIns="0" tIns="0" rIns="0" bIns="0" rtlCol="0" anchor="ctr"/>
+          <a:lstStyle/>
+          <a:p>
+            <a:pPr algn="ctr" indent="0" marL="0">
+              <a:buNone/>
+            </a:pPr>
+            <a:r>
+              <a:rPr lang="en-US" sz="1400" b="1" dirty="0">
+                <a:solidFill>
+                  <a:schemeClr val="accent4"/>
+                </a:solidFill>
+              </a:rPr>
+              <a:t>6</a:t>
+            </a:r>
+            <a:endParaRPr lang="en-US" sz="1400" dirty="0"/>
+          </a:p>
+        </p:txBody>
+      </p:sp>
+      <p:sp>
+        <p:nvSpPr>
+          <p:cNvPr id="26" name="texto-215"/>
+          <p:cNvSpPr txBox="1"/>
+          <p:nvPr/>
+        </p:nvSpPr>
+        <p:spPr>
+          <a:xfrm>
+            <a:off x="6839712" y="2971800"/>
+            <a:ext cx="1737360" cy="411480"/>
+          </a:xfrm>
+          <a:prstGeom prst="rect">
+            <a:avLst/>
+          </a:prstGeom>
+          <a:noFill/>
+          <a:ln/>
+        </p:spPr>
+        <p:txBody>
+          <a:bodyPr wrap="square" lIns="0" tIns="0" rIns="0" bIns="0" rtlCol="0" anchor="ctr"/>
+          <a:lstStyle/>
+          <a:p>
+            <a:pPr indent="0" marL="0">
+              <a:buNone/>
+            </a:pPr>
+            <a:r>
+              <a:rPr lang="en-US" sz="1400" b="1" dirty="0">
+                <a:solidFill>
+                  <a:schemeClr val="bg1"/>
+                </a:solidFill>
+              </a:rPr>
+              <a:t>Red interrumpida</a:t>
+            </a:r>
+            <a:endParaRPr lang="en-US" sz="1400" dirty="0"/>
+          </a:p>
+        </p:txBody>
+      </p:sp>
+      <p:sp>
+        <p:nvSpPr>
+          <p:cNvPr id="27" name="texto-216"/>
+          <p:cNvSpPr txBox="1"/>
+          <p:nvPr/>
+        </p:nvSpPr>
+        <p:spPr>
+          <a:xfrm>
+            <a:off x="6309360" y="3520440"/>
+            <a:ext cx="2240280" cy="566928"/>
+          </a:xfrm>
+          <a:prstGeom prst="rect">
+            <a:avLst/>
+          </a:prstGeom>
+          <a:noFill/>
+          <a:ln/>
+        </p:spPr>
+        <p:txBody>
+          <a:bodyPr wrap="square" lIns="0" tIns="0" rIns="0" bIns="0" rtlCol="0" anchor="t"/>
+          <a:lstStyle/>
+          <a:p>
+            <a:pPr indent="0" marL="0">
+              <a:buNone/>
+            </a:pPr>
+            <a:r>
+              <a:rPr lang="en-US" sz="1400" dirty="0">
+                <a:solidFill>
+                  <a:schemeClr val="bg1"/>
+                </a:solidFill>
+              </a:rPr>
+              <a:t>Reconexión en 3.57 s; 40 de 40 lecturas</a:t>
+            </a:r>
+            <a:endParaRPr lang="en-US" sz="1400" dirty="0"/>
+          </a:p>
+        </p:txBody>
+      </p:sp>
+      <p:sp>
+        <p:nvSpPr>
+          <p:cNvPr id="28" name="texto-217"/>
+          <p:cNvSpPr txBox="1"/>
+          <p:nvPr/>
+        </p:nvSpPr>
+        <p:spPr>
+          <a:xfrm>
+            <a:off x="457200" y="4434840"/>
+            <a:ext cx="8229600" cy="274320"/>
+          </a:xfrm>
+          <a:prstGeom prst="rect">
+            <a:avLst/>
+          </a:prstGeom>
+          <a:noFill/>
+          <a:ln/>
+        </p:spPr>
+        <p:txBody>
+          <a:bodyPr wrap="square" lIns="0" tIns="0" rIns="0" bIns="0" rtlCol="0" anchor="ctr"/>
+          <a:lstStyle/>
+          <a:p>
+            <a:pPr indent="0" marL="0">
+              <a:buNone/>
+            </a:pPr>
+            <a:r>
+              <a:rPr lang="en-US" sz="1100" dirty="0">
+                <a:solidFill>
+                  <a:schemeClr val="tx2"/>
+                </a:solidFill>
+              </a:rPr>
+              <a:t>Salida de consola real de cada corrida en docs/Fallos_Controlados.md</a:t>
+            </a:r>
+            <a:endParaRPr lang="en-US" sz="1100" dirty="0"/>
           </a:p>
         </p:txBody>
       </p:sp>
@@ -4019,7 +4404,7 @@
                   <a:schemeClr val="tx1"/>
                 </a:solidFill>
               </a:rPr>
-              <a:t>Preguntas de integración (1/2)</a:t>
+              <a:t>Indicadores técnicos</a:t>
             </a:r>
             <a:endParaRPr lang="en-US" sz="3600" dirty="0"/>
           </a:p>
@@ -4027,18 +4412,18 @@
       </p:sp>
       <p:sp>
         <p:nvSpPr>
-          <p:cNvPr id="4" name="tarjeta-205"/>
+          <p:cNvPr id="4" name="tarjeta-218"/>
           <p:cNvSpPr/>
           <p:nvPr/>
         </p:nvSpPr>
         <p:spPr>
           <a:xfrm>
             <a:off x="457200" y="1097280"/>
-            <a:ext cx="3977640" cy="1005840"/>
+            <a:ext cx="3977640" cy="1325880"/>
           </a:xfrm>
           <a:prstGeom prst="roundRect">
             <a:avLst>
-              <a:gd name="adj" fmla="val 9091"/>
+              <a:gd name="adj" fmla="val 6897"/>
             </a:avLst>
           </a:prstGeom>
           <a:solidFill>
@@ -4049,52 +4434,50 @@
       </p:sp>
       <p:sp>
         <p:nvSpPr>
-          <p:cNvPr id="5" name="numero-206"/>
+          <p:cNvPr id="5" name="texto-219"/>
           <p:cNvSpPr txBox="1"/>
           <p:nvPr/>
         </p:nvSpPr>
         <p:spPr>
           <a:xfrm>
-            <a:off x="594360" y="1234440"/>
-            <a:ext cx="411480" cy="411480"/>
-          </a:xfrm>
-          <a:prstGeom prst="ellipse">
-            <a:avLst/>
-          </a:prstGeom>
-          <a:solidFill>
-            <a:schemeClr val="accent2"/>
-          </a:solidFill>
+            <a:off x="685800" y="1097280"/>
+            <a:ext cx="1691640" cy="1325880"/>
+          </a:xfrm>
+          <a:prstGeom prst="rect">
+            <a:avLst/>
+          </a:prstGeom>
+          <a:noFill/>
           <a:ln/>
         </p:spPr>
         <p:txBody>
           <a:bodyPr wrap="square" lIns="0" tIns="0" rIns="0" bIns="0" rtlCol="0" anchor="ctr"/>
           <a:lstStyle/>
           <a:p>
-            <a:pPr algn="ctr" indent="0" marL="0">
-              <a:buNone/>
-            </a:pPr>
-            <a:r>
-              <a:rPr lang="en-US" sz="1400" b="1" dirty="0">
-                <a:solidFill>
-                  <a:schemeClr val="bg1"/>
-                </a:solidFill>
-              </a:rPr>
-              <a:t>1</a:t>
-            </a:r>
-            <a:endParaRPr lang="en-US" sz="1400" dirty="0"/>
-          </a:p>
-        </p:txBody>
-      </p:sp>
-      <p:sp>
-        <p:nvSpPr>
-          <p:cNvPr id="6" name="texto-207"/>
+            <a:pPr indent="0" marL="0">
+              <a:buNone/>
+            </a:pPr>
+            <a:r>
+              <a:rPr lang="en-US" sz="3200" b="1" dirty="0">
+                <a:solidFill>
+                  <a:schemeClr val="accent2"/>
+                </a:solidFill>
+              </a:rPr>
+              <a:t>97.6 %</a:t>
+            </a:r>
+            <a:endParaRPr lang="en-US" sz="3200" dirty="0"/>
+          </a:p>
+        </p:txBody>
+      </p:sp>
+      <p:sp>
+        <p:nvSpPr>
+          <p:cNvPr id="6" name="texto-220"/>
           <p:cNvSpPr txBox="1"/>
           <p:nvPr/>
         </p:nvSpPr>
         <p:spPr>
           <a:xfrm>
-            <a:off x="1143000" y="1188720"/>
-            <a:ext cx="3154680" cy="320040"/>
+            <a:off x="2423160" y="1280160"/>
+            <a:ext cx="1920240" cy="960120"/>
           </a:xfrm>
           <a:prstGeom prst="rect">
             <a:avLst/>
@@ -4110,67 +4493,45 @@
               <a:buNone/>
             </a:pPr>
             <a:r>
-              <a:rPr lang="en-US" sz="1400" b="1" dirty="0">
+              <a:rPr lang="en-US" sz="1600" b="1" dirty="0">
                 <a:solidFill>
                   <a:schemeClr val="tx1"/>
                 </a:solidFill>
               </a:rPr>
-              <a:t>Hardware, firmware y transformaciones</a:t>
-            </a:r>
-            <a:endParaRPr lang="en-US" sz="1400" dirty="0"/>
-          </a:p>
-        </p:txBody>
-      </p:sp>
-      <p:sp>
-        <p:nvSpPr>
-          <p:cNvPr id="7" name="texto-208"/>
-          <p:cNvSpPr txBox="1"/>
-          <p:nvPr/>
-        </p:nvSpPr>
-        <p:spPr>
-          <a:xfrm>
-            <a:off x="1143000" y="1508760"/>
-            <a:ext cx="3154680" cy="548640"/>
-          </a:xfrm>
-          <a:prstGeom prst="rect">
-            <a:avLst/>
-          </a:prstGeom>
-          <a:noFill/>
-          <a:ln/>
-        </p:spPr>
-        <p:txBody>
-          <a:bodyPr wrap="square" lIns="0" tIns="0" rIns="0" bIns="0" rtlCol="0" anchor="t"/>
-          <a:lstStyle/>
-          <a:p>
-            <a:pPr indent="0" marL="0">
-              <a:buNone/>
-            </a:pPr>
-            <a:r>
-              <a:rPr lang="en-US" sz="1300" dirty="0">
+              <a:t>Disponibilidad</a:t>
+            </a:r>
+            <a:endParaRPr lang="en-US" sz="1600" dirty="0"/>
+          </a:p>
+          <a:p>
+            <a:pPr indent="0" marL="0">
+              <a:buNone/>
+            </a:pPr>
+            <a:r>
+              <a:rPr lang="en-US" sz="1200" dirty="0">
                 <a:solidFill>
                   <a:schemeClr val="tx1"/>
                 </a:solidFill>
               </a:rPr>
-              <a:t>Hardware ejecuta; firmware genera el dato. Cada cambio ocurre en una frontera</a:t>
-            </a:r>
-            <a:endParaRPr lang="en-US" sz="1300" dirty="0"/>
-          </a:p>
-        </p:txBody>
-      </p:sp>
-      <p:sp>
-        <p:nvSpPr>
-          <p:cNvPr id="8" name="tarjeta-209"/>
+              <a:t>meta ≥ 95 % · 40/41 intentos</a:t>
+            </a:r>
+            <a:endParaRPr lang="en-US" sz="1600" dirty="0"/>
+          </a:p>
+        </p:txBody>
+      </p:sp>
+      <p:sp>
+        <p:nvSpPr>
+          <p:cNvPr id="7" name="tarjeta-221"/>
           <p:cNvSpPr/>
           <p:nvPr/>
         </p:nvSpPr>
         <p:spPr>
           <a:xfrm>
             <a:off x="4709160" y="1097280"/>
-            <a:ext cx="3977640" cy="1005840"/>
+            <a:ext cx="3977640" cy="1325880"/>
           </a:xfrm>
           <a:prstGeom prst="roundRect">
             <a:avLst>
-              <a:gd name="adj" fmla="val 9091"/>
+              <a:gd name="adj" fmla="val 6897"/>
             </a:avLst>
           </a:prstGeom>
           <a:solidFill>
@@ -4181,52 +4542,50 @@
       </p:sp>
       <p:sp>
         <p:nvSpPr>
-          <p:cNvPr id="9" name="numero-210"/>
+          <p:cNvPr id="8" name="texto-222"/>
           <p:cNvSpPr txBox="1"/>
           <p:nvPr/>
         </p:nvSpPr>
         <p:spPr>
           <a:xfrm>
-            <a:off x="4846320" y="1234440"/>
-            <a:ext cx="411480" cy="411480"/>
-          </a:xfrm>
-          <a:prstGeom prst="ellipse">
-            <a:avLst/>
-          </a:prstGeom>
-          <a:solidFill>
-            <a:schemeClr val="accent2"/>
-          </a:solidFill>
+            <a:off x="4937760" y="1097280"/>
+            <a:ext cx="1691640" cy="1325880"/>
+          </a:xfrm>
+          <a:prstGeom prst="rect">
+            <a:avLst/>
+          </a:prstGeom>
+          <a:noFill/>
           <a:ln/>
         </p:spPr>
         <p:txBody>
           <a:bodyPr wrap="square" lIns="0" tIns="0" rIns="0" bIns="0" rtlCol="0" anchor="ctr"/>
           <a:lstStyle/>
           <a:p>
-            <a:pPr algn="ctr" indent="0" marL="0">
-              <a:buNone/>
-            </a:pPr>
-            <a:r>
-              <a:rPr lang="en-US" sz="1400" b="1" dirty="0">
-                <a:solidFill>
-                  <a:schemeClr val="bg1"/>
-                </a:solidFill>
-              </a:rPr>
-              <a:t>2</a:t>
-            </a:r>
-            <a:endParaRPr lang="en-US" sz="1400" dirty="0"/>
-          </a:p>
-        </p:txBody>
-      </p:sp>
-      <p:sp>
-        <p:nvSpPr>
-          <p:cNvPr id="10" name="texto-211"/>
+            <a:pPr indent="0" marL="0">
+              <a:buNone/>
+            </a:pPr>
+            <a:r>
+              <a:rPr lang="en-US" sz="3200" b="1" dirty="0">
+                <a:solidFill>
+                  <a:schemeClr val="accent3"/>
+                </a:solidFill>
+              </a:rPr>
+              <a:t>0.25 ms</a:t>
+            </a:r>
+            <a:endParaRPr lang="en-US" sz="3200" dirty="0"/>
+          </a:p>
+        </p:txBody>
+      </p:sp>
+      <p:sp>
+        <p:nvSpPr>
+          <p:cNvPr id="9" name="texto-223"/>
           <p:cNvSpPr txBox="1"/>
           <p:nvPr/>
         </p:nvSpPr>
         <p:spPr>
           <a:xfrm>
-            <a:off x="5394960" y="1188720"/>
-            <a:ext cx="3154680" cy="320040"/>
+            <a:off x="6675120" y="1280160"/>
+            <a:ext cx="1920240" cy="960120"/>
           </a:xfrm>
           <a:prstGeom prst="rect">
             <a:avLst/>
@@ -4242,67 +4601,45 @@
               <a:buNone/>
             </a:pPr>
             <a:r>
-              <a:rPr lang="en-US" sz="1400" b="1" dirty="0">
+              <a:rPr lang="en-US" sz="1600" b="1" dirty="0">
                 <a:solidFill>
                   <a:schemeClr val="tx1"/>
                 </a:solidFill>
               </a:rPr>
-              <a:t>Servicios del SO que usa la app</a:t>
-            </a:r>
-            <a:endParaRPr lang="en-US" sz="1400" dirty="0"/>
-          </a:p>
-        </p:txBody>
-      </p:sp>
-      <p:sp>
-        <p:nvSpPr>
-          <p:cNvPr id="11" name="texto-212"/>
-          <p:cNvSpPr txBox="1"/>
-          <p:nvPr/>
-        </p:nvSpPr>
-        <p:spPr>
-          <a:xfrm>
-            <a:off x="5394960" y="1508760"/>
-            <a:ext cx="3154680" cy="548640"/>
-          </a:xfrm>
-          <a:prstGeom prst="rect">
-            <a:avLst/>
-          </a:prstGeom>
-          <a:noFill/>
-          <a:ln/>
-        </p:spPr>
-        <p:txBody>
-          <a:bodyPr wrap="square" lIns="0" tIns="0" rIns="0" bIns="0" rtlCol="0" anchor="t"/>
-          <a:lstStyle/>
-          <a:p>
-            <a:pPr indent="0" marL="0">
-              <a:buNone/>
-            </a:pPr>
-            <a:r>
-              <a:rPr lang="en-US" sz="1300" dirty="0">
+              <a:t>Latencia promedio</a:t>
+            </a:r>
+            <a:endParaRPr lang="en-US" sz="1600" dirty="0"/>
+          </a:p>
+          <a:p>
+            <a:pPr indent="0" marL="0">
+              <a:buNone/>
+            </a:pPr>
+            <a:r>
+              <a:rPr lang="en-US" sz="1200" dirty="0">
                 <a:solidFill>
                   <a:schemeClr val="tx1"/>
                 </a:solidFill>
               </a:rPr>
-              <a:t>Sockets TCP, archivos, CPU, memoria, disco y variables de entorno</a:t>
-            </a:r>
-            <a:endParaRPr lang="en-US" sz="1300" dirty="0"/>
-          </a:p>
-        </p:txBody>
-      </p:sp>
-      <p:sp>
-        <p:nvSpPr>
-          <p:cNvPr id="12" name="tarjeta-213"/>
+              <a:t>máx. 0.375 ms · loopback</a:t>
+            </a:r>
+            <a:endParaRPr lang="en-US" sz="1600" dirty="0"/>
+          </a:p>
+        </p:txBody>
+      </p:sp>
+      <p:sp>
+        <p:nvSpPr>
+          <p:cNvPr id="10" name="tarjeta-224"/>
           <p:cNvSpPr/>
           <p:nvPr/>
         </p:nvSpPr>
         <p:spPr>
           <a:xfrm>
-            <a:off x="457200" y="2240280"/>
-            <a:ext cx="3977640" cy="1005840"/>
+            <a:off x="457200" y="2606040"/>
+            <a:ext cx="3977640" cy="1325880"/>
           </a:xfrm>
           <a:prstGeom prst="roundRect">
             <a:avLst>
-              <a:gd name="adj" fmla="val 9091"/>
+              <a:gd name="adj" fmla="val 6897"/>
             </a:avLst>
           </a:prstGeom>
           <a:solidFill>
@@ -4313,52 +4650,50 @@
       </p:sp>
       <p:sp>
         <p:nvSpPr>
-          <p:cNvPr id="13" name="numero-214"/>
+          <p:cNvPr id="11" name="texto-225"/>
           <p:cNvSpPr txBox="1"/>
           <p:nvPr/>
         </p:nvSpPr>
         <p:spPr>
           <a:xfrm>
-            <a:off x="594360" y="2377440"/>
-            <a:ext cx="411480" cy="411480"/>
-          </a:xfrm>
-          <a:prstGeom prst="ellipse">
-            <a:avLst/>
-          </a:prstGeom>
-          <a:solidFill>
-            <a:schemeClr val="accent2"/>
-          </a:solidFill>
+            <a:off x="685800" y="2606040"/>
+            <a:ext cx="1691640" cy="1325880"/>
+          </a:xfrm>
+          <a:prstGeom prst="rect">
+            <a:avLst/>
+          </a:prstGeom>
+          <a:noFill/>
           <a:ln/>
         </p:spPr>
         <p:txBody>
           <a:bodyPr wrap="square" lIns="0" tIns="0" rIns="0" bIns="0" rtlCol="0" anchor="ctr"/>
           <a:lstStyle/>
           <a:p>
-            <a:pPr algn="ctr" indent="0" marL="0">
-              <a:buNone/>
-            </a:pPr>
-            <a:r>
-              <a:rPr lang="en-US" sz="1400" b="1" dirty="0">
-                <a:solidFill>
-                  <a:schemeClr val="bg1"/>
-                </a:solidFill>
-              </a:rPr>
-              <a:t>3</a:t>
-            </a:r>
-            <a:endParaRPr lang="en-US" sz="1400" dirty="0"/>
-          </a:p>
-        </p:txBody>
-      </p:sp>
-      <p:sp>
-        <p:nvSpPr>
-          <p:cNvPr id="14" name="texto-215"/>
+            <a:pPr indent="0" marL="0">
+              <a:buNone/>
+            </a:pPr>
+            <a:r>
+              <a:rPr lang="en-US" sz="3200" b="1" dirty="0">
+                <a:solidFill>
+                  <a:schemeClr val="accent4"/>
+                </a:solidFill>
+              </a:rPr>
+              <a:t>98.4 %</a:t>
+            </a:r>
+            <a:endParaRPr lang="en-US" sz="3200" dirty="0"/>
+          </a:p>
+        </p:txBody>
+      </p:sp>
+      <p:sp>
+        <p:nvSpPr>
+          <p:cNvPr id="12" name="texto-226"/>
           <p:cNvSpPr txBox="1"/>
           <p:nvPr/>
         </p:nvSpPr>
         <p:spPr>
           <a:xfrm>
-            <a:off x="1143000" y="2331720"/>
-            <a:ext cx="3154680" cy="320040"/>
+            <a:off x="2423160" y="2788920"/>
+            <a:ext cx="1920240" cy="960120"/>
           </a:xfrm>
           <a:prstGeom prst="rect">
             <a:avLst/>
@@ -4374,67 +4709,45 @@
               <a:buNone/>
             </a:pPr>
             <a:r>
-              <a:rPr lang="en-US" sz="1400" b="1" dirty="0">
+              <a:rPr lang="en-US" sz="1600" b="1" dirty="0">
                 <a:solidFill>
                   <a:schemeClr val="tx1"/>
                 </a:solidFill>
               </a:rPr>
-              <a:t>Permisos revocados por el SO</a:t>
-            </a:r>
-            <a:endParaRPr lang="en-US" sz="1400" dirty="0"/>
-          </a:p>
-        </p:txBody>
-      </p:sp>
-      <p:sp>
-        <p:nvSpPr>
-          <p:cNvPr id="15" name="texto-216"/>
-          <p:cNvSpPr txBox="1"/>
-          <p:nvPr/>
-        </p:nvSpPr>
-        <p:spPr>
-          <a:xfrm>
-            <a:off x="1143000" y="2651760"/>
-            <a:ext cx="3154680" cy="548640"/>
-          </a:xfrm>
-          <a:prstGeom prst="rect">
-            <a:avLst/>
-          </a:prstGeom>
-          <a:noFill/>
-          <a:ln/>
-        </p:spPr>
-        <p:txBody>
-          <a:bodyPr wrap="square" lIns="0" tIns="0" rIns="0" bIns="0" rtlCol="0" anchor="t"/>
-          <a:lstStyle/>
-          <a:p>
-            <a:pPr indent="0" marL="0">
-              <a:buNone/>
-            </a:pPr>
-            <a:r>
-              <a:rPr lang="en-US" sz="1300" dirty="0">
+              <a:t>Datos válidos</a:t>
+            </a:r>
+            <a:endParaRPr lang="en-US" sz="1600" dirty="0"/>
+          </a:p>
+          <a:p>
+            <a:pPr indent="0" marL="0">
+              <a:buNone/>
+            </a:pPr>
+            <a:r>
+              <a:rPr lang="en-US" sz="1200" dirty="0">
                 <a:solidFill>
                   <a:schemeClr val="tx1"/>
                 </a:solidFill>
               </a:rPr>
-              <a:t>OSError capturado: se cuenta, se registra y el ciclo sigue</a:t>
-            </a:r>
-            <a:endParaRPr lang="en-US" sz="1300" dirty="0"/>
-          </a:p>
-        </p:txBody>
-      </p:sp>
-      <p:sp>
-        <p:nvSpPr>
-          <p:cNvPr id="16" name="tarjeta-217"/>
+              <a:t>meta ≥ 98 % · 63/64 lecturas</a:t>
+            </a:r>
+            <a:endParaRPr lang="en-US" sz="1600" dirty="0"/>
+          </a:p>
+        </p:txBody>
+      </p:sp>
+      <p:sp>
+        <p:nvSpPr>
+          <p:cNvPr id="13" name="tarjeta-227"/>
           <p:cNvSpPr/>
           <p:nvPr/>
         </p:nvSpPr>
         <p:spPr>
           <a:xfrm>
-            <a:off x="4709160" y="2240280"/>
-            <a:ext cx="3977640" cy="1005840"/>
+            <a:off x="4709160" y="2606040"/>
+            <a:ext cx="3977640" cy="1325880"/>
           </a:xfrm>
           <a:prstGeom prst="roundRect">
             <a:avLst>
-              <a:gd name="adj" fmla="val 9091"/>
+              <a:gd name="adj" fmla="val 6897"/>
             </a:avLst>
           </a:prstGeom>
           <a:solidFill>
@@ -4445,52 +4758,50 @@
       </p:sp>
       <p:sp>
         <p:nvSpPr>
-          <p:cNvPr id="17" name="numero-218"/>
+          <p:cNvPr id="14" name="texto-228"/>
           <p:cNvSpPr txBox="1"/>
           <p:nvPr/>
         </p:nvSpPr>
         <p:spPr>
           <a:xfrm>
-            <a:off x="4846320" y="2377440"/>
-            <a:ext cx="411480" cy="411480"/>
-          </a:xfrm>
-          <a:prstGeom prst="ellipse">
-            <a:avLst/>
-          </a:prstGeom>
-          <a:solidFill>
-            <a:schemeClr val="accent2"/>
-          </a:solidFill>
+            <a:off x="4937760" y="2606040"/>
+            <a:ext cx="1691640" cy="1325880"/>
+          </a:xfrm>
+          <a:prstGeom prst="rect">
+            <a:avLst/>
+          </a:prstGeom>
+          <a:noFill/>
           <a:ln/>
         </p:spPr>
         <p:txBody>
           <a:bodyPr wrap="square" lIns="0" tIns="0" rIns="0" bIns="0" rtlCol="0" anchor="ctr"/>
           <a:lstStyle/>
           <a:p>
-            <a:pPr algn="ctr" indent="0" marL="0">
-              <a:buNone/>
-            </a:pPr>
-            <a:r>
-              <a:rPr lang="en-US" sz="1400" b="1" dirty="0">
-                <a:solidFill>
-                  <a:schemeClr val="bg1"/>
-                </a:solidFill>
-              </a:rPr>
-              <a:t>4</a:t>
-            </a:r>
-            <a:endParaRPr lang="en-US" sz="1400" dirty="0"/>
-          </a:p>
-        </p:txBody>
-      </p:sp>
-      <p:sp>
-        <p:nvSpPr>
-          <p:cNvPr id="18" name="texto-219"/>
+            <a:pPr indent="0" marL="0">
+              <a:buNone/>
+            </a:pPr>
+            <a:r>
+              <a:rPr lang="en-US" sz="3200" b="1" dirty="0">
+                <a:solidFill>
+                  <a:schemeClr val="accent1"/>
+                </a:solidFill>
+              </a:rPr>
+              <a:t>3.57 s</a:t>
+            </a:r>
+            <a:endParaRPr lang="en-US" sz="3200" dirty="0"/>
+          </a:p>
+        </p:txBody>
+      </p:sp>
+      <p:sp>
+        <p:nvSpPr>
+          <p:cNvPr id="15" name="texto-229"/>
           <p:cNvSpPr txBox="1"/>
           <p:nvPr/>
         </p:nvSpPr>
         <p:spPr>
           <a:xfrm>
-            <a:off x="5394960" y="2331720"/>
-            <a:ext cx="3154680" cy="320040"/>
+            <a:off x="6675120" y="2788920"/>
+            <a:ext cx="1920240" cy="960120"/>
           </a:xfrm>
           <a:prstGeom prst="rect">
             <a:avLst/>
@@ -4506,67 +4817,45 @@
               <a:buNone/>
             </a:pPr>
             <a:r>
-              <a:rPr lang="en-US" sz="1400" b="1" dirty="0">
+              <a:rPr lang="en-US" sz="1600" b="1" dirty="0">
                 <a:solidFill>
                   <a:schemeClr val="tx1"/>
                 </a:solidFill>
               </a:rPr>
-              <a:t>Python frente a C/C++ o Rust</a:t>
-            </a:r>
-            <a:endParaRPr lang="en-US" sz="1400" dirty="0"/>
-          </a:p>
-        </p:txBody>
-      </p:sp>
-      <p:sp>
-        <p:nvSpPr>
-          <p:cNvPr id="19" name="texto-220"/>
-          <p:cNvSpPr txBox="1"/>
-          <p:nvPr/>
-        </p:nvSpPr>
-        <p:spPr>
-          <a:xfrm>
-            <a:off x="5394960" y="2651760"/>
-            <a:ext cx="3154680" cy="548640"/>
-          </a:xfrm>
-          <a:prstGeom prst="rect">
-            <a:avLst/>
-          </a:prstGeom>
-          <a:noFill/>
-          <a:ln/>
-        </p:spPr>
-        <p:txBody>
-          <a:bodyPr wrap="square" lIns="0" tIns="0" rIns="0" bIns="0" rtlCol="0" anchor="t"/>
-          <a:lstStyle/>
-          <a:p>
-            <a:pPr indent="0" marL="0">
-              <a:buNone/>
-            </a:pPr>
-            <a:r>
-              <a:rPr lang="en-US" sz="1300" dirty="0">
+              <a:t>Recuperación</a:t>
+            </a:r>
+            <a:endParaRPr lang="en-US" sz="1600" dirty="0"/>
+          </a:p>
+          <a:p>
+            <a:pPr indent="0" marL="0">
+              <a:buNone/>
+            </a:pPr>
+            <a:r>
+              <a:rPr lang="en-US" sz="1200" dirty="0">
                 <a:solidFill>
                   <a:schemeClr val="tx1"/>
                 </a:solidFill>
               </a:rPr>
-              <a:t>Rápido de desarrollar, pero el GIL limita y no sirve para firmware</a:t>
-            </a:r>
-            <a:endParaRPr lang="en-US" sz="1300" dirty="0"/>
-          </a:p>
-        </p:txBody>
-      </p:sp>
-      <p:sp>
-        <p:nvSpPr>
-          <p:cNvPr id="20" name="tarjeta-221"/>
+              <a:t>tras una caída real (fallo 6)</a:t>
+            </a:r>
+            <a:endParaRPr lang="en-US" sz="1600" dirty="0"/>
+          </a:p>
+        </p:txBody>
+      </p:sp>
+      <p:sp>
+        <p:nvSpPr>
+          <p:cNvPr id="16" name="tarjeta-230"/>
           <p:cNvSpPr/>
           <p:nvPr/>
         </p:nvSpPr>
         <p:spPr>
           <a:xfrm>
-            <a:off x="457200" y="3383280"/>
-            <a:ext cx="3977640" cy="1005840"/>
+            <a:off x="457200" y="4114800"/>
+            <a:ext cx="8229600" cy="502920"/>
           </a:xfrm>
           <a:prstGeom prst="roundRect">
             <a:avLst>
-              <a:gd name="adj" fmla="val 9091"/>
+              <a:gd name="adj" fmla="val 18182"/>
             </a:avLst>
           </a:prstGeom>
           <a:solidFill>
@@ -4577,243 +4866,81 @@
       </p:sp>
       <p:sp>
         <p:nvSpPr>
-          <p:cNvPr id="21" name="numero-222"/>
+          <p:cNvPr id="17" name="circulo-231"/>
+          <p:cNvSpPr/>
+          <p:nvPr/>
+        </p:nvSpPr>
+        <p:spPr>
+          <a:xfrm>
+            <a:off x="594360" y="4178808"/>
+            <a:ext cx="365760" cy="365760"/>
+          </a:xfrm>
+          <a:prstGeom prst="ellipse">
+            <a:avLst/>
+          </a:prstGeom>
+          <a:solidFill>
+            <a:schemeClr val="accent6"/>
+          </a:solidFill>
+          <a:ln/>
+        </p:spPr>
+      </p:sp>
+      <p:pic>
+        <p:nvPicPr>
+          <p:cNvPr id="18" name="icono-232" descr="preencoded.png">    </p:cNvPr>
+          <p:cNvPicPr>
+            <a:picLocks noChangeAspect="1"/>
+          </p:cNvPicPr>
+          <p:nvPr/>
+        </p:nvPicPr>
+        <p:blipFill>
+          <a:blip r:embed="rId1"/>
+          <a:stretch>
+            <a:fillRect/>
+          </a:stretch>
+        </p:blipFill>
+        <p:spPr>
+          <a:xfrm>
+            <a:off x="674827" y="4259275"/>
+            <a:ext cx="204826" cy="204826"/>
+          </a:xfrm>
+          <a:prstGeom prst="rect">
+            <a:avLst/>
+          </a:prstGeom>
+        </p:spPr>
+      </p:pic>
+      <p:sp>
+        <p:nvSpPr>
+          <p:cNvPr id="19" name="texto-233"/>
           <p:cNvSpPr txBox="1"/>
           <p:nvPr/>
         </p:nvSpPr>
         <p:spPr>
           <a:xfrm>
-            <a:off x="594360" y="3520440"/>
-            <a:ext cx="411480" cy="411480"/>
-          </a:xfrm>
-          <a:prstGeom prst="ellipse">
-            <a:avLst/>
-          </a:prstGeom>
-          <a:solidFill>
-            <a:schemeClr val="accent2"/>
-          </a:solidFill>
+            <a:off x="1097280" y="4114800"/>
+            <a:ext cx="7498080" cy="502920"/>
+          </a:xfrm>
+          <a:prstGeom prst="rect">
+            <a:avLst/>
+          </a:prstGeom>
+          <a:noFill/>
           <a:ln/>
         </p:spPr>
         <p:txBody>
           <a:bodyPr wrap="square" lIns="0" tIns="0" rIns="0" bIns="0" rtlCol="0" anchor="ctr"/>
           <a:lstStyle/>
           <a:p>
-            <a:pPr algn="ctr" indent="0" marL="0">
-              <a:buNone/>
-            </a:pPr>
-            <a:r>
-              <a:rPr lang="en-US" sz="1400" b="1" dirty="0">
-                <a:solidFill>
-                  <a:schemeClr val="bg1"/>
-                </a:solidFill>
-              </a:rPr>
-              <a:t>5</a:t>
-            </a:r>
-            <a:endParaRPr lang="en-US" sz="1400" dirty="0"/>
-          </a:p>
-        </p:txBody>
-      </p:sp>
-      <p:sp>
-        <p:nvSpPr>
-          <p:cNvPr id="22" name="texto-223"/>
-          <p:cNvSpPr txBox="1"/>
-          <p:nvPr/>
-        </p:nvSpPr>
-        <p:spPr>
-          <a:xfrm>
-            <a:off x="1143000" y="3474720"/>
-            <a:ext cx="3154680" cy="320040"/>
-          </a:xfrm>
-          <a:prstGeom prst="rect">
-            <a:avLst/>
-          </a:prstGeom>
-          <a:noFill/>
-          <a:ln/>
-        </p:spPr>
-        <p:txBody>
-          <a:bodyPr wrap="square" lIns="0" tIns="0" rIns="0" bIns="0" rtlCol="0" anchor="ctr"/>
-          <a:lstStyle/>
-          <a:p>
-            <a:pPr indent="0" marL="0">
-              <a:buNone/>
-            </a:pPr>
-            <a:r>
-              <a:rPr lang="en-US" sz="1400" b="1" dirty="0">
+            <a:pPr indent="0" marL="0">
+              <a:buNone/>
+            </a:pPr>
+            <a:r>
+              <a:rPr lang="en-US" sz="1200" dirty="0">
                 <a:solidFill>
                   <a:schemeClr val="tx1"/>
                 </a:solidFill>
               </a:rPr>
-              <a:t>¿Qué va en firmware y qué en la app?</a:t>
-            </a:r>
-            <a:endParaRPr lang="en-US" sz="1400" dirty="0"/>
-          </a:p>
-        </p:txBody>
-      </p:sp>
-      <p:sp>
-        <p:nvSpPr>
-          <p:cNvPr id="23" name="texto-224"/>
-          <p:cNvSpPr txBox="1"/>
-          <p:nvPr/>
-        </p:nvSpPr>
-        <p:spPr>
-          <a:xfrm>
-            <a:off x="1143000" y="3794760"/>
-            <a:ext cx="3154680" cy="548640"/>
-          </a:xfrm>
-          <a:prstGeom prst="rect">
-            <a:avLst/>
-          </a:prstGeom>
-          <a:noFill/>
-          <a:ln/>
-        </p:spPr>
-        <p:txBody>
-          <a:bodyPr wrap="square" lIns="0" tIns="0" rIns="0" bIns="0" rtlCol="0" anchor="t"/>
-          <a:lstStyle/>
-          <a:p>
-            <a:pPr indent="0" marL="0">
-              <a:buNone/>
-            </a:pPr>
-            <a:r>
-              <a:rPr lang="en-US" sz="1300" dirty="0">
-                <a:solidFill>
-                  <a:schemeClr val="tx1"/>
-                </a:solidFill>
-              </a:rPr>
-              <a:t>Tiempo real y bajo nivel en firmware; lógica y datos en la aplicación</a:t>
-            </a:r>
-            <a:endParaRPr lang="en-US" sz="1300" dirty="0"/>
-          </a:p>
-        </p:txBody>
-      </p:sp>
-      <p:sp>
-        <p:nvSpPr>
-          <p:cNvPr id="24" name="tarjeta-225"/>
-          <p:cNvSpPr/>
-          <p:nvPr/>
-        </p:nvSpPr>
-        <p:spPr>
-          <a:xfrm>
-            <a:off x="4709160" y="3383280"/>
-            <a:ext cx="3977640" cy="1005840"/>
-          </a:xfrm>
-          <a:prstGeom prst="roundRect">
-            <a:avLst>
-              <a:gd name="adj" fmla="val 9091"/>
-            </a:avLst>
-          </a:prstGeom>
-          <a:solidFill>
-            <a:schemeClr val="bg2"/>
-          </a:solidFill>
-          <a:ln/>
-        </p:spPr>
-      </p:sp>
-      <p:sp>
-        <p:nvSpPr>
-          <p:cNvPr id="25" name="numero-226"/>
-          <p:cNvSpPr txBox="1"/>
-          <p:nvPr/>
-        </p:nvSpPr>
-        <p:spPr>
-          <a:xfrm>
-            <a:off x="4846320" y="3520440"/>
-            <a:ext cx="411480" cy="411480"/>
-          </a:xfrm>
-          <a:prstGeom prst="ellipse">
-            <a:avLst/>
-          </a:prstGeom>
-          <a:solidFill>
-            <a:schemeClr val="accent2"/>
-          </a:solidFill>
-          <a:ln/>
-        </p:spPr>
-        <p:txBody>
-          <a:bodyPr wrap="square" lIns="0" tIns="0" rIns="0" bIns="0" rtlCol="0" anchor="ctr"/>
-          <a:lstStyle/>
-          <a:p>
-            <a:pPr algn="ctr" indent="0" marL="0">
-              <a:buNone/>
-            </a:pPr>
-            <a:r>
-              <a:rPr lang="en-US" sz="1400" b="1" dirty="0">
-                <a:solidFill>
-                  <a:schemeClr val="bg1"/>
-                </a:solidFill>
-              </a:rPr>
-              <a:t>6</a:t>
-            </a:r>
-            <a:endParaRPr lang="en-US" sz="1400" dirty="0"/>
-          </a:p>
-        </p:txBody>
-      </p:sp>
-      <p:sp>
-        <p:nvSpPr>
-          <p:cNvPr id="26" name="texto-227"/>
-          <p:cNvSpPr txBox="1"/>
-          <p:nvPr/>
-        </p:nvSpPr>
-        <p:spPr>
-          <a:xfrm>
-            <a:off x="5394960" y="3474720"/>
-            <a:ext cx="3154680" cy="320040"/>
-          </a:xfrm>
-          <a:prstGeom prst="rect">
-            <a:avLst/>
-          </a:prstGeom>
-          <a:noFill/>
-          <a:ln/>
-        </p:spPr>
-        <p:txBody>
-          <a:bodyPr wrap="square" lIns="0" tIns="0" rIns="0" bIns="0" rtlCol="0" anchor="ctr"/>
-          <a:lstStyle/>
-          <a:p>
-            <a:pPr indent="0" marL="0">
-              <a:buNone/>
-            </a:pPr>
-            <a:r>
-              <a:rPr lang="en-US" sz="1400" b="1" dirty="0">
-                <a:solidFill>
-                  <a:schemeClr val="tx1"/>
-                </a:solidFill>
-              </a:rPr>
-              <a:t>100 dispositivos simultáneos</a:t>
-            </a:r>
-            <a:endParaRPr lang="en-US" sz="1400" dirty="0"/>
-          </a:p>
-        </p:txBody>
-      </p:sp>
-      <p:sp>
-        <p:nvSpPr>
-          <p:cNvPr id="27" name="texto-228"/>
-          <p:cNvSpPr txBox="1"/>
-          <p:nvPr/>
-        </p:nvSpPr>
-        <p:spPr>
-          <a:xfrm>
-            <a:off x="5394960" y="3794760"/>
-            <a:ext cx="3154680" cy="548640"/>
-          </a:xfrm>
-          <a:prstGeom prst="rect">
-            <a:avLst/>
-          </a:prstGeom>
-          <a:noFill/>
-          <a:ln/>
-        </p:spPr>
-        <p:txBody>
-          <a:bodyPr wrap="square" lIns="0" tIns="0" rIns="0" bIns="0" rtlCol="0" anchor="t"/>
-          <a:lstStyle/>
-          <a:p>
-            <a:pPr indent="0" marL="0">
-              <a:buNone/>
-            </a:pPr>
-            <a:r>
-              <a:rPr lang="en-US" sz="1300" dirty="0">
-                <a:solidFill>
-                  <a:schemeClr val="tx1"/>
-                </a:solidFill>
-              </a:rPr>
-              <a:t>Servidor asíncrono y cola de mensajes (MQTT) en vez de sockets directos</a:t>
-            </a:r>
-            <a:endParaRPr lang="en-US" sz="1300" dirty="0"/>
+              <a:t>Tasa de errores: 6.1 % agregada, porque incluye corridas con fallos inyectados a propósito; en operación normal fue 0 %.</a:t>
+            </a:r>
+            <a:endParaRPr lang="en-US" sz="1200" dirty="0"/>
           </a:p>
         </p:txBody>
       </p:sp>
@@ -4919,7 +5046,7 @@
                   <a:schemeClr val="tx1"/>
                 </a:solidFill>
               </a:rPr>
-              <a:t>Preguntas de integración (2/2)</a:t>
+              <a:t>Preguntas de integración (1/2)</a:t>
             </a:r>
             <a:endParaRPr lang="en-US" sz="3600" dirty="0"/>
           </a:p>
@@ -4927,7 +5054,7 @@
       </p:sp>
       <p:sp>
         <p:nvSpPr>
-          <p:cNvPr id="4" name="tarjeta-229"/>
+          <p:cNvPr id="4" name="tarjeta-234"/>
           <p:cNvSpPr/>
           <p:nvPr/>
         </p:nvSpPr>
@@ -4949,7 +5076,7 @@
       </p:sp>
       <p:sp>
         <p:nvSpPr>
-          <p:cNvPr id="5" name="numero-230"/>
+          <p:cNvPr id="5" name="numero-235"/>
           <p:cNvSpPr txBox="1"/>
           <p:nvPr/>
         </p:nvSpPr>
@@ -4979,7 +5106,7 @@
                   <a:schemeClr val="bg1"/>
                 </a:solidFill>
               </a:rPr>
-              <a:t>7</a:t>
+              <a:t>1</a:t>
             </a:r>
             <a:endParaRPr lang="en-US" sz="1400" dirty="0"/>
           </a:p>
@@ -4987,7 +5114,7 @@
       </p:sp>
       <p:sp>
         <p:nvSpPr>
-          <p:cNvPr id="6" name="texto-231"/>
+          <p:cNvPr id="6" name="texto-236"/>
           <p:cNvSpPr txBox="1"/>
           <p:nvPr/>
         </p:nvSpPr>
@@ -5015,7 +5142,7 @@
                   <a:schemeClr val="tx1"/>
                 </a:solidFill>
               </a:rPr>
-              <a:t>Riesgos de seguridad</a:t>
+              <a:t>Hardware, firmware y transformaciones</a:t>
             </a:r>
             <a:endParaRPr lang="en-US" sz="1400" dirty="0"/>
           </a:p>
@@ -5023,7 +5150,7 @@
       </p:sp>
       <p:sp>
         <p:nvSpPr>
-          <p:cNvPr id="7" name="texto-232"/>
+          <p:cNvPr id="7" name="texto-237"/>
           <p:cNvSpPr txBox="1"/>
           <p:nvPr/>
         </p:nvSpPr>
@@ -5051,7 +5178,7 @@
                   <a:schemeClr val="tx1"/>
                 </a:solidFill>
               </a:rPr>
-              <a:t>Nunca ejecutar el dato: solo json.loads y validación campo por campo</a:t>
+              <a:t>Hardware ejecuta; firmware genera el dato. Cada cambio ocurre en una frontera</a:t>
             </a:r>
             <a:endParaRPr lang="en-US" sz="1300" dirty="0"/>
           </a:p>
@@ -5059,7 +5186,7 @@
       </p:sp>
       <p:sp>
         <p:nvSpPr>
-          <p:cNvPr id="8" name="tarjeta-233"/>
+          <p:cNvPr id="8" name="tarjeta-238"/>
           <p:cNvSpPr/>
           <p:nvPr/>
         </p:nvSpPr>
@@ -5081,7 +5208,7 @@
       </p:sp>
       <p:sp>
         <p:nvSpPr>
-          <p:cNvPr id="9" name="numero-234"/>
+          <p:cNvPr id="9" name="numero-239"/>
           <p:cNvSpPr txBox="1"/>
           <p:nvPr/>
         </p:nvSpPr>
@@ -5111,7 +5238,7 @@
                   <a:schemeClr val="bg1"/>
                 </a:solidFill>
               </a:rPr>
-              <a:t>8</a:t>
+              <a:t>2</a:t>
             </a:r>
             <a:endParaRPr lang="en-US" sz="1400" dirty="0"/>
           </a:p>
@@ -5119,7 +5246,7 @@
       </p:sp>
       <p:sp>
         <p:nvSpPr>
-          <p:cNvPr id="10" name="texto-235"/>
+          <p:cNvPr id="10" name="texto-240"/>
           <p:cNvSpPr txBox="1"/>
           <p:nvPr/>
         </p:nvSpPr>
@@ -5147,7 +5274,7 @@
                   <a:schemeClr val="tx1"/>
                 </a:solidFill>
               </a:rPr>
-              <a:t>Integridad y trazabilidad</a:t>
+              <a:t>Servicios del SO que usa la app</a:t>
             </a:r>
             <a:endParaRPr lang="en-US" sz="1400" dirty="0"/>
           </a:p>
@@ -5155,7 +5282,7 @@
       </p:sp>
       <p:sp>
         <p:nvSpPr>
-          <p:cNvPr id="11" name="texto-236"/>
+          <p:cNvPr id="11" name="texto-241"/>
           <p:cNvSpPr txBox="1"/>
           <p:nvPr/>
         </p:nvSpPr>
@@ -5183,7 +5310,7 @@
                   <a:schemeClr val="tx1"/>
                 </a:solidFill>
               </a:rPr>
-              <a:t>Timestamp y estado en cada registro; logs con evento y resultado</a:t>
+              <a:t>Sockets TCP, archivos, CPU, memoria, disco y variables de entorno</a:t>
             </a:r>
             <a:endParaRPr lang="en-US" sz="1300" dirty="0"/>
           </a:p>
@@ -5191,7 +5318,7 @@
       </p:sp>
       <p:sp>
         <p:nvSpPr>
-          <p:cNvPr id="12" name="tarjeta-237"/>
+          <p:cNvPr id="12" name="tarjeta-242"/>
           <p:cNvSpPr/>
           <p:nvPr/>
         </p:nvSpPr>
@@ -5213,7 +5340,7 @@
       </p:sp>
       <p:sp>
         <p:nvSpPr>
-          <p:cNvPr id="13" name="numero-238"/>
+          <p:cNvPr id="13" name="numero-243"/>
           <p:cNvSpPr txBox="1"/>
           <p:nvPr/>
         </p:nvSpPr>
@@ -5243,7 +5370,7 @@
                   <a:schemeClr val="bg1"/>
                 </a:solidFill>
               </a:rPr>
-              <a:t>9</a:t>
+              <a:t>3</a:t>
             </a:r>
             <a:endParaRPr lang="en-US" sz="1400" dirty="0"/>
           </a:p>
@@ -5251,7 +5378,7 @@
       </p:sp>
       <p:sp>
         <p:nvSpPr>
-          <p:cNvPr id="14" name="texto-239"/>
+          <p:cNvPr id="14" name="texto-244"/>
           <p:cNvSpPr txBox="1"/>
           <p:nvPr/>
         </p:nvSpPr>
@@ -5279,7 +5406,7 @@
                   <a:schemeClr val="tx1"/>
                 </a:solidFill>
               </a:rPr>
-              <a:t>Windows frente a Linux</a:t>
+              <a:t>Permisos revocados por el SO</a:t>
             </a:r>
             <a:endParaRPr lang="en-US" sz="1400" dirty="0"/>
           </a:p>
@@ -5287,7 +5414,7 @@
       </p:sp>
       <p:sp>
         <p:nvSpPr>
-          <p:cNvPr id="15" name="texto-240"/>
+          <p:cNvPr id="15" name="texto-245"/>
           <p:cNvSpPr txBox="1"/>
           <p:nvPr/>
         </p:nvSpPr>
@@ -5315,7 +5442,7 @@
                   <a:schemeClr val="tx1"/>
                 </a:solidFill>
               </a:rPr>
-              <a:t>Códigos de error de socket distintos, misma jerarquía de excepciones</a:t>
+              <a:t>OSError capturado: se cuenta, se registra y el ciclo sigue</a:t>
             </a:r>
             <a:endParaRPr lang="en-US" sz="1300" dirty="0"/>
           </a:p>
@@ -5323,7 +5450,7 @@
       </p:sp>
       <p:sp>
         <p:nvSpPr>
-          <p:cNvPr id="16" name="tarjeta-241"/>
+          <p:cNvPr id="16" name="tarjeta-246"/>
           <p:cNvSpPr/>
           <p:nvPr/>
         </p:nvSpPr>
@@ -5345,7 +5472,7 @@
       </p:sp>
       <p:sp>
         <p:nvSpPr>
-          <p:cNvPr id="17" name="numero-242"/>
+          <p:cNvPr id="17" name="numero-247"/>
           <p:cNvSpPr txBox="1"/>
           <p:nvPr/>
         </p:nvSpPr>
@@ -5375,7 +5502,7 @@
                   <a:schemeClr val="bg1"/>
                 </a:solidFill>
               </a:rPr>
-              <a:t>10</a:t>
+              <a:t>4</a:t>
             </a:r>
             <a:endParaRPr lang="en-US" sz="1400" dirty="0"/>
           </a:p>
@@ -5383,7 +5510,7 @@
       </p:sp>
       <p:sp>
         <p:nvSpPr>
-          <p:cNvPr id="18" name="texto-243"/>
+          <p:cNvPr id="18" name="texto-248"/>
           <p:cNvSpPr txBox="1"/>
           <p:nvPr/>
         </p:nvSpPr>
@@ -5411,7 +5538,7 @@
                   <a:schemeClr val="tx1"/>
                 </a:solidFill>
               </a:rPr>
-              <a:t>Actualizar el firmware</a:t>
+              <a:t>Python frente a C/C++ o Rust</a:t>
             </a:r>
             <a:endParaRPr lang="en-US" sz="1400" dirty="0"/>
           </a:p>
@@ -5419,7 +5546,7 @@
       </p:sp>
       <p:sp>
         <p:nvSpPr>
-          <p:cNvPr id="19" name="texto-244"/>
+          <p:cNvPr id="19" name="texto-249"/>
           <p:cNvSpPr txBox="1"/>
           <p:nvPr/>
         </p:nvSpPr>
@@ -5447,7 +5574,7 @@
                   <a:schemeClr val="tx1"/>
                 </a:solidFill>
               </a:rPr>
-              <a:t>Despliegue azul-verde: validar la versión nueva antes de conmutar</a:t>
+              <a:t>Rápido de desarrollar, pero el GIL limita y no sirve para firmware</a:t>
             </a:r>
             <a:endParaRPr lang="en-US" sz="1300" dirty="0"/>
           </a:p>
@@ -5455,7 +5582,7 @@
       </p:sp>
       <p:sp>
         <p:nvSpPr>
-          <p:cNvPr id="20" name="tarjeta-245"/>
+          <p:cNvPr id="20" name="tarjeta-250"/>
           <p:cNvSpPr/>
           <p:nvPr/>
         </p:nvSpPr>
@@ -5477,7 +5604,7 @@
       </p:sp>
       <p:sp>
         <p:nvSpPr>
-          <p:cNvPr id="21" name="numero-246"/>
+          <p:cNvPr id="21" name="numero-251"/>
           <p:cNvSpPr txBox="1"/>
           <p:nvPr/>
         </p:nvSpPr>
@@ -5507,7 +5634,7 @@
                   <a:schemeClr val="bg1"/>
                 </a:solidFill>
               </a:rPr>
-              <a:t>11</a:t>
+              <a:t>5</a:t>
             </a:r>
             <a:endParaRPr lang="en-US" sz="1400" dirty="0"/>
           </a:p>
@@ -5515,7 +5642,7 @@
       </p:sp>
       <p:sp>
         <p:nvSpPr>
-          <p:cNvPr id="22" name="texto-247"/>
+          <p:cNvPr id="22" name="texto-252"/>
           <p:cNvSpPr txBox="1"/>
           <p:nvPr/>
         </p:nvSpPr>
@@ -5543,7 +5670,7 @@
                   <a:schemeClr val="tx1"/>
                 </a:solidFill>
               </a:rPr>
-              <a:t>Pruebas antes de producción</a:t>
+              <a:t>¿Qué va en firmware y qué en la app?</a:t>
             </a:r>
             <a:endParaRPr lang="en-US" sz="1400" dirty="0"/>
           </a:p>
@@ -5551,7 +5678,7 @@
       </p:sp>
       <p:sp>
         <p:nvSpPr>
-          <p:cNvPr id="23" name="texto-248"/>
+          <p:cNvPr id="23" name="texto-253"/>
           <p:cNvSpPr txBox="1"/>
           <p:nvPr/>
         </p:nvSpPr>
@@ -5579,7 +5706,7 @@
                   <a:schemeClr val="tx1"/>
                 </a:solidFill>
               </a:rPr>
-              <a:t>Carga sostenida, fuzzing del parser y concurrencia real</a:t>
+              <a:t>Tiempo real y bajo nivel en firmware; lógica y datos en la aplicación</a:t>
             </a:r>
             <a:endParaRPr lang="en-US" sz="1300" dirty="0"/>
           </a:p>
@@ -5587,7 +5714,7 @@
       </p:sp>
       <p:sp>
         <p:nvSpPr>
-          <p:cNvPr id="24" name="tarjeta-249"/>
+          <p:cNvPr id="24" name="tarjeta-254"/>
           <p:cNvSpPr/>
           <p:nvPr/>
         </p:nvSpPr>
@@ -5609,7 +5736,7 @@
       </p:sp>
       <p:sp>
         <p:nvSpPr>
-          <p:cNvPr id="25" name="numero-250"/>
+          <p:cNvPr id="25" name="numero-255"/>
           <p:cNvSpPr txBox="1"/>
           <p:nvPr/>
         </p:nvSpPr>
@@ -5639,7 +5766,7 @@
                   <a:schemeClr val="bg1"/>
                 </a:solidFill>
               </a:rPr>
-              <a:t>12</a:t>
+              <a:t>6</a:t>
             </a:r>
             <a:endParaRPr lang="en-US" sz="1400" dirty="0"/>
           </a:p>
@@ -5647,7 +5774,7 @@
       </p:sp>
       <p:sp>
         <p:nvSpPr>
-          <p:cNvPr id="26" name="texto-251"/>
+          <p:cNvPr id="26" name="texto-256"/>
           <p:cNvSpPr txBox="1"/>
           <p:nvPr/>
         </p:nvSpPr>
@@ -5675,7 +5802,7 @@
                   <a:schemeClr val="tx1"/>
                 </a:solidFill>
               </a:rPr>
-              <a:t>Principal punto de falla</a:t>
+              <a:t>100 dispositivos simultáneos</a:t>
             </a:r>
             <a:endParaRPr lang="en-US" sz="1400" dirty="0"/>
           </a:p>
@@ -5683,7 +5810,7 @@
       </p:sp>
       <p:sp>
         <p:nvSpPr>
-          <p:cNvPr id="27" name="texto-252"/>
+          <p:cNvPr id="27" name="texto-257"/>
           <p:cNvSpPr txBox="1"/>
           <p:nvPr/>
         </p:nvSpPr>
@@ -5711,7 +5838,7 @@
                   <a:schemeClr val="tx1"/>
                 </a:solidFill>
               </a:rPr>
-              <a:t>El socket a un único firmware: redundancia y cola intermedia</a:t>
+              <a:t>3 ya funcionan, un hilo por equipo; para 100: asyncio y MQTT</a:t>
             </a:r>
             <a:endParaRPr lang="en-US" sz="1300" dirty="0"/>
           </a:p>
@@ -5816,10 +5943,10 @@
             <a:r>
               <a:rPr lang="en-US" sz="3600" b="1" dirty="0">
                 <a:solidFill>
-                  <a:schemeClr val="bg1"/>
-                </a:solidFill>
-              </a:rPr>
-              <a:t>Conclusiones</a:t>
+                  <a:schemeClr val="tx1"/>
+                </a:solidFill>
+              </a:rPr>
+              <a:t>Preguntas de integración (2/2)</a:t>
             </a:r>
             <a:endParaRPr lang="en-US" sz="3600" dirty="0"/>
           </a:p>
@@ -5827,174 +5954,36 @@
       </p:sp>
       <p:sp>
         <p:nvSpPr>
-          <p:cNvPr id="4" name="circulo-253"/>
+          <p:cNvPr id="4" name="tarjeta-258"/>
           <p:cNvSpPr/>
           <p:nvPr/>
         </p:nvSpPr>
         <p:spPr>
           <a:xfrm>
-            <a:off x="548640" y="1234440"/>
-            <a:ext cx="548640" cy="548640"/>
-          </a:xfrm>
-          <a:prstGeom prst="ellipse">
-            <a:avLst/>
+            <a:off x="457200" y="1097280"/>
+            <a:ext cx="3977640" cy="1005840"/>
+          </a:xfrm>
+          <a:prstGeom prst="roundRect">
+            <a:avLst>
+              <a:gd name="adj" fmla="val 9091"/>
+            </a:avLst>
           </a:prstGeom>
           <a:solidFill>
-            <a:schemeClr val="accent4"/>
+            <a:schemeClr val="bg2"/>
           </a:solidFill>
           <a:ln/>
         </p:spPr>
       </p:sp>
-      <p:pic>
-        <p:nvPicPr>
-          <p:cNvPr id="5" name="icono-254" descr="preencoded.png">    </p:cNvPr>
-          <p:cNvPicPr>
-            <a:picLocks noChangeAspect="1"/>
-          </p:cNvPicPr>
-          <p:nvPr/>
-        </p:nvPicPr>
-        <p:blipFill>
-          <a:blip r:embed="rId1"/>
-          <a:stretch>
-            <a:fillRect/>
-          </a:stretch>
-        </p:blipFill>
-        <p:spPr>
-          <a:xfrm>
-            <a:off x="669341" y="1355141"/>
-            <a:ext cx="307238" cy="307238"/>
-          </a:xfrm>
-          <a:prstGeom prst="rect">
-            <a:avLst/>
-          </a:prstGeom>
-        </p:spPr>
-      </p:pic>
-      <p:sp>
-        <p:nvSpPr>
-          <p:cNvPr id="6" name="texto-255"/>
+      <p:sp>
+        <p:nvSpPr>
+          <p:cNvPr id="5" name="numero-259"/>
           <p:cNvSpPr txBox="1"/>
           <p:nvPr/>
         </p:nvSpPr>
         <p:spPr>
           <a:xfrm>
-            <a:off x="1325880" y="1234440"/>
-            <a:ext cx="7315200" cy="548640"/>
-          </a:xfrm>
-          <a:prstGeom prst="rect">
-            <a:avLst/>
-          </a:prstGeom>
-          <a:noFill/>
-          <a:ln/>
-        </p:spPr>
-        <p:txBody>
-          <a:bodyPr wrap="square" lIns="0" tIns="0" rIns="0" bIns="0" rtlCol="0" anchor="ctr"/>
-          <a:lstStyle/>
-          <a:p>
-            <a:pPr indent="0" marL="0">
-              <a:buNone/>
-            </a:pPr>
-            <a:r>
-              <a:rPr lang="en-US" sz="1800" dirty="0">
-                <a:solidFill>
-                  <a:schemeClr val="bg1"/>
-                </a:solidFill>
-              </a:rPr>
-              <a:t>Recorrido completo con evidencia real: del firmware al reporte</a:t>
-            </a:r>
-            <a:endParaRPr lang="en-US" sz="1800" dirty="0"/>
-          </a:p>
-        </p:txBody>
-      </p:sp>
-      <p:sp>
-        <p:nvSpPr>
-          <p:cNvPr id="7" name="circulo-256"/>
-          <p:cNvSpPr/>
-          <p:nvPr/>
-        </p:nvSpPr>
-        <p:spPr>
-          <a:xfrm>
-            <a:off x="548640" y="2057400"/>
-            <a:ext cx="548640" cy="548640"/>
-          </a:xfrm>
-          <a:prstGeom prst="ellipse">
-            <a:avLst/>
-          </a:prstGeom>
-          <a:solidFill>
-            <a:schemeClr val="accent1"/>
-          </a:solidFill>
-          <a:ln/>
-        </p:spPr>
-      </p:sp>
-      <p:pic>
-        <p:nvPicPr>
-          <p:cNvPr id="8" name="icono-257" descr="preencoded.png">    </p:cNvPr>
-          <p:cNvPicPr>
-            <a:picLocks noChangeAspect="1"/>
-          </p:cNvPicPr>
-          <p:nvPr/>
-        </p:nvPicPr>
-        <p:blipFill>
-          <a:blip r:embed="rId2"/>
-          <a:stretch>
-            <a:fillRect/>
-          </a:stretch>
-        </p:blipFill>
-        <p:spPr>
-          <a:xfrm>
-            <a:off x="669341" y="2178101"/>
-            <a:ext cx="307238" cy="307238"/>
-          </a:xfrm>
-          <a:prstGeom prst="rect">
-            <a:avLst/>
-          </a:prstGeom>
-        </p:spPr>
-      </p:pic>
-      <p:sp>
-        <p:nvSpPr>
-          <p:cNvPr id="9" name="texto-258"/>
-          <p:cNvSpPr txBox="1"/>
-          <p:nvPr/>
-        </p:nvSpPr>
-        <p:spPr>
-          <a:xfrm>
-            <a:off x="1325880" y="2057400"/>
-            <a:ext cx="7315200" cy="548640"/>
-          </a:xfrm>
-          <a:prstGeom prst="rect">
-            <a:avLst/>
-          </a:prstGeom>
-          <a:noFill/>
-          <a:ln/>
-        </p:spPr>
-        <p:txBody>
-          <a:bodyPr wrap="square" lIns="0" tIns="0" rIns="0" bIns="0" rtlCol="0" anchor="ctr"/>
-          <a:lstStyle/>
-          <a:p>
-            <a:pPr indent="0" marL="0">
-              <a:buNone/>
-            </a:pPr>
-            <a:r>
-              <a:rPr lang="en-US" sz="1800" dirty="0">
-                <a:solidFill>
-                  <a:schemeClr val="bg1"/>
-                </a:solidFill>
-              </a:rPr>
-              <a:t>TDD encontró un defecto real de tolerancia a fallas antes de la entrega</a:t>
-            </a:r>
-            <a:endParaRPr lang="en-US" sz="1800" dirty="0"/>
-          </a:p>
-        </p:txBody>
-      </p:sp>
-      <p:sp>
-        <p:nvSpPr>
-          <p:cNvPr id="10" name="circulo-259"/>
-          <p:cNvSpPr/>
-          <p:nvPr/>
-        </p:nvSpPr>
-        <p:spPr>
-          <a:xfrm>
-            <a:off x="548640" y="2880360"/>
-            <a:ext cx="548640" cy="548640"/>
+            <a:off x="594360" y="1234440"/>
+            <a:ext cx="411480" cy="411480"/>
           </a:xfrm>
           <a:prstGeom prst="ellipse">
             <a:avLst/>
@@ -6004,41 +5993,35 @@
           </a:solidFill>
           <a:ln/>
         </p:spPr>
-      </p:sp>
-      <p:pic>
-        <p:nvPicPr>
-          <p:cNvPr id="11" name="icono-260" descr="preencoded.png">    </p:cNvPr>
-          <p:cNvPicPr>
-            <a:picLocks noChangeAspect="1"/>
-          </p:cNvPicPr>
-          <p:nvPr/>
-        </p:nvPicPr>
-        <p:blipFill>
-          <a:blip r:embed="rId3"/>
-          <a:stretch>
-            <a:fillRect/>
-          </a:stretch>
-        </p:blipFill>
-        <p:spPr>
-          <a:xfrm>
-            <a:off x="669341" y="3001061"/>
-            <a:ext cx="307238" cy="307238"/>
-          </a:xfrm>
-          <a:prstGeom prst="rect">
-            <a:avLst/>
-          </a:prstGeom>
-        </p:spPr>
-      </p:pic>
-      <p:sp>
-        <p:nvSpPr>
-          <p:cNvPr id="12" name="texto-261"/>
+        <p:txBody>
+          <a:bodyPr wrap="square" lIns="0" tIns="0" rIns="0" bIns="0" rtlCol="0" anchor="ctr"/>
+          <a:lstStyle/>
+          <a:p>
+            <a:pPr algn="ctr" indent="0" marL="0">
+              <a:buNone/>
+            </a:pPr>
+            <a:r>
+              <a:rPr lang="en-US" sz="1400" b="1" dirty="0">
+                <a:solidFill>
+                  <a:schemeClr val="bg1"/>
+                </a:solidFill>
+              </a:rPr>
+              <a:t>7</a:t>
+            </a:r>
+            <a:endParaRPr lang="en-US" sz="1400" dirty="0"/>
+          </a:p>
+        </p:txBody>
+      </p:sp>
+      <p:sp>
+        <p:nvSpPr>
+          <p:cNvPr id="6" name="texto-260"/>
           <p:cNvSpPr txBox="1"/>
           <p:nvPr/>
         </p:nvSpPr>
         <p:spPr>
           <a:xfrm>
-            <a:off x="1325880" y="2880360"/>
-            <a:ext cx="7315200" cy="548640"/>
+            <a:off x="1143000" y="1188720"/>
+            <a:ext cx="3154680" cy="320040"/>
           </a:xfrm>
           <a:prstGeom prst="rect">
             <a:avLst/>
@@ -6054,71 +6037,255 @@
               <a:buNone/>
             </a:pPr>
             <a:r>
-              <a:rPr lang="en-US" sz="1800" dirty="0">
+              <a:rPr lang="en-US" sz="1400" b="1" dirty="0">
+                <a:solidFill>
+                  <a:schemeClr val="tx1"/>
+                </a:solidFill>
+              </a:rPr>
+              <a:t>Riesgos de seguridad</a:t>
+            </a:r>
+            <a:endParaRPr lang="en-US" sz="1400" dirty="0"/>
+          </a:p>
+        </p:txBody>
+      </p:sp>
+      <p:sp>
+        <p:nvSpPr>
+          <p:cNvPr id="7" name="texto-261"/>
+          <p:cNvSpPr txBox="1"/>
+          <p:nvPr/>
+        </p:nvSpPr>
+        <p:spPr>
+          <a:xfrm>
+            <a:off x="1143000" y="1508760"/>
+            <a:ext cx="3154680" cy="548640"/>
+          </a:xfrm>
+          <a:prstGeom prst="rect">
+            <a:avLst/>
+          </a:prstGeom>
+          <a:noFill/>
+          <a:ln/>
+        </p:spPr>
+        <p:txBody>
+          <a:bodyPr wrap="square" lIns="0" tIns="0" rIns="0" bIns="0" rtlCol="0" anchor="t"/>
+          <a:lstStyle/>
+          <a:p>
+            <a:pPr indent="0" marL="0">
+              <a:buNone/>
+            </a:pPr>
+            <a:r>
+              <a:rPr lang="en-US" sz="1300" dirty="0">
+                <a:solidFill>
+                  <a:schemeClr val="tx1"/>
+                </a:solidFill>
+              </a:rPr>
+              <a:t>Nunca ejecutar el dato: solo json.loads y validación campo por campo</a:t>
+            </a:r>
+            <a:endParaRPr lang="en-US" sz="1300" dirty="0"/>
+          </a:p>
+        </p:txBody>
+      </p:sp>
+      <p:sp>
+        <p:nvSpPr>
+          <p:cNvPr id="8" name="tarjeta-262"/>
+          <p:cNvSpPr/>
+          <p:nvPr/>
+        </p:nvSpPr>
+        <p:spPr>
+          <a:xfrm>
+            <a:off x="4709160" y="1097280"/>
+            <a:ext cx="3977640" cy="1005840"/>
+          </a:xfrm>
+          <a:prstGeom prst="roundRect">
+            <a:avLst>
+              <a:gd name="adj" fmla="val 9091"/>
+            </a:avLst>
+          </a:prstGeom>
+          <a:solidFill>
+            <a:schemeClr val="bg2"/>
+          </a:solidFill>
+          <a:ln/>
+        </p:spPr>
+      </p:sp>
+      <p:sp>
+        <p:nvSpPr>
+          <p:cNvPr id="9" name="numero-263"/>
+          <p:cNvSpPr txBox="1"/>
+          <p:nvPr/>
+        </p:nvSpPr>
+        <p:spPr>
+          <a:xfrm>
+            <a:off x="4846320" y="1234440"/>
+            <a:ext cx="411480" cy="411480"/>
+          </a:xfrm>
+          <a:prstGeom prst="ellipse">
+            <a:avLst/>
+          </a:prstGeom>
+          <a:solidFill>
+            <a:schemeClr val="accent2"/>
+          </a:solidFill>
+          <a:ln/>
+        </p:spPr>
+        <p:txBody>
+          <a:bodyPr wrap="square" lIns="0" tIns="0" rIns="0" bIns="0" rtlCol="0" anchor="ctr"/>
+          <a:lstStyle/>
+          <a:p>
+            <a:pPr algn="ctr" indent="0" marL="0">
+              <a:buNone/>
+            </a:pPr>
+            <a:r>
+              <a:rPr lang="en-US" sz="1400" b="1" dirty="0">
                 <a:solidFill>
                   <a:schemeClr val="bg1"/>
                 </a:solidFill>
               </a:rPr>
-              <a:t>6 fallos reales y ninguno tumbó la aplicación (RF09)</a:t>
-            </a:r>
-            <a:endParaRPr lang="en-US" sz="1800" dirty="0"/>
-          </a:p>
-        </p:txBody>
-      </p:sp>
-      <p:sp>
-        <p:nvSpPr>
-          <p:cNvPr id="13" name="circulo-262"/>
+              <a:t>8</a:t>
+            </a:r>
+            <a:endParaRPr lang="en-US" sz="1400" dirty="0"/>
+          </a:p>
+        </p:txBody>
+      </p:sp>
+      <p:sp>
+        <p:nvSpPr>
+          <p:cNvPr id="10" name="texto-264"/>
+          <p:cNvSpPr txBox="1"/>
+          <p:nvPr/>
+        </p:nvSpPr>
+        <p:spPr>
+          <a:xfrm>
+            <a:off x="5394960" y="1188720"/>
+            <a:ext cx="3154680" cy="320040"/>
+          </a:xfrm>
+          <a:prstGeom prst="rect">
+            <a:avLst/>
+          </a:prstGeom>
+          <a:noFill/>
+          <a:ln/>
+        </p:spPr>
+        <p:txBody>
+          <a:bodyPr wrap="square" lIns="0" tIns="0" rIns="0" bIns="0" rtlCol="0" anchor="ctr"/>
+          <a:lstStyle/>
+          <a:p>
+            <a:pPr indent="0" marL="0">
+              <a:buNone/>
+            </a:pPr>
+            <a:r>
+              <a:rPr lang="en-US" sz="1400" b="1" dirty="0">
+                <a:solidFill>
+                  <a:schemeClr val="tx1"/>
+                </a:solidFill>
+              </a:rPr>
+              <a:t>Integridad y trazabilidad</a:t>
+            </a:r>
+            <a:endParaRPr lang="en-US" sz="1400" dirty="0"/>
+          </a:p>
+        </p:txBody>
+      </p:sp>
+      <p:sp>
+        <p:nvSpPr>
+          <p:cNvPr id="11" name="texto-265"/>
+          <p:cNvSpPr txBox="1"/>
+          <p:nvPr/>
+        </p:nvSpPr>
+        <p:spPr>
+          <a:xfrm>
+            <a:off x="5394960" y="1508760"/>
+            <a:ext cx="3154680" cy="548640"/>
+          </a:xfrm>
+          <a:prstGeom prst="rect">
+            <a:avLst/>
+          </a:prstGeom>
+          <a:noFill/>
+          <a:ln/>
+        </p:spPr>
+        <p:txBody>
+          <a:bodyPr wrap="square" lIns="0" tIns="0" rIns="0" bIns="0" rtlCol="0" anchor="t"/>
+          <a:lstStyle/>
+          <a:p>
+            <a:pPr indent="0" marL="0">
+              <a:buNone/>
+            </a:pPr>
+            <a:r>
+              <a:rPr lang="en-US" sz="1300" dirty="0">
+                <a:solidFill>
+                  <a:schemeClr val="tx1"/>
+                </a:solidFill>
+              </a:rPr>
+              <a:t>Timestamp y estado en cada registro; logs con evento y resultado</a:t>
+            </a:r>
+            <a:endParaRPr lang="en-US" sz="1300" dirty="0"/>
+          </a:p>
+        </p:txBody>
+      </p:sp>
+      <p:sp>
+        <p:nvSpPr>
+          <p:cNvPr id="12" name="tarjeta-266"/>
           <p:cNvSpPr/>
           <p:nvPr/>
         </p:nvSpPr>
         <p:spPr>
           <a:xfrm>
-            <a:off x="548640" y="3703320"/>
-            <a:ext cx="548640" cy="548640"/>
+            <a:off x="457200" y="2240280"/>
+            <a:ext cx="3977640" cy="1005840"/>
+          </a:xfrm>
+          <a:prstGeom prst="roundRect">
+            <a:avLst>
+              <a:gd name="adj" fmla="val 9091"/>
+            </a:avLst>
+          </a:prstGeom>
+          <a:solidFill>
+            <a:schemeClr val="bg2"/>
+          </a:solidFill>
+          <a:ln/>
+        </p:spPr>
+      </p:sp>
+      <p:sp>
+        <p:nvSpPr>
+          <p:cNvPr id="13" name="numero-267"/>
+          <p:cNvSpPr txBox="1"/>
+          <p:nvPr/>
+        </p:nvSpPr>
+        <p:spPr>
+          <a:xfrm>
+            <a:off x="594360" y="2377440"/>
+            <a:ext cx="411480" cy="411480"/>
           </a:xfrm>
           <a:prstGeom prst="ellipse">
             <a:avLst/>
           </a:prstGeom>
           <a:solidFill>
-            <a:schemeClr val="accent3"/>
+            <a:schemeClr val="accent2"/>
           </a:solidFill>
           <a:ln/>
         </p:spPr>
-      </p:sp>
-      <p:pic>
-        <p:nvPicPr>
-          <p:cNvPr id="14" name="icono-263" descr="preencoded.png">    </p:cNvPr>
-          <p:cNvPicPr>
-            <a:picLocks noChangeAspect="1"/>
-          </p:cNvPicPr>
-          <p:nvPr/>
-        </p:nvPicPr>
-        <p:blipFill>
-          <a:blip r:embed="rId4"/>
-          <a:stretch>
-            <a:fillRect/>
-          </a:stretch>
-        </p:blipFill>
-        <p:spPr>
-          <a:xfrm>
-            <a:off x="669341" y="3824021"/>
-            <a:ext cx="307238" cy="307238"/>
-          </a:xfrm>
-          <a:prstGeom prst="rect">
-            <a:avLst/>
-          </a:prstGeom>
-        </p:spPr>
-      </p:pic>
-      <p:sp>
-        <p:nvSpPr>
-          <p:cNvPr id="15" name="texto-264"/>
+        <p:txBody>
+          <a:bodyPr wrap="square" lIns="0" tIns="0" rIns="0" bIns="0" rtlCol="0" anchor="ctr"/>
+          <a:lstStyle/>
+          <a:p>
+            <a:pPr algn="ctr" indent="0" marL="0">
+              <a:buNone/>
+            </a:pPr>
+            <a:r>
+              <a:rPr lang="en-US" sz="1400" b="1" dirty="0">
+                <a:solidFill>
+                  <a:schemeClr val="bg1"/>
+                </a:solidFill>
+              </a:rPr>
+              <a:t>9</a:t>
+            </a:r>
+            <a:endParaRPr lang="en-US" sz="1400" dirty="0"/>
+          </a:p>
+        </p:txBody>
+      </p:sp>
+      <p:sp>
+        <p:nvSpPr>
+          <p:cNvPr id="14" name="texto-268"/>
           <p:cNvSpPr txBox="1"/>
           <p:nvPr/>
         </p:nvSpPr>
         <p:spPr>
           <a:xfrm>
-            <a:off x="1325880" y="3703320"/>
-            <a:ext cx="7315200" cy="548640"/>
+            <a:off x="1143000" y="2331720"/>
+            <a:ext cx="3154680" cy="320040"/>
           </a:xfrm>
           <a:prstGeom prst="rect">
             <a:avLst/>
@@ -6134,14 +6301,446 @@
               <a:buNone/>
             </a:pPr>
             <a:r>
-              <a:rPr lang="en-US" sz="1800" dirty="0">
+              <a:rPr lang="en-US" sz="1400" b="1" dirty="0">
+                <a:solidFill>
+                  <a:schemeClr val="tx1"/>
+                </a:solidFill>
+              </a:rPr>
+              <a:t>Windows frente a Linux</a:t>
+            </a:r>
+            <a:endParaRPr lang="en-US" sz="1400" dirty="0"/>
+          </a:p>
+        </p:txBody>
+      </p:sp>
+      <p:sp>
+        <p:nvSpPr>
+          <p:cNvPr id="15" name="texto-269"/>
+          <p:cNvSpPr txBox="1"/>
+          <p:nvPr/>
+        </p:nvSpPr>
+        <p:spPr>
+          <a:xfrm>
+            <a:off x="1143000" y="2651760"/>
+            <a:ext cx="3154680" cy="548640"/>
+          </a:xfrm>
+          <a:prstGeom prst="rect">
+            <a:avLst/>
+          </a:prstGeom>
+          <a:noFill/>
+          <a:ln/>
+        </p:spPr>
+        <p:txBody>
+          <a:bodyPr wrap="square" lIns="0" tIns="0" rIns="0" bIns="0" rtlCol="0" anchor="t"/>
+          <a:lstStyle/>
+          <a:p>
+            <a:pPr indent="0" marL="0">
+              <a:buNone/>
+            </a:pPr>
+            <a:r>
+              <a:rPr lang="en-US" sz="1300" dirty="0">
+                <a:solidFill>
+                  <a:schemeClr val="tx1"/>
+                </a:solidFill>
+              </a:rPr>
+              <a:t>Códigos de error de socket distintos, misma jerarquía de excepciones</a:t>
+            </a:r>
+            <a:endParaRPr lang="en-US" sz="1300" dirty="0"/>
+          </a:p>
+        </p:txBody>
+      </p:sp>
+      <p:sp>
+        <p:nvSpPr>
+          <p:cNvPr id="16" name="tarjeta-270"/>
+          <p:cNvSpPr/>
+          <p:nvPr/>
+        </p:nvSpPr>
+        <p:spPr>
+          <a:xfrm>
+            <a:off x="4709160" y="2240280"/>
+            <a:ext cx="3977640" cy="1005840"/>
+          </a:xfrm>
+          <a:prstGeom prst="roundRect">
+            <a:avLst>
+              <a:gd name="adj" fmla="val 9091"/>
+            </a:avLst>
+          </a:prstGeom>
+          <a:solidFill>
+            <a:schemeClr val="bg2"/>
+          </a:solidFill>
+          <a:ln/>
+        </p:spPr>
+      </p:sp>
+      <p:sp>
+        <p:nvSpPr>
+          <p:cNvPr id="17" name="numero-271"/>
+          <p:cNvSpPr txBox="1"/>
+          <p:nvPr/>
+        </p:nvSpPr>
+        <p:spPr>
+          <a:xfrm>
+            <a:off x="4846320" y="2377440"/>
+            <a:ext cx="411480" cy="411480"/>
+          </a:xfrm>
+          <a:prstGeom prst="ellipse">
+            <a:avLst/>
+          </a:prstGeom>
+          <a:solidFill>
+            <a:schemeClr val="accent2"/>
+          </a:solidFill>
+          <a:ln/>
+        </p:spPr>
+        <p:txBody>
+          <a:bodyPr wrap="square" lIns="0" tIns="0" rIns="0" bIns="0" rtlCol="0" anchor="ctr"/>
+          <a:lstStyle/>
+          <a:p>
+            <a:pPr algn="ctr" indent="0" marL="0">
+              <a:buNone/>
+            </a:pPr>
+            <a:r>
+              <a:rPr lang="en-US" sz="1400" b="1" dirty="0">
                 <a:solidFill>
                   <a:schemeClr val="bg1"/>
                 </a:solidFill>
               </a:rPr>
-              <a:t>Siguiente paso: escalar a varios dispositivos con una cola de mensajes</a:t>
-            </a:r>
-            <a:endParaRPr lang="en-US" sz="1800" dirty="0"/>
+              <a:t>10</a:t>
+            </a:r>
+            <a:endParaRPr lang="en-US" sz="1400" dirty="0"/>
+          </a:p>
+        </p:txBody>
+      </p:sp>
+      <p:sp>
+        <p:nvSpPr>
+          <p:cNvPr id="18" name="texto-272"/>
+          <p:cNvSpPr txBox="1"/>
+          <p:nvPr/>
+        </p:nvSpPr>
+        <p:spPr>
+          <a:xfrm>
+            <a:off x="5394960" y="2331720"/>
+            <a:ext cx="3154680" cy="320040"/>
+          </a:xfrm>
+          <a:prstGeom prst="rect">
+            <a:avLst/>
+          </a:prstGeom>
+          <a:noFill/>
+          <a:ln/>
+        </p:spPr>
+        <p:txBody>
+          <a:bodyPr wrap="square" lIns="0" tIns="0" rIns="0" bIns="0" rtlCol="0" anchor="ctr"/>
+          <a:lstStyle/>
+          <a:p>
+            <a:pPr indent="0" marL="0">
+              <a:buNone/>
+            </a:pPr>
+            <a:r>
+              <a:rPr lang="en-US" sz="1400" b="1" dirty="0">
+                <a:solidFill>
+                  <a:schemeClr val="tx1"/>
+                </a:solidFill>
+              </a:rPr>
+              <a:t>Actualizar el firmware</a:t>
+            </a:r>
+            <a:endParaRPr lang="en-US" sz="1400" dirty="0"/>
+          </a:p>
+        </p:txBody>
+      </p:sp>
+      <p:sp>
+        <p:nvSpPr>
+          <p:cNvPr id="19" name="texto-273"/>
+          <p:cNvSpPr txBox="1"/>
+          <p:nvPr/>
+        </p:nvSpPr>
+        <p:spPr>
+          <a:xfrm>
+            <a:off x="5394960" y="2651760"/>
+            <a:ext cx="3154680" cy="548640"/>
+          </a:xfrm>
+          <a:prstGeom prst="rect">
+            <a:avLst/>
+          </a:prstGeom>
+          <a:noFill/>
+          <a:ln/>
+        </p:spPr>
+        <p:txBody>
+          <a:bodyPr wrap="square" lIns="0" tIns="0" rIns="0" bIns="0" rtlCol="0" anchor="t"/>
+          <a:lstStyle/>
+          <a:p>
+            <a:pPr indent="0" marL="0">
+              <a:buNone/>
+            </a:pPr>
+            <a:r>
+              <a:rPr lang="en-US" sz="1300" dirty="0">
+                <a:solidFill>
+                  <a:schemeClr val="tx1"/>
+                </a:solidFill>
+              </a:rPr>
+              <a:t>Despliegue azul-verde: validar la versión nueva antes de conmutar</a:t>
+            </a:r>
+            <a:endParaRPr lang="en-US" sz="1300" dirty="0"/>
+          </a:p>
+        </p:txBody>
+      </p:sp>
+      <p:sp>
+        <p:nvSpPr>
+          <p:cNvPr id="20" name="tarjeta-274"/>
+          <p:cNvSpPr/>
+          <p:nvPr/>
+        </p:nvSpPr>
+        <p:spPr>
+          <a:xfrm>
+            <a:off x="457200" y="3383280"/>
+            <a:ext cx="3977640" cy="1005840"/>
+          </a:xfrm>
+          <a:prstGeom prst="roundRect">
+            <a:avLst>
+              <a:gd name="adj" fmla="val 9091"/>
+            </a:avLst>
+          </a:prstGeom>
+          <a:solidFill>
+            <a:schemeClr val="bg2"/>
+          </a:solidFill>
+          <a:ln/>
+        </p:spPr>
+      </p:sp>
+      <p:sp>
+        <p:nvSpPr>
+          <p:cNvPr id="21" name="numero-275"/>
+          <p:cNvSpPr txBox="1"/>
+          <p:nvPr/>
+        </p:nvSpPr>
+        <p:spPr>
+          <a:xfrm>
+            <a:off x="594360" y="3520440"/>
+            <a:ext cx="411480" cy="411480"/>
+          </a:xfrm>
+          <a:prstGeom prst="ellipse">
+            <a:avLst/>
+          </a:prstGeom>
+          <a:solidFill>
+            <a:schemeClr val="accent2"/>
+          </a:solidFill>
+          <a:ln/>
+        </p:spPr>
+        <p:txBody>
+          <a:bodyPr wrap="square" lIns="0" tIns="0" rIns="0" bIns="0" rtlCol="0" anchor="ctr"/>
+          <a:lstStyle/>
+          <a:p>
+            <a:pPr algn="ctr" indent="0" marL="0">
+              <a:buNone/>
+            </a:pPr>
+            <a:r>
+              <a:rPr lang="en-US" sz="1400" b="1" dirty="0">
+                <a:solidFill>
+                  <a:schemeClr val="bg1"/>
+                </a:solidFill>
+              </a:rPr>
+              <a:t>11</a:t>
+            </a:r>
+            <a:endParaRPr lang="en-US" sz="1400" dirty="0"/>
+          </a:p>
+        </p:txBody>
+      </p:sp>
+      <p:sp>
+        <p:nvSpPr>
+          <p:cNvPr id="22" name="texto-276"/>
+          <p:cNvSpPr txBox="1"/>
+          <p:nvPr/>
+        </p:nvSpPr>
+        <p:spPr>
+          <a:xfrm>
+            <a:off x="1143000" y="3474720"/>
+            <a:ext cx="3154680" cy="320040"/>
+          </a:xfrm>
+          <a:prstGeom prst="rect">
+            <a:avLst/>
+          </a:prstGeom>
+          <a:noFill/>
+          <a:ln/>
+        </p:spPr>
+        <p:txBody>
+          <a:bodyPr wrap="square" lIns="0" tIns="0" rIns="0" bIns="0" rtlCol="0" anchor="ctr"/>
+          <a:lstStyle/>
+          <a:p>
+            <a:pPr indent="0" marL="0">
+              <a:buNone/>
+            </a:pPr>
+            <a:r>
+              <a:rPr lang="en-US" sz="1400" b="1" dirty="0">
+                <a:solidFill>
+                  <a:schemeClr val="tx1"/>
+                </a:solidFill>
+              </a:rPr>
+              <a:t>Pruebas antes de producción</a:t>
+            </a:r>
+            <a:endParaRPr lang="en-US" sz="1400" dirty="0"/>
+          </a:p>
+        </p:txBody>
+      </p:sp>
+      <p:sp>
+        <p:nvSpPr>
+          <p:cNvPr id="23" name="texto-277"/>
+          <p:cNvSpPr txBox="1"/>
+          <p:nvPr/>
+        </p:nvSpPr>
+        <p:spPr>
+          <a:xfrm>
+            <a:off x="1143000" y="3794760"/>
+            <a:ext cx="3154680" cy="548640"/>
+          </a:xfrm>
+          <a:prstGeom prst="rect">
+            <a:avLst/>
+          </a:prstGeom>
+          <a:noFill/>
+          <a:ln/>
+        </p:spPr>
+        <p:txBody>
+          <a:bodyPr wrap="square" lIns="0" tIns="0" rIns="0" bIns="0" rtlCol="0" anchor="t"/>
+          <a:lstStyle/>
+          <a:p>
+            <a:pPr indent="0" marL="0">
+              <a:buNone/>
+            </a:pPr>
+            <a:r>
+              <a:rPr lang="en-US" sz="1300" dirty="0">
+                <a:solidFill>
+                  <a:schemeClr val="tx1"/>
+                </a:solidFill>
+              </a:rPr>
+              <a:t>Carga sostenida, fuzzing del parser y concurrencia real</a:t>
+            </a:r>
+            <a:endParaRPr lang="en-US" sz="1300" dirty="0"/>
+          </a:p>
+        </p:txBody>
+      </p:sp>
+      <p:sp>
+        <p:nvSpPr>
+          <p:cNvPr id="24" name="tarjeta-278"/>
+          <p:cNvSpPr/>
+          <p:nvPr/>
+        </p:nvSpPr>
+        <p:spPr>
+          <a:xfrm>
+            <a:off x="4709160" y="3383280"/>
+            <a:ext cx="3977640" cy="1005840"/>
+          </a:xfrm>
+          <a:prstGeom prst="roundRect">
+            <a:avLst>
+              <a:gd name="adj" fmla="val 9091"/>
+            </a:avLst>
+          </a:prstGeom>
+          <a:solidFill>
+            <a:schemeClr val="bg2"/>
+          </a:solidFill>
+          <a:ln/>
+        </p:spPr>
+      </p:sp>
+      <p:sp>
+        <p:nvSpPr>
+          <p:cNvPr id="25" name="numero-279"/>
+          <p:cNvSpPr txBox="1"/>
+          <p:nvPr/>
+        </p:nvSpPr>
+        <p:spPr>
+          <a:xfrm>
+            <a:off x="4846320" y="3520440"/>
+            <a:ext cx="411480" cy="411480"/>
+          </a:xfrm>
+          <a:prstGeom prst="ellipse">
+            <a:avLst/>
+          </a:prstGeom>
+          <a:solidFill>
+            <a:schemeClr val="accent2"/>
+          </a:solidFill>
+          <a:ln/>
+        </p:spPr>
+        <p:txBody>
+          <a:bodyPr wrap="square" lIns="0" tIns="0" rIns="0" bIns="0" rtlCol="0" anchor="ctr"/>
+          <a:lstStyle/>
+          <a:p>
+            <a:pPr algn="ctr" indent="0" marL="0">
+              <a:buNone/>
+            </a:pPr>
+            <a:r>
+              <a:rPr lang="en-US" sz="1400" b="1" dirty="0">
+                <a:solidFill>
+                  <a:schemeClr val="bg1"/>
+                </a:solidFill>
+              </a:rPr>
+              <a:t>12</a:t>
+            </a:r>
+            <a:endParaRPr lang="en-US" sz="1400" dirty="0"/>
+          </a:p>
+        </p:txBody>
+      </p:sp>
+      <p:sp>
+        <p:nvSpPr>
+          <p:cNvPr id="26" name="texto-280"/>
+          <p:cNvSpPr txBox="1"/>
+          <p:nvPr/>
+        </p:nvSpPr>
+        <p:spPr>
+          <a:xfrm>
+            <a:off x="5394960" y="3474720"/>
+            <a:ext cx="3154680" cy="320040"/>
+          </a:xfrm>
+          <a:prstGeom prst="rect">
+            <a:avLst/>
+          </a:prstGeom>
+          <a:noFill/>
+          <a:ln/>
+        </p:spPr>
+        <p:txBody>
+          <a:bodyPr wrap="square" lIns="0" tIns="0" rIns="0" bIns="0" rtlCol="0" anchor="ctr"/>
+          <a:lstStyle/>
+          <a:p>
+            <a:pPr indent="0" marL="0">
+              <a:buNone/>
+            </a:pPr>
+            <a:r>
+              <a:rPr lang="en-US" sz="1400" b="1" dirty="0">
+                <a:solidFill>
+                  <a:schemeClr val="tx1"/>
+                </a:solidFill>
+              </a:rPr>
+              <a:t>Principal punto de falla</a:t>
+            </a:r>
+            <a:endParaRPr lang="en-US" sz="1400" dirty="0"/>
+          </a:p>
+        </p:txBody>
+      </p:sp>
+      <p:sp>
+        <p:nvSpPr>
+          <p:cNvPr id="27" name="texto-281"/>
+          <p:cNvSpPr txBox="1"/>
+          <p:nvPr/>
+        </p:nvSpPr>
+        <p:spPr>
+          <a:xfrm>
+            <a:off x="5394960" y="3794760"/>
+            <a:ext cx="3154680" cy="548640"/>
+          </a:xfrm>
+          <a:prstGeom prst="rect">
+            <a:avLst/>
+          </a:prstGeom>
+          <a:noFill/>
+          <a:ln/>
+        </p:spPr>
+        <p:txBody>
+          <a:bodyPr wrap="square" lIns="0" tIns="0" rIns="0" bIns="0" rtlCol="0" anchor="t"/>
+          <a:lstStyle/>
+          <a:p>
+            <a:pPr indent="0" marL="0">
+              <a:buNone/>
+            </a:pPr>
+            <a:r>
+              <a:rPr lang="en-US" sz="1300" dirty="0">
+                <a:solidFill>
+                  <a:schemeClr val="tx1"/>
+                </a:solidFill>
+              </a:rPr>
+              <a:t>El socket a cada firmware: redundancia y cola intermedia</a:t>
+            </a:r>
+            <a:endParaRPr lang="en-US" sz="1300" dirty="0"/>
           </a:p>
         </p:txBody>
       </p:sp>
@@ -6175,7 +6774,7 @@
             <a:lvl1pPr>
               <a:defRPr sz="1000">
                 <a:solidFill>
-                  <a:schemeClr val="bg2"/>
+                  <a:schemeClr val="tx2"/>
                 </a:solidFill>
               </a:defRPr>
             </a:lvl1pPr>
@@ -6244,10 +6843,10 @@
             <a:r>
               <a:rPr lang="en-US" sz="3600" b="1" dirty="0">
                 <a:solidFill>
-                  <a:schemeClr val="tx1"/>
-                </a:solidFill>
-              </a:rPr>
-              <a:t>Referencias (APA 7)</a:t>
+                  <a:schemeClr val="bg1"/>
+                </a:solidFill>
+              </a:rPr>
+              <a:t>Conclusiones</a:t>
             </a:r>
             <a:endParaRPr lang="en-US" sz="3600" dirty="0"/>
           </a:p>
@@ -6255,253 +6854,27 @@
       </p:sp>
       <p:sp>
         <p:nvSpPr>
-          <p:cNvPr id="4" name="Text 0"/>
+          <p:cNvPr id="4" name="circulo-282"/>
           <p:cNvSpPr/>
-          <p:nvPr>
-            <p:ph idx="101" type="body" hasCustomPrompt="1"/>
-          </p:nvPr>
-        </p:nvSpPr>
-        <p:spPr>
-          <a:xfrm>
-            <a:off x="457200" y="1143000"/>
-            <a:ext cx="8229600" cy="2697480"/>
-          </a:xfrm>
-          <a:prstGeom prst="rect">
-            <a:avLst/>
-          </a:prstGeom>
-          <a:noFill/>
-          <a:ln/>
-        </p:spPr>
-        <p:txBody>
-          <a:bodyPr wrap="square" lIns="0" tIns="0" rIns="0" bIns="0" rtlCol="0" anchor="t"/>
-          <a:lstStyle/>
-          <a:p>
-            <a:pPr indent="0" marL="0">
-              <a:spcAft>
-                <a:spcPts val="1000"/>
-              </a:spcAft>
-              <a:buNone/>
-            </a:pPr>
-            <a:r>
-              <a:rPr lang="en-US" sz="1400" dirty="0">
-                <a:solidFill>
-                  <a:schemeClr val="tx1"/>
-                </a:solidFill>
-              </a:rPr>
-              <a:t>Martinez Barrera, C. (2026). </a:t>
-            </a:r>
-            <a:pPr indent="0" marL="0">
-              <a:spcAft>
-                <a:spcPts val="1000"/>
-              </a:spcAft>
-              <a:buNone/>
-            </a:pPr>
-            <a:r>
-              <a:rPr lang="en-US" sz="1400" i="1" dirty="0">
-                <a:solidFill>
-                  <a:schemeClr val="tx1"/>
-                </a:solidFill>
-              </a:rPr>
-              <a:t>Evaluación segundo corte — Integración de Sistemas de Información 2026-2</a:t>
-            </a:r>
-            <a:pPr indent="0" marL="0">
-              <a:spcAft>
-                <a:spcPts val="1000"/>
-              </a:spcAft>
-              <a:buNone/>
-            </a:pPr>
-            <a:r>
-              <a:rPr lang="en-US" sz="1400" dirty="0">
-                <a:solidFill>
-                  <a:schemeClr val="tx1"/>
-                </a:solidFill>
-              </a:rPr>
-              <a:t> [Guía de práctica]. Universidad Santo Tomás.</a:t>
-            </a:r>
-            <a:endParaRPr lang="en-US" sz="1400" dirty="0"/>
-          </a:p>
-          <a:p>
-            <a:pPr indent="0" marL="0">
-              <a:spcAft>
-                <a:spcPts val="1000"/>
-              </a:spcAft>
-              <a:buNone/>
-            </a:pPr>
-            <a:r>
-              <a:rPr lang="en-US" sz="1400" dirty="0">
-                <a:solidFill>
-                  <a:schemeClr val="tx1"/>
-                </a:solidFill>
-              </a:rPr>
-              <a:t>Python Software Foundation. (2026). </a:t>
-            </a:r>
-            <a:pPr indent="0" marL="0">
-              <a:spcAft>
-                <a:spcPts val="1000"/>
-              </a:spcAft>
-              <a:buNone/>
-            </a:pPr>
-            <a:r>
-              <a:rPr lang="en-US" sz="1400" i="1" dirty="0">
-                <a:solidFill>
-                  <a:schemeClr val="tx1"/>
-                </a:solidFill>
-              </a:rPr>
-              <a:t>Python 3 documentation</a:t>
-            </a:r>
-            <a:pPr indent="0" marL="0">
-              <a:spcAft>
-                <a:spcPts val="1000"/>
-              </a:spcAft>
-              <a:buNone/>
-            </a:pPr>
-            <a:r>
-              <a:rPr lang="en-US" sz="1400" dirty="0">
-                <a:solidFill>
-                  <a:schemeClr val="tx1"/>
-                </a:solidFill>
-              </a:rPr>
-              <a:t>. https://docs.python.org/3/</a:t>
-            </a:r>
-            <a:endParaRPr lang="en-US" sz="1400" dirty="0"/>
-          </a:p>
-          <a:p>
-            <a:pPr indent="0" marL="0">
-              <a:spcAft>
-                <a:spcPts val="1000"/>
-              </a:spcAft>
-              <a:buNone/>
-            </a:pPr>
-            <a:r>
-              <a:rPr lang="en-US" sz="1400" dirty="0">
-                <a:solidFill>
-                  <a:schemeClr val="tx1"/>
-                </a:solidFill>
-              </a:rPr>
-              <a:t>Rodola, G. (2026). </a:t>
-            </a:r>
-            <a:pPr indent="0" marL="0">
-              <a:spcAft>
-                <a:spcPts val="1000"/>
-              </a:spcAft>
-              <a:buNone/>
-            </a:pPr>
-            <a:r>
-              <a:rPr lang="en-US" sz="1400" i="1" dirty="0">
-                <a:solidFill>
-                  <a:schemeClr val="tx1"/>
-                </a:solidFill>
-              </a:rPr>
-              <a:t>psutil documentation</a:t>
-            </a:r>
-            <a:pPr indent="0" marL="0">
-              <a:spcAft>
-                <a:spcPts val="1000"/>
-              </a:spcAft>
-              <a:buNone/>
-            </a:pPr>
-            <a:r>
-              <a:rPr lang="en-US" sz="1400" dirty="0">
-                <a:solidFill>
-                  <a:schemeClr val="tx1"/>
-                </a:solidFill>
-              </a:rPr>
-              <a:t>. https://psutil.readthedocs.io/</a:t>
-            </a:r>
-            <a:endParaRPr lang="en-US" sz="1400" dirty="0"/>
-          </a:p>
-          <a:p>
-            <a:pPr indent="0" marL="0">
-              <a:spcAft>
-                <a:spcPts val="1000"/>
-              </a:spcAft>
-              <a:buNone/>
-            </a:pPr>
-            <a:r>
-              <a:rPr lang="en-US" sz="1400" dirty="0">
-                <a:solidFill>
-                  <a:schemeClr val="tx1"/>
-                </a:solidFill>
-              </a:rPr>
-              <a:t>Microsoft. (2026). </a:t>
-            </a:r>
-            <a:pPr indent="0" marL="0">
-              <a:spcAft>
-                <a:spcPts val="1000"/>
-              </a:spcAft>
-              <a:buNone/>
-            </a:pPr>
-            <a:r>
-              <a:rPr lang="en-US" sz="1400" i="1" dirty="0">
-                <a:solidFill>
-                  <a:schemeClr val="tx1"/>
-                </a:solidFill>
-              </a:rPr>
-              <a:t>Windows Sockets error codes</a:t>
-            </a:r>
-            <a:pPr indent="0" marL="0">
-              <a:spcAft>
-                <a:spcPts val="1000"/>
-              </a:spcAft>
-              <a:buNone/>
-            </a:pPr>
-            <a:r>
-              <a:rPr lang="en-US" sz="1400" dirty="0">
-                <a:solidFill>
-                  <a:schemeClr val="tx1"/>
-                </a:solidFill>
-              </a:rPr>
-              <a:t>. Microsoft Learn. https://learn.microsoft.com/windows/win32/winsock/windows-sockets-error-codes-2</a:t>
-            </a:r>
-            <a:endParaRPr lang="en-US" sz="1400" dirty="0"/>
-          </a:p>
-        </p:txBody>
-      </p:sp>
-      <p:sp>
-        <p:nvSpPr>
-          <p:cNvPr id="5" name="tarjeta-265"/>
-          <p:cNvSpPr/>
-          <p:nvPr/>
-        </p:nvSpPr>
-        <p:spPr>
-          <a:xfrm>
-            <a:off x="457200" y="3931920"/>
-            <a:ext cx="8229600" cy="685800"/>
-          </a:xfrm>
-          <a:prstGeom prst="roundRect">
-            <a:avLst>
-              <a:gd name="adj" fmla="val 13333"/>
-            </a:avLst>
+          <p:nvPr/>
+        </p:nvSpPr>
+        <p:spPr>
+          <a:xfrm>
+            <a:off x="548640" y="1234440"/>
+            <a:ext cx="548640" cy="548640"/>
+          </a:xfrm>
+          <a:prstGeom prst="ellipse">
+            <a:avLst/>
           </a:prstGeom>
           <a:solidFill>
-            <a:schemeClr val="bg2"/>
-          </a:solidFill>
-          <a:ln/>
-        </p:spPr>
-      </p:sp>
-      <p:sp>
-        <p:nvSpPr>
-          <p:cNvPr id="6" name="circulo-266"/>
-          <p:cNvSpPr/>
-          <p:nvPr/>
-        </p:nvSpPr>
-        <p:spPr>
-          <a:xfrm>
-            <a:off x="594360" y="4041648"/>
-            <a:ext cx="457200" cy="457200"/>
-          </a:xfrm>
-          <a:prstGeom prst="ellipse">
-            <a:avLst/>
-          </a:prstGeom>
-          <a:solidFill>
-            <a:schemeClr val="tx1"/>
+            <a:schemeClr val="accent4"/>
           </a:solidFill>
           <a:ln/>
         </p:spPr>
       </p:sp>
       <p:pic>
         <p:nvPicPr>
-          <p:cNvPr id="7" name="icono-267" descr="preencoded.png">    </p:cNvPr>
+          <p:cNvPr id="5" name="icono-283" descr="preencoded.png">    </p:cNvPr>
           <p:cNvPicPr>
             <a:picLocks noChangeAspect="1"/>
           </p:cNvPicPr>
@@ -6515,8 +6888,8 @@
         </p:blipFill>
         <p:spPr>
           <a:xfrm>
-            <a:off x="694944" y="4142232"/>
-            <a:ext cx="256032" cy="256032"/>
+            <a:off x="669341" y="1355141"/>
+            <a:ext cx="307238" cy="307238"/>
           </a:xfrm>
           <a:prstGeom prst="rect">
             <a:avLst/>
@@ -6525,14 +6898,14 @@
       </p:pic>
       <p:sp>
         <p:nvSpPr>
-          <p:cNvPr id="8" name="texto-268"/>
+          <p:cNvPr id="6" name="texto-284"/>
           <p:cNvSpPr txBox="1"/>
           <p:nvPr/>
         </p:nvSpPr>
         <p:spPr>
           <a:xfrm>
-            <a:off x="1188720" y="3931920"/>
-            <a:ext cx="7406640" cy="685800"/>
+            <a:off x="1325880" y="1234440"/>
+            <a:ext cx="7315200" cy="548640"/>
           </a:xfrm>
           <a:prstGeom prst="rect">
             <a:avLst/>
@@ -6548,14 +6921,254 @@
               <a:buNone/>
             </a:pPr>
             <a:r>
-              <a:rPr lang="en-US" sz="1400" dirty="0">
-                <a:solidFill>
-                  <a:schemeClr val="tx1"/>
-                </a:solidFill>
-              </a:rPr>
-              <a:t>Código, pruebas, evidencia y documento técnico: github.com/Facabore/practica-hsf-segundo-corte</a:t>
-            </a:r>
-            <a:endParaRPr lang="en-US" sz="1400" dirty="0"/>
+              <a:rPr lang="en-US" sz="1800" dirty="0">
+                <a:solidFill>
+                  <a:schemeClr val="bg1"/>
+                </a:solidFill>
+              </a:rPr>
+              <a:t>Recorrido completo con evidencia real: del firmware al reporte</a:t>
+            </a:r>
+            <a:endParaRPr lang="en-US" sz="1800" dirty="0"/>
+          </a:p>
+        </p:txBody>
+      </p:sp>
+      <p:sp>
+        <p:nvSpPr>
+          <p:cNvPr id="7" name="circulo-285"/>
+          <p:cNvSpPr/>
+          <p:nvPr/>
+        </p:nvSpPr>
+        <p:spPr>
+          <a:xfrm>
+            <a:off x="548640" y="2057400"/>
+            <a:ext cx="548640" cy="548640"/>
+          </a:xfrm>
+          <a:prstGeom prst="ellipse">
+            <a:avLst/>
+          </a:prstGeom>
+          <a:solidFill>
+            <a:schemeClr val="accent1"/>
+          </a:solidFill>
+          <a:ln/>
+        </p:spPr>
+      </p:sp>
+      <p:pic>
+        <p:nvPicPr>
+          <p:cNvPr id="8" name="icono-286" descr="preencoded.png">    </p:cNvPr>
+          <p:cNvPicPr>
+            <a:picLocks noChangeAspect="1"/>
+          </p:cNvPicPr>
+          <p:nvPr/>
+        </p:nvPicPr>
+        <p:blipFill>
+          <a:blip r:embed="rId2"/>
+          <a:stretch>
+            <a:fillRect/>
+          </a:stretch>
+        </p:blipFill>
+        <p:spPr>
+          <a:xfrm>
+            <a:off x="669341" y="2178101"/>
+            <a:ext cx="307238" cy="307238"/>
+          </a:xfrm>
+          <a:prstGeom prst="rect">
+            <a:avLst/>
+          </a:prstGeom>
+        </p:spPr>
+      </p:pic>
+      <p:sp>
+        <p:nvSpPr>
+          <p:cNvPr id="9" name="texto-287"/>
+          <p:cNvSpPr txBox="1"/>
+          <p:nvPr/>
+        </p:nvSpPr>
+        <p:spPr>
+          <a:xfrm>
+            <a:off x="1325880" y="2057400"/>
+            <a:ext cx="7315200" cy="548640"/>
+          </a:xfrm>
+          <a:prstGeom prst="rect">
+            <a:avLst/>
+          </a:prstGeom>
+          <a:noFill/>
+          <a:ln/>
+        </p:spPr>
+        <p:txBody>
+          <a:bodyPr wrap="square" lIns="0" tIns="0" rIns="0" bIns="0" rtlCol="0" anchor="ctr"/>
+          <a:lstStyle/>
+          <a:p>
+            <a:pPr indent="0" marL="0">
+              <a:buNone/>
+            </a:pPr>
+            <a:r>
+              <a:rPr lang="en-US" sz="1800" dirty="0">
+                <a:solidFill>
+                  <a:schemeClr val="bg1"/>
+                </a:solidFill>
+              </a:rPr>
+              <a:t>TDD encontró un defecto real de tolerancia a fallas antes de la entrega</a:t>
+            </a:r>
+            <a:endParaRPr lang="en-US" sz="1800" dirty="0"/>
+          </a:p>
+        </p:txBody>
+      </p:sp>
+      <p:sp>
+        <p:nvSpPr>
+          <p:cNvPr id="10" name="circulo-288"/>
+          <p:cNvSpPr/>
+          <p:nvPr/>
+        </p:nvSpPr>
+        <p:spPr>
+          <a:xfrm>
+            <a:off x="548640" y="2880360"/>
+            <a:ext cx="548640" cy="548640"/>
+          </a:xfrm>
+          <a:prstGeom prst="ellipse">
+            <a:avLst/>
+          </a:prstGeom>
+          <a:solidFill>
+            <a:schemeClr val="accent2"/>
+          </a:solidFill>
+          <a:ln/>
+        </p:spPr>
+      </p:sp>
+      <p:pic>
+        <p:nvPicPr>
+          <p:cNvPr id="11" name="icono-289" descr="preencoded.png">    </p:cNvPr>
+          <p:cNvPicPr>
+            <a:picLocks noChangeAspect="1"/>
+          </p:cNvPicPr>
+          <p:nvPr/>
+        </p:nvPicPr>
+        <p:blipFill>
+          <a:blip r:embed="rId3"/>
+          <a:stretch>
+            <a:fillRect/>
+          </a:stretch>
+        </p:blipFill>
+        <p:spPr>
+          <a:xfrm>
+            <a:off x="669341" y="3001061"/>
+            <a:ext cx="307238" cy="307238"/>
+          </a:xfrm>
+          <a:prstGeom prst="rect">
+            <a:avLst/>
+          </a:prstGeom>
+        </p:spPr>
+      </p:pic>
+      <p:sp>
+        <p:nvSpPr>
+          <p:cNvPr id="12" name="texto-290"/>
+          <p:cNvSpPr txBox="1"/>
+          <p:nvPr/>
+        </p:nvSpPr>
+        <p:spPr>
+          <a:xfrm>
+            <a:off x="1325880" y="2880360"/>
+            <a:ext cx="7315200" cy="548640"/>
+          </a:xfrm>
+          <a:prstGeom prst="rect">
+            <a:avLst/>
+          </a:prstGeom>
+          <a:noFill/>
+          <a:ln/>
+        </p:spPr>
+        <p:txBody>
+          <a:bodyPr wrap="square" lIns="0" tIns="0" rIns="0" bIns="0" rtlCol="0" anchor="ctr"/>
+          <a:lstStyle/>
+          <a:p>
+            <a:pPr indent="0" marL="0">
+              <a:buNone/>
+            </a:pPr>
+            <a:r>
+              <a:rPr lang="en-US" sz="1800" dirty="0">
+                <a:solidFill>
+                  <a:schemeClr val="bg1"/>
+                </a:solidFill>
+              </a:rPr>
+              <a:t>6 fallos reales y ninguno tumbó la aplicación (RF09)</a:t>
+            </a:r>
+            <a:endParaRPr lang="en-US" sz="1800" dirty="0"/>
+          </a:p>
+        </p:txBody>
+      </p:sp>
+      <p:sp>
+        <p:nvSpPr>
+          <p:cNvPr id="13" name="circulo-291"/>
+          <p:cNvSpPr/>
+          <p:nvPr/>
+        </p:nvSpPr>
+        <p:spPr>
+          <a:xfrm>
+            <a:off x="548640" y="3703320"/>
+            <a:ext cx="548640" cy="548640"/>
+          </a:xfrm>
+          <a:prstGeom prst="ellipse">
+            <a:avLst/>
+          </a:prstGeom>
+          <a:solidFill>
+            <a:schemeClr val="accent3"/>
+          </a:solidFill>
+          <a:ln/>
+        </p:spPr>
+      </p:sp>
+      <p:pic>
+        <p:nvPicPr>
+          <p:cNvPr id="14" name="icono-292" descr="preencoded.png">    </p:cNvPr>
+          <p:cNvPicPr>
+            <a:picLocks noChangeAspect="1"/>
+          </p:cNvPicPr>
+          <p:nvPr/>
+        </p:nvPicPr>
+        <p:blipFill>
+          <a:blip r:embed="rId4"/>
+          <a:stretch>
+            <a:fillRect/>
+          </a:stretch>
+        </p:blipFill>
+        <p:spPr>
+          <a:xfrm>
+            <a:off x="669341" y="3824021"/>
+            <a:ext cx="307238" cy="307238"/>
+          </a:xfrm>
+          <a:prstGeom prst="rect">
+            <a:avLst/>
+          </a:prstGeom>
+        </p:spPr>
+      </p:pic>
+      <p:sp>
+        <p:nvSpPr>
+          <p:cNvPr id="15" name="texto-293"/>
+          <p:cNvSpPr txBox="1"/>
+          <p:nvPr/>
+        </p:nvSpPr>
+        <p:spPr>
+          <a:xfrm>
+            <a:off x="1325880" y="3703320"/>
+            <a:ext cx="7315200" cy="548640"/>
+          </a:xfrm>
+          <a:prstGeom prst="rect">
+            <a:avLst/>
+          </a:prstGeom>
+          <a:noFill/>
+          <a:ln/>
+        </p:spPr>
+        <p:txBody>
+          <a:bodyPr wrap="square" lIns="0" tIns="0" rIns="0" bIns="0" rtlCol="0" anchor="ctr"/>
+          <a:lstStyle/>
+          <a:p>
+            <a:pPr indent="0" marL="0">
+              <a:buNone/>
+            </a:pPr>
+            <a:r>
+              <a:rPr lang="en-US" sz="1800" dirty="0">
+                <a:solidFill>
+                  <a:schemeClr val="bg1"/>
+                </a:solidFill>
+              </a:rPr>
+              <a:t>3 equipos en paralelo hoy; siguiente paso, MQTT para escalar a cientos</a:t>
+            </a:r>
+            <a:endParaRPr lang="en-US" sz="1800" dirty="0"/>
           </a:p>
         </p:txBody>
       </p:sp>
@@ -6589,7 +7202,7 @@
             <a:lvl1pPr>
               <a:defRPr sz="1000">
                 <a:solidFill>
-                  <a:schemeClr val="tx2"/>
+                  <a:schemeClr val="bg2"/>
                 </a:solidFill>
               </a:defRPr>
             </a:lvl1pPr>
@@ -6599,6 +7212,420 @@
             <a:fld id="{F7021451-1387-4CA6-816F-3879F97B5CBC}" type="slidenum">
               <a:rPr b="0" lang="en-US"/>
               <a:t>14</a:t>
+            </a:fld>
+            <a:endParaRPr lang="en-US"/>
+          </a:p>
+        </p:txBody>
+      </p:sp>
+    </p:spTree>
+  </p:cSld>
+  <p:clrMapOvr>
+    <a:masterClrMapping/>
+  </p:clrMapOvr>
+</p:sld>
+</file>
+
+<file path=ppt/slides/slide15.xml><?xml version="1.0" encoding="utf-8"?>
+<p:sld xmlns:a="http://schemas.openxmlformats.org/drawingml/2006/main" xmlns:r="http://schemas.openxmlformats.org/officeDocument/2006/relationships" xmlns:p="http://schemas.openxmlformats.org/presentationml/2006/main">
+  <p:cSld name="Slide 15">
+    <p:spTree>
+      <p:nvGrpSpPr>
+        <p:cNvPr id="1" name=""/>
+        <p:cNvGrpSpPr/>
+        <p:nvPr/>
+      </p:nvGrpSpPr>
+      <p:grpSpPr>
+        <a:xfrm>
+          <a:off x="0" y="0"/>
+          <a:ext cx="0" cy="0"/>
+          <a:chOff x="0" y="0"/>
+          <a:chExt cx="0" cy="0"/>
+        </a:xfrm>
+      </p:grpSpPr>
+      <p:sp>
+        <p:nvSpPr>
+          <p:cNvPr id="2" name="Text 0"/>
+          <p:cNvSpPr/>
+          <p:nvPr>
+            <p:ph idx="100" type="title" hasCustomPrompt="1"/>
+          </p:nvPr>
+        </p:nvSpPr>
+        <p:spPr>
+          <a:xfrm>
+            <a:off x="457200" y="274320"/>
+            <a:ext cx="8229600" cy="685800"/>
+          </a:xfrm>
+          <a:prstGeom prst="rect">
+            <a:avLst/>
+          </a:prstGeom>
+          <a:noFill/>
+          <a:ln/>
+        </p:spPr>
+        <p:txBody>
+          <a:bodyPr wrap="square" lIns="0" tIns="0" rIns="0" bIns="0" rtlCol="0" anchor="ctr"/>
+          <a:lstStyle/>
+          <a:p>
+            <a:pPr indent="0" marL="0">
+              <a:buNone/>
+            </a:pPr>
+            <a:r>
+              <a:rPr lang="en-US" sz="3600" b="1" dirty="0">
+                <a:solidFill>
+                  <a:schemeClr val="tx1"/>
+                </a:solidFill>
+              </a:rPr>
+              <a:t>Referencias (APA 7)</a:t>
+            </a:r>
+            <a:endParaRPr lang="en-US" sz="3600" dirty="0"/>
+          </a:p>
+        </p:txBody>
+      </p:sp>
+      <p:sp>
+        <p:nvSpPr>
+          <p:cNvPr id="4" name="Text 0"/>
+          <p:cNvSpPr/>
+          <p:nvPr>
+            <p:ph idx="101" type="body" hasCustomPrompt="1"/>
+          </p:nvPr>
+        </p:nvSpPr>
+        <p:spPr>
+          <a:xfrm>
+            <a:off x="457200" y="1143000"/>
+            <a:ext cx="8229600" cy="2697480"/>
+          </a:xfrm>
+          <a:prstGeom prst="rect">
+            <a:avLst/>
+          </a:prstGeom>
+          <a:noFill/>
+          <a:ln/>
+        </p:spPr>
+        <p:txBody>
+          <a:bodyPr wrap="square" lIns="0" tIns="0" rIns="0" bIns="0" rtlCol="0" anchor="t"/>
+          <a:lstStyle/>
+          <a:p>
+            <a:pPr indent="0" marL="0">
+              <a:spcAft>
+                <a:spcPts val="1000"/>
+              </a:spcAft>
+              <a:buNone/>
+            </a:pPr>
+            <a:r>
+              <a:rPr lang="en-US" sz="1400" dirty="0">
+                <a:solidFill>
+                  <a:schemeClr val="tx1"/>
+                </a:solidFill>
+              </a:rPr>
+              <a:t>Martinez Barrera, C. (2026). </a:t>
+            </a:r>
+            <a:pPr indent="0" marL="0">
+              <a:spcAft>
+                <a:spcPts val="1000"/>
+              </a:spcAft>
+              <a:buNone/>
+            </a:pPr>
+            <a:r>
+              <a:rPr lang="en-US" sz="1400" i="1" dirty="0">
+                <a:solidFill>
+                  <a:schemeClr val="tx1"/>
+                </a:solidFill>
+              </a:rPr>
+              <a:t>Evaluación segundo corte — Integración de Sistemas de Información 2026-2</a:t>
+            </a:r>
+            <a:pPr indent="0" marL="0">
+              <a:spcAft>
+                <a:spcPts val="1000"/>
+              </a:spcAft>
+              <a:buNone/>
+            </a:pPr>
+            <a:r>
+              <a:rPr lang="en-US" sz="1400" dirty="0">
+                <a:solidFill>
+                  <a:schemeClr val="tx1"/>
+                </a:solidFill>
+              </a:rPr>
+              <a:t> [Guía de práctica]. Universidad Santo Tomás.</a:t>
+            </a:r>
+            <a:endParaRPr lang="en-US" sz="1400" dirty="0"/>
+          </a:p>
+          <a:p>
+            <a:pPr indent="0" marL="0">
+              <a:spcAft>
+                <a:spcPts val="1000"/>
+              </a:spcAft>
+              <a:buNone/>
+            </a:pPr>
+            <a:r>
+              <a:rPr lang="en-US" sz="1400" dirty="0">
+                <a:solidFill>
+                  <a:schemeClr val="tx1"/>
+                </a:solidFill>
+              </a:rPr>
+              <a:t>Python Software Foundation. (2026). </a:t>
+            </a:r>
+            <a:pPr indent="0" marL="0">
+              <a:spcAft>
+                <a:spcPts val="1000"/>
+              </a:spcAft>
+              <a:buNone/>
+            </a:pPr>
+            <a:r>
+              <a:rPr lang="en-US" sz="1400" i="1" dirty="0">
+                <a:solidFill>
+                  <a:schemeClr val="tx1"/>
+                </a:solidFill>
+              </a:rPr>
+              <a:t>Python 3 documentation</a:t>
+            </a:r>
+            <a:pPr indent="0" marL="0">
+              <a:spcAft>
+                <a:spcPts val="1000"/>
+              </a:spcAft>
+              <a:buNone/>
+            </a:pPr>
+            <a:r>
+              <a:rPr lang="en-US" sz="1400" dirty="0">
+                <a:solidFill>
+                  <a:schemeClr val="tx1"/>
+                </a:solidFill>
+              </a:rPr>
+              <a:t>. https://docs.python.org/3/</a:t>
+            </a:r>
+            <a:endParaRPr lang="en-US" sz="1400" dirty="0"/>
+          </a:p>
+          <a:p>
+            <a:pPr indent="0" marL="0">
+              <a:spcAft>
+                <a:spcPts val="1000"/>
+              </a:spcAft>
+              <a:buNone/>
+            </a:pPr>
+            <a:r>
+              <a:rPr lang="en-US" sz="1400" dirty="0">
+                <a:solidFill>
+                  <a:schemeClr val="tx1"/>
+                </a:solidFill>
+              </a:rPr>
+              <a:t>Rodola, G. (2026). </a:t>
+            </a:r>
+            <a:pPr indent="0" marL="0">
+              <a:spcAft>
+                <a:spcPts val="1000"/>
+              </a:spcAft>
+              <a:buNone/>
+            </a:pPr>
+            <a:r>
+              <a:rPr lang="en-US" sz="1400" i="1" dirty="0">
+                <a:solidFill>
+                  <a:schemeClr val="tx1"/>
+                </a:solidFill>
+              </a:rPr>
+              <a:t>psutil documentation</a:t>
+            </a:r>
+            <a:pPr indent="0" marL="0">
+              <a:spcAft>
+                <a:spcPts val="1000"/>
+              </a:spcAft>
+              <a:buNone/>
+            </a:pPr>
+            <a:r>
+              <a:rPr lang="en-US" sz="1400" dirty="0">
+                <a:solidFill>
+                  <a:schemeClr val="tx1"/>
+                </a:solidFill>
+              </a:rPr>
+              <a:t>. https://psutil.readthedocs.io/</a:t>
+            </a:r>
+            <a:endParaRPr lang="en-US" sz="1400" dirty="0"/>
+          </a:p>
+          <a:p>
+            <a:pPr indent="0" marL="0">
+              <a:spcAft>
+                <a:spcPts val="1000"/>
+              </a:spcAft>
+              <a:buNone/>
+            </a:pPr>
+            <a:r>
+              <a:rPr lang="en-US" sz="1400" dirty="0">
+                <a:solidFill>
+                  <a:schemeClr val="tx1"/>
+                </a:solidFill>
+              </a:rPr>
+              <a:t>Microsoft. (2026). </a:t>
+            </a:r>
+            <a:pPr indent="0" marL="0">
+              <a:spcAft>
+                <a:spcPts val="1000"/>
+              </a:spcAft>
+              <a:buNone/>
+            </a:pPr>
+            <a:r>
+              <a:rPr lang="en-US" sz="1400" i="1" dirty="0">
+                <a:solidFill>
+                  <a:schemeClr val="tx1"/>
+                </a:solidFill>
+              </a:rPr>
+              <a:t>Windows Sockets error codes</a:t>
+            </a:r>
+            <a:pPr indent="0" marL="0">
+              <a:spcAft>
+                <a:spcPts val="1000"/>
+              </a:spcAft>
+              <a:buNone/>
+            </a:pPr>
+            <a:r>
+              <a:rPr lang="en-US" sz="1400" dirty="0">
+                <a:solidFill>
+                  <a:schemeClr val="tx1"/>
+                </a:solidFill>
+              </a:rPr>
+              <a:t>. Microsoft Learn. https://learn.microsoft.com/windows/win32/winsock/windows-sockets-error-codes-2</a:t>
+            </a:r>
+            <a:endParaRPr lang="en-US" sz="1400" dirty="0"/>
+          </a:p>
+        </p:txBody>
+      </p:sp>
+      <p:sp>
+        <p:nvSpPr>
+          <p:cNvPr id="5" name="tarjeta-294"/>
+          <p:cNvSpPr/>
+          <p:nvPr/>
+        </p:nvSpPr>
+        <p:spPr>
+          <a:xfrm>
+            <a:off x="457200" y="3931920"/>
+            <a:ext cx="8229600" cy="685800"/>
+          </a:xfrm>
+          <a:prstGeom prst="roundRect">
+            <a:avLst>
+              <a:gd name="adj" fmla="val 13333"/>
+            </a:avLst>
+          </a:prstGeom>
+          <a:solidFill>
+            <a:schemeClr val="bg2"/>
+          </a:solidFill>
+          <a:ln/>
+        </p:spPr>
+      </p:sp>
+      <p:sp>
+        <p:nvSpPr>
+          <p:cNvPr id="6" name="circulo-295"/>
+          <p:cNvSpPr/>
+          <p:nvPr/>
+        </p:nvSpPr>
+        <p:spPr>
+          <a:xfrm>
+            <a:off x="594360" y="4041648"/>
+            <a:ext cx="457200" cy="457200"/>
+          </a:xfrm>
+          <a:prstGeom prst="ellipse">
+            <a:avLst/>
+          </a:prstGeom>
+          <a:solidFill>
+            <a:schemeClr val="tx1"/>
+          </a:solidFill>
+          <a:ln/>
+        </p:spPr>
+      </p:sp>
+      <p:pic>
+        <p:nvPicPr>
+          <p:cNvPr id="7" name="icono-296" descr="preencoded.png">    </p:cNvPr>
+          <p:cNvPicPr>
+            <a:picLocks noChangeAspect="1"/>
+          </p:cNvPicPr>
+          <p:nvPr/>
+        </p:nvPicPr>
+        <p:blipFill>
+          <a:blip r:embed="rId1"/>
+          <a:stretch>
+            <a:fillRect/>
+          </a:stretch>
+        </p:blipFill>
+        <p:spPr>
+          <a:xfrm>
+            <a:off x="694944" y="4142232"/>
+            <a:ext cx="256032" cy="256032"/>
+          </a:xfrm>
+          <a:prstGeom prst="rect">
+            <a:avLst/>
+          </a:prstGeom>
+        </p:spPr>
+      </p:pic>
+      <p:sp>
+        <p:nvSpPr>
+          <p:cNvPr id="8" name="texto-297"/>
+          <p:cNvSpPr txBox="1"/>
+          <p:nvPr/>
+        </p:nvSpPr>
+        <p:spPr>
+          <a:xfrm>
+            <a:off x="1188720" y="3931920"/>
+            <a:ext cx="7406640" cy="685800"/>
+          </a:xfrm>
+          <a:prstGeom prst="rect">
+            <a:avLst/>
+          </a:prstGeom>
+          <a:noFill/>
+          <a:ln/>
+        </p:spPr>
+        <p:txBody>
+          <a:bodyPr wrap="square" lIns="0" tIns="0" rIns="0" bIns="0" rtlCol="0" anchor="ctr"/>
+          <a:lstStyle/>
+          <a:p>
+            <a:pPr indent="0" marL="0">
+              <a:buNone/>
+            </a:pPr>
+            <a:r>
+              <a:rPr lang="en-US" sz="1400" dirty="0">
+                <a:solidFill>
+                  <a:schemeClr val="tx1"/>
+                </a:solidFill>
+              </a:rPr>
+              <a:t>Código, pruebas, evidencia y documento técnico: github.com/Facabore/practica-hsf-segundo-corte</a:t>
+            </a:r>
+            <a:endParaRPr lang="en-US" sz="1400" dirty="0"/>
+          </a:p>
+        </p:txBody>
+      </p:sp>
+      <p:sp>
+        <p:nvSpPr>
+          <p:cNvPr id="25" name="Slide Number Placeholder 0"/>
+          <p:cNvSpPr>
+            <a:spLocks noGrp="1"/>
+          </p:cNvSpPr>
+          <p:nvPr>
+            <p:ph type="sldNum" sz="quarter" idx="4294967295"/>
+          </p:nvPr>
+        </p:nvSpPr>
+        <p:spPr>
+          <a:xfrm>
+            <a:off x="8229600" y="4754880"/>
+            <a:ext cx="457200" cy="274320"/>
+          </a:xfrm>
+          <a:prstGeom prst="rect">
+            <a:avLst/>
+          </a:prstGeom>
+          <a:extLst>
+            <a:ext uri="{C572A759-6A51-4108-AA02-DFA0A04FC94B}">
+              <ma14:wrappingTextBoxFlag xmlns:ma14="http://schemas.microsoft.com/office/mac/drawingml/2011/main" val="0"/>
+            </a:ext>
+          </a:extLst>
+        </p:spPr>
+        <p:txBody>
+          <a:bodyPr/>
+          <a:lstStyle>
+            <a:lvl1pPr>
+              <a:defRPr sz="1000">
+                <a:solidFill>
+                  <a:schemeClr val="tx2"/>
+                </a:solidFill>
+              </a:defRPr>
+            </a:lvl1pPr>
+          </a:lstStyle>
+          <a:p>
+            <a:pPr algn="r"/>
+            <a:fld id="{F7021451-1387-4CA6-816F-3879F97B5CBC}" type="slidenum">
+              <a:rPr b="0" lang="en-US"/>
+              <a:t>15</a:t>
             </a:fld>
             <a:endParaRPr lang="en-US"/>
           </a:p>
@@ -7517,7 +8544,7 @@
                   <a:schemeClr val="tx1"/>
                 </a:solidFill>
               </a:rPr>
-              <a:t>TDD: 64 pruebas escritas antes que el código</a:t>
+              <a:t>TDD: 78 pruebas escritas antes que el código</a:t>
             </a:r>
             <a:endParaRPr lang="en-US" sz="1400" dirty="0"/>
           </a:p>
@@ -8984,7 +10011,7 @@
                 <a:ea typeface="Courier New" pitchFamily="34" charset="-122"/>
                 <a:cs typeface="Courier New" pitchFamily="34" charset="-120"/>
               </a:rPr>
-              <a:t>64 pruebas pytest</a:t>
+              <a:t>78 pruebas pytest</a:t>
             </a:r>
             <a:endParaRPr lang="en-US" sz="1300" dirty="0"/>
           </a:p>
@@ -9205,7 +10232,7 @@
                   <a:schemeClr val="accent4"/>
                 </a:solidFill>
               </a:rPr>
-              <a:t>64</a:t>
+              <a:t>78</a:t>
             </a:r>
             <a:endParaRPr lang="en-US" sz="4400" dirty="0"/>
           </a:p>
@@ -10275,7 +11302,7 @@
                   <a:schemeClr val="tx1"/>
                 </a:solidFill>
               </a:rPr>
-              <a:t>Aplicación Python modular</a:t>
+              <a:t>Varios dispositivos a la vez</a:t>
             </a:r>
             <a:endParaRPr lang="en-US" sz="3600" dirty="0"/>
           </a:p>
@@ -10290,11 +11317,11 @@
         <p:spPr>
           <a:xfrm>
             <a:off x="457200" y="1143000"/>
-            <a:ext cx="2560320" cy="1554480"/>
+            <a:ext cx="4937760" cy="731520"/>
           </a:xfrm>
           <a:prstGeom prst="roundRect">
             <a:avLst>
-              <a:gd name="adj" fmla="val 5882"/>
+              <a:gd name="adj" fmla="val 12500"/>
             </a:avLst>
           </a:prstGeom>
           <a:solidFill>
@@ -10311,8 +11338,8 @@
         </p:nvSpPr>
         <p:spPr>
           <a:xfrm>
-            <a:off x="640080" y="1325880"/>
-            <a:ext cx="411480" cy="411480"/>
+            <a:off x="621792" y="1298448"/>
+            <a:ext cx="420624" cy="420624"/>
           </a:xfrm>
           <a:prstGeom prst="ellipse">
             <a:avLst/>
@@ -10339,8 +11366,8 @@
         </p:blipFill>
         <p:spPr>
           <a:xfrm>
-            <a:off x="730606" y="1416406"/>
-            <a:ext cx="230429" cy="230429"/>
+            <a:off x="714329" y="1390985"/>
+            <a:ext cx="235549" cy="235549"/>
           </a:xfrm>
           <a:prstGeom prst="rect">
             <a:avLst/>
@@ -10355,8 +11382,8 @@
         </p:nvSpPr>
         <p:spPr>
           <a:xfrm>
-            <a:off x="1170432" y="1325880"/>
-            <a:ext cx="1783080" cy="411480"/>
+            <a:off x="1207008" y="1216152"/>
+            <a:ext cx="4069080" cy="585216"/>
           </a:xfrm>
           <a:prstGeom prst="rect">
             <a:avLst/>
@@ -10377,43 +11404,21 @@
                   <a:schemeClr val="tx1"/>
                 </a:solidFill>
               </a:rPr>
-              <a:t>acquisition.py</a:t>
+              <a:t>SIM-001 · Compresor</a:t>
             </a:r>
             <a:endParaRPr lang="en-US" sz="1400" dirty="0"/>
           </a:p>
-        </p:txBody>
-      </p:sp>
-      <p:sp>
-        <p:nvSpPr>
-          <p:cNvPr id="8" name="texto-117"/>
-          <p:cNvSpPr txBox="1"/>
-          <p:nvPr/>
-        </p:nvSpPr>
-        <p:spPr>
-          <a:xfrm>
-            <a:off x="640080" y="1828800"/>
-            <a:ext cx="2240280" cy="548640"/>
-          </a:xfrm>
-          <a:prstGeom prst="rect">
-            <a:avLst/>
-          </a:prstGeom>
-          <a:noFill/>
-          <a:ln/>
-        </p:spPr>
-        <p:txBody>
-          <a:bodyPr wrap="square" lIns="0" tIns="0" rIns="0" bIns="0" rtlCol="0" anchor="t"/>
-          <a:lstStyle/>
-          <a:p>
-            <a:pPr indent="0" marL="0">
-              <a:buNone/>
-            </a:pPr>
-            <a:r>
-              <a:rPr lang="en-US" sz="1400" dirty="0">
+          <a:p>
+            <a:pPr indent="0" marL="0">
+              <a:buNone/>
+            </a:pPr>
+            <a:r>
+              <a:rPr lang="en-US" sz="1200" dirty="0">
                 <a:solidFill>
                   <a:schemeClr val="tx1"/>
                 </a:solidFill>
               </a:rPr>
-              <a:t>Cliente TCP con reconexión y backoff</a:t>
+              <a:t>puerto 8765 · anomalía cada 7 tramas</a:t>
             </a:r>
             <a:endParaRPr lang="en-US" sz="1400" dirty="0"/>
           </a:p>
@@ -10421,54 +11426,18 @@
       </p:sp>
       <p:sp>
         <p:nvSpPr>
-          <p:cNvPr id="9" name="texto-118"/>
-          <p:cNvSpPr txBox="1"/>
-          <p:nvPr/>
-        </p:nvSpPr>
-        <p:spPr>
-          <a:xfrm>
-            <a:off x="640080" y="2377440"/>
-            <a:ext cx="2240280" cy="228600"/>
-          </a:xfrm>
-          <a:prstGeom prst="rect">
-            <a:avLst/>
-          </a:prstGeom>
-          <a:noFill/>
-          <a:ln/>
-        </p:spPr>
-        <p:txBody>
-          <a:bodyPr wrap="square" lIns="0" tIns="0" rIns="0" bIns="0" rtlCol="0" anchor="ctr"/>
-          <a:lstStyle/>
-          <a:p>
-            <a:pPr indent="0" marL="0">
-              <a:buNone/>
-            </a:pPr>
-            <a:r>
-              <a:rPr lang="en-US" sz="1100" b="1" dirty="0">
-                <a:solidFill>
-                  <a:schemeClr val="accent2"/>
-                </a:solidFill>
-              </a:rPr>
-              <a:t>RF02 · RF09</a:t>
-            </a:r>
-            <a:endParaRPr lang="en-US" sz="1100" dirty="0"/>
-          </a:p>
-        </p:txBody>
-      </p:sp>
-      <p:sp>
-        <p:nvSpPr>
-          <p:cNvPr id="10" name="tarjeta-119"/>
+          <p:cNvPr id="8" name="tarjeta-117"/>
           <p:cNvSpPr/>
           <p:nvPr/>
         </p:nvSpPr>
         <p:spPr>
           <a:xfrm>
-            <a:off x="3291840" y="1143000"/>
-            <a:ext cx="2560320" cy="1554480"/>
+            <a:off x="457200" y="2011680"/>
+            <a:ext cx="4937760" cy="731520"/>
           </a:xfrm>
           <a:prstGeom prst="roundRect">
             <a:avLst>
-              <a:gd name="adj" fmla="val 5882"/>
+              <a:gd name="adj" fmla="val 12500"/>
             </a:avLst>
           </a:prstGeom>
           <a:solidFill>
@@ -10479,27 +11448,27 @@
       </p:sp>
       <p:sp>
         <p:nvSpPr>
-          <p:cNvPr id="11" name="circulo-120"/>
+          <p:cNvPr id="9" name="circulo-118"/>
           <p:cNvSpPr/>
           <p:nvPr/>
         </p:nvSpPr>
         <p:spPr>
           <a:xfrm>
-            <a:off x="3474720" y="1325880"/>
-            <a:ext cx="411480" cy="411480"/>
+            <a:off x="621792" y="2167128"/>
+            <a:ext cx="420624" cy="420624"/>
           </a:xfrm>
           <a:prstGeom prst="ellipse">
             <a:avLst/>
           </a:prstGeom>
           <a:solidFill>
-            <a:schemeClr val="accent2"/>
+            <a:schemeClr val="accent1"/>
           </a:solidFill>
           <a:ln/>
         </p:spPr>
       </p:sp>
       <p:pic>
         <p:nvPicPr>
-          <p:cNvPr id="12" name="icono-121" descr="preencoded.png">    </p:cNvPr>
+          <p:cNvPr id="10" name="icono-119" descr="preencoded.png">    </p:cNvPr>
           <p:cNvPicPr>
             <a:picLocks noChangeAspect="1"/>
           </p:cNvPicPr>
@@ -10513,8 +11482,8 @@
         </p:blipFill>
         <p:spPr>
           <a:xfrm>
-            <a:off x="3565246" y="1416406"/>
-            <a:ext cx="230429" cy="230429"/>
+            <a:off x="714329" y="2259665"/>
+            <a:ext cx="235549" cy="235549"/>
           </a:xfrm>
           <a:prstGeom prst="rect">
             <a:avLst/>
@@ -10523,14 +11492,14 @@
       </p:pic>
       <p:sp>
         <p:nvSpPr>
-          <p:cNvPr id="13" name="texto-122"/>
+          <p:cNvPr id="11" name="texto-120"/>
           <p:cNvSpPr txBox="1"/>
           <p:nvPr/>
         </p:nvSpPr>
         <p:spPr>
           <a:xfrm>
-            <a:off x="4005072" y="1325880"/>
-            <a:ext cx="1783080" cy="411480"/>
+            <a:off x="1207008" y="2084832"/>
+            <a:ext cx="4069080" cy="585216"/>
           </a:xfrm>
           <a:prstGeom prst="rect">
             <a:avLst/>
@@ -10551,43 +11520,21 @@
                   <a:schemeClr val="tx1"/>
                 </a:solidFill>
               </a:rPr>
-              <a:t>validation.py</a:t>
+              <a:t>SIM-002 · Bomba de agua</a:t>
             </a:r>
             <a:endParaRPr lang="en-US" sz="1400" dirty="0"/>
           </a:p>
-        </p:txBody>
-      </p:sp>
-      <p:sp>
-        <p:nvSpPr>
-          <p:cNvPr id="14" name="texto-123"/>
-          <p:cNvSpPr txBox="1"/>
-          <p:nvPr/>
-        </p:nvSpPr>
-        <p:spPr>
-          <a:xfrm>
-            <a:off x="3474720" y="1828800"/>
-            <a:ext cx="2240280" cy="548640"/>
-          </a:xfrm>
-          <a:prstGeom prst="rect">
-            <a:avLst/>
-          </a:prstGeom>
-          <a:noFill/>
-          <a:ln/>
-        </p:spPr>
-        <p:txBody>
-          <a:bodyPr wrap="square" lIns="0" tIns="0" rIns="0" bIns="0" rtlCol="0" anchor="t"/>
-          <a:lstStyle/>
-          <a:p>
-            <a:pPr indent="0" marL="0">
-              <a:buNone/>
-            </a:pPr>
-            <a:r>
-              <a:rPr lang="en-US" sz="1400" dirty="0">
+          <a:p>
+            <a:pPr indent="0" marL="0">
+              <a:buNone/>
+            </a:pPr>
+            <a:r>
+              <a:rPr lang="en-US" sz="1200" dirty="0">
                 <a:solidFill>
                   <a:schemeClr val="tx1"/>
                 </a:solidFill>
               </a:rPr>
-              <a:t>Estructura, tipo y rango de cada lectura</a:t>
+              <a:t>puerto 8766 · anomalía cada 11 tramas</a:t>
             </a:r>
             <a:endParaRPr lang="en-US" sz="1400" dirty="0"/>
           </a:p>
@@ -10595,54 +11542,18 @@
       </p:sp>
       <p:sp>
         <p:nvSpPr>
-          <p:cNvPr id="15" name="texto-124"/>
-          <p:cNvSpPr txBox="1"/>
-          <p:nvPr/>
-        </p:nvSpPr>
-        <p:spPr>
-          <a:xfrm>
-            <a:off x="3474720" y="2377440"/>
-            <a:ext cx="2240280" cy="228600"/>
-          </a:xfrm>
-          <a:prstGeom prst="rect">
-            <a:avLst/>
-          </a:prstGeom>
-          <a:noFill/>
-          <a:ln/>
-        </p:spPr>
-        <p:txBody>
-          <a:bodyPr wrap="square" lIns="0" tIns="0" rIns="0" bIns="0" rtlCol="0" anchor="ctr"/>
-          <a:lstStyle/>
-          <a:p>
-            <a:pPr indent="0" marL="0">
-              <a:buNone/>
-            </a:pPr>
-            <a:r>
-              <a:rPr lang="en-US" sz="1100" b="1" dirty="0">
-                <a:solidFill>
-                  <a:schemeClr val="accent2"/>
-                </a:solidFill>
-              </a:rPr>
-              <a:t>RF03</a:t>
-            </a:r>
-            <a:endParaRPr lang="en-US" sz="1100" dirty="0"/>
-          </a:p>
-        </p:txBody>
-      </p:sp>
-      <p:sp>
-        <p:nvSpPr>
-          <p:cNvPr id="16" name="tarjeta-125"/>
+          <p:cNvPr id="12" name="tarjeta-121"/>
           <p:cNvSpPr/>
           <p:nvPr/>
         </p:nvSpPr>
         <p:spPr>
           <a:xfrm>
-            <a:off x="6126480" y="1143000"/>
-            <a:ext cx="2560320" cy="1554480"/>
+            <a:off x="457200" y="2880360"/>
+            <a:ext cx="4937760" cy="731520"/>
           </a:xfrm>
           <a:prstGeom prst="roundRect">
             <a:avLst>
-              <a:gd name="adj" fmla="val 5882"/>
+              <a:gd name="adj" fmla="val 12500"/>
             </a:avLst>
           </a:prstGeom>
           <a:solidFill>
@@ -10653,27 +11564,27 @@
       </p:sp>
       <p:sp>
         <p:nvSpPr>
-          <p:cNvPr id="17" name="circulo-126"/>
+          <p:cNvPr id="13" name="circulo-122"/>
           <p:cNvSpPr/>
           <p:nvPr/>
         </p:nvSpPr>
         <p:spPr>
           <a:xfrm>
-            <a:off x="6309360" y="1325880"/>
-            <a:ext cx="411480" cy="411480"/>
+            <a:off x="621792" y="3035808"/>
+            <a:ext cx="420624" cy="420624"/>
           </a:xfrm>
           <a:prstGeom prst="ellipse">
             <a:avLst/>
           </a:prstGeom>
           <a:solidFill>
-            <a:schemeClr val="accent2"/>
+            <a:schemeClr val="accent4"/>
           </a:solidFill>
           <a:ln/>
         </p:spPr>
       </p:sp>
       <p:pic>
         <p:nvPicPr>
-          <p:cNvPr id="18" name="icono-127" descr="preencoded.png">    </p:cNvPr>
+          <p:cNvPr id="14" name="icono-123" descr="preencoded.png">    </p:cNvPr>
           <p:cNvPicPr>
             <a:picLocks noChangeAspect="1"/>
           </p:cNvPicPr>
@@ -10687,8 +11598,8 @@
         </p:blipFill>
         <p:spPr>
           <a:xfrm>
-            <a:off x="6399886" y="1416406"/>
-            <a:ext cx="230429" cy="230429"/>
+            <a:off x="714329" y="3128345"/>
+            <a:ext cx="235549" cy="235549"/>
           </a:xfrm>
           <a:prstGeom prst="rect">
             <a:avLst/>
@@ -10697,14 +11608,14 @@
       </p:pic>
       <p:sp>
         <p:nvSpPr>
-          <p:cNvPr id="19" name="texto-128"/>
+          <p:cNvPr id="15" name="texto-124"/>
           <p:cNvSpPr txBox="1"/>
           <p:nvPr/>
         </p:nvSpPr>
         <p:spPr>
           <a:xfrm>
-            <a:off x="6839712" y="1325880"/>
-            <a:ext cx="1783080" cy="411480"/>
+            <a:off x="1207008" y="2953512"/>
+            <a:ext cx="4069080" cy="585216"/>
           </a:xfrm>
           <a:prstGeom prst="rect">
             <a:avLst/>
@@ -10725,43 +11636,21 @@
                   <a:schemeClr val="tx1"/>
                 </a:solidFill>
               </a:rPr>
-              <a:t>processing.py</a:t>
+              <a:t>SIM-003 · Motor de banda</a:t>
             </a:r>
             <a:endParaRPr lang="en-US" sz="1400" dirty="0"/>
           </a:p>
-        </p:txBody>
-      </p:sp>
-      <p:sp>
-        <p:nvSpPr>
-          <p:cNvPr id="20" name="texto-129"/>
-          <p:cNvSpPr txBox="1"/>
-          <p:nvPr/>
-        </p:nvSpPr>
-        <p:spPr>
-          <a:xfrm>
-            <a:off x="6309360" y="1828800"/>
-            <a:ext cx="2240280" cy="548640"/>
-          </a:xfrm>
-          <a:prstGeom prst="rect">
-            <a:avLst/>
-          </a:prstGeom>
-          <a:noFill/>
-          <a:ln/>
-        </p:spPr>
-        <p:txBody>
-          <a:bodyPr wrap="square" lIns="0" tIns="0" rIns="0" bIns="0" rtlCol="0" anchor="t"/>
-          <a:lstStyle/>
-          <a:p>
-            <a:pPr indent="0" marL="0">
-              <a:buNone/>
-            </a:pPr>
-            <a:r>
-              <a:rPr lang="en-US" sz="1400" dirty="0">
+          <a:p>
+            <a:pPr indent="0" marL="0">
+              <a:buNone/>
+            </a:pPr>
+            <a:r>
+              <a:rPr lang="en-US" sz="1200" dirty="0">
                 <a:solidFill>
                   <a:schemeClr val="tx1"/>
                 </a:solidFill>
               </a:rPr>
-              <a:t>Clasifica normal o anómala por umbrales</a:t>
+              <a:t>puerto 8767 · anomalía cada 13 tramas</a:t>
             </a:r>
             <a:endParaRPr lang="en-US" sz="1400" dirty="0"/>
           </a:p>
@@ -10769,85 +11658,49 @@
       </p:sp>
       <p:sp>
         <p:nvSpPr>
-          <p:cNvPr id="21" name="texto-130"/>
-          <p:cNvSpPr txBox="1"/>
-          <p:nvPr/>
-        </p:nvSpPr>
-        <p:spPr>
-          <a:xfrm>
-            <a:off x="6309360" y="2377440"/>
-            <a:ext cx="2240280" cy="228600"/>
-          </a:xfrm>
-          <a:prstGeom prst="rect">
-            <a:avLst/>
-          </a:prstGeom>
-          <a:noFill/>
-          <a:ln/>
-        </p:spPr>
-        <p:txBody>
-          <a:bodyPr wrap="square" lIns="0" tIns="0" rIns="0" bIns="0" rtlCol="0" anchor="ctr"/>
-          <a:lstStyle/>
-          <a:p>
-            <a:pPr indent="0" marL="0">
-              <a:buNone/>
-            </a:pPr>
-            <a:r>
-              <a:rPr lang="en-US" sz="1100" b="1" dirty="0">
-                <a:solidFill>
-                  <a:schemeClr val="accent2"/>
-                </a:solidFill>
-              </a:rPr>
-              <a:t>RF04</a:t>
-            </a:r>
-            <a:endParaRPr lang="en-US" sz="1100" dirty="0"/>
-          </a:p>
-        </p:txBody>
-      </p:sp>
-      <p:sp>
-        <p:nvSpPr>
-          <p:cNvPr id="22" name="tarjeta-131"/>
+          <p:cNvPr id="16" name="tarjeta-125"/>
           <p:cNvSpPr/>
           <p:nvPr/>
         </p:nvSpPr>
         <p:spPr>
           <a:xfrm>
-            <a:off x="457200" y="2926080"/>
-            <a:ext cx="2560320" cy="1554480"/>
+            <a:off x="457200" y="3794760"/>
+            <a:ext cx="4937760" cy="731520"/>
           </a:xfrm>
           <a:prstGeom prst="roundRect">
             <a:avLst>
-              <a:gd name="adj" fmla="val 5882"/>
+              <a:gd name="adj" fmla="val 12500"/>
             </a:avLst>
           </a:prstGeom>
           <a:solidFill>
-            <a:schemeClr val="bg2"/>
+            <a:schemeClr val="accent4"/>
           </a:solidFill>
           <a:ln/>
         </p:spPr>
       </p:sp>
       <p:sp>
         <p:nvSpPr>
-          <p:cNvPr id="23" name="circulo-132"/>
+          <p:cNvPr id="17" name="circulo-126"/>
           <p:cNvSpPr/>
           <p:nvPr/>
         </p:nvSpPr>
         <p:spPr>
           <a:xfrm>
-            <a:off x="640080" y="3108960"/>
-            <a:ext cx="411480" cy="411480"/>
+            <a:off x="621792" y="3950208"/>
+            <a:ext cx="420624" cy="420624"/>
           </a:xfrm>
           <a:prstGeom prst="ellipse">
             <a:avLst/>
           </a:prstGeom>
           <a:solidFill>
-            <a:schemeClr val="accent3"/>
+            <a:schemeClr val="bg1"/>
           </a:solidFill>
           <a:ln/>
         </p:spPr>
       </p:sp>
       <p:pic>
         <p:nvPicPr>
-          <p:cNvPr id="24" name="icono-133" descr="preencoded.png">    </p:cNvPr>
+          <p:cNvPr id="18" name="icono-127" descr="preencoded.png">    </p:cNvPr>
           <p:cNvPicPr>
             <a:picLocks noChangeAspect="1"/>
           </p:cNvPicPr>
@@ -10861,8 +11714,8 @@
         </p:blipFill>
         <p:spPr>
           <a:xfrm>
-            <a:off x="730606" y="3199486"/>
-            <a:ext cx="230429" cy="230429"/>
+            <a:off x="714329" y="4042745"/>
+            <a:ext cx="235549" cy="235549"/>
           </a:xfrm>
           <a:prstGeom prst="rect">
             <a:avLst/>
@@ -10871,14 +11724,14 @@
       </p:pic>
       <p:sp>
         <p:nvSpPr>
-          <p:cNvPr id="25" name="texto-134"/>
+          <p:cNvPr id="19" name="texto-128"/>
           <p:cNvSpPr txBox="1"/>
           <p:nvPr/>
         </p:nvSpPr>
         <p:spPr>
           <a:xfrm>
-            <a:off x="1170432" y="3108960"/>
-            <a:ext cx="1783080" cy="411480"/>
+            <a:off x="1207008" y="3840480"/>
+            <a:ext cx="4069080" cy="640080"/>
           </a:xfrm>
           <a:prstGeom prst="rect">
             <a:avLst/>
@@ -10894,134 +11747,76 @@
               <a:buNone/>
             </a:pPr>
             <a:r>
-              <a:rPr lang="en-US" sz="1400" b="1" dirty="0">
+              <a:rPr lang="en-US" sz="1300" b="1" dirty="0">
+                <a:solidFill>
+                  <a:schemeClr val="bg1"/>
+                </a:solidFill>
+              </a:rPr>
+              <a:t>Detener uno no afecta a los demás: con SIM-002 caído, SIM-001 y SIM-003 siguieron de 76 a 79 lecturas</a:t>
+            </a:r>
+            <a:endParaRPr lang="en-US" sz="1300" dirty="0"/>
+          </a:p>
+        </p:txBody>
+      </p:sp>
+      <p:sp>
+        <p:nvSpPr>
+          <p:cNvPr id="20" name="texto-129"/>
+          <p:cNvSpPr txBox="1"/>
+          <p:nvPr/>
+        </p:nvSpPr>
+        <p:spPr>
+          <a:xfrm>
+            <a:off x="5715000" y="1143000"/>
+            <a:ext cx="2971800" cy="365760"/>
+          </a:xfrm>
+          <a:prstGeom prst="rect">
+            <a:avLst/>
+          </a:prstGeom>
+          <a:noFill/>
+          <a:ln/>
+        </p:spPr>
+        <p:txBody>
+          <a:bodyPr wrap="square" lIns="0" tIns="0" rIns="0" bIns="0" rtlCol="0" anchor="ctr"/>
+          <a:lstStyle/>
+          <a:p>
+            <a:pPr indent="0" marL="0">
+              <a:buNone/>
+            </a:pPr>
+            <a:r>
+              <a:rPr lang="en-US" sz="1600" b="1" dirty="0">
                 <a:solidFill>
                   <a:schemeClr val="tx1"/>
                 </a:solidFill>
               </a:rPr>
-              <a:t>os_resources.py</a:t>
-            </a:r>
-            <a:endParaRPr lang="en-US" sz="1400" dirty="0"/>
-          </a:p>
-        </p:txBody>
-      </p:sp>
-      <p:sp>
-        <p:nvSpPr>
-          <p:cNvPr id="26" name="texto-135"/>
-          <p:cNvSpPr txBox="1"/>
-          <p:nvPr/>
-        </p:nvSpPr>
-        <p:spPr>
-          <a:xfrm>
-            <a:off x="640080" y="3611880"/>
-            <a:ext cx="2240280" cy="548640"/>
-          </a:xfrm>
-          <a:prstGeom prst="rect">
-            <a:avLst/>
-          </a:prstGeom>
-          <a:noFill/>
-          <a:ln/>
-        </p:spPr>
-        <p:txBody>
-          <a:bodyPr wrap="square" lIns="0" tIns="0" rIns="0" bIns="0" rtlCol="0" anchor="t"/>
-          <a:lstStyle/>
-          <a:p>
-            <a:pPr indent="0" marL="0">
-              <a:buNone/>
-            </a:pPr>
-            <a:r>
-              <a:rPr lang="en-US" sz="1400" dirty="0">
-                <a:solidFill>
-                  <a:schemeClr val="tx1"/>
-                </a:solidFill>
-              </a:rPr>
-              <a:t>CPU, memoria, disco, PID y entorno</a:t>
-            </a:r>
-            <a:endParaRPr lang="en-US" sz="1400" dirty="0"/>
-          </a:p>
-        </p:txBody>
-      </p:sp>
-      <p:sp>
-        <p:nvSpPr>
-          <p:cNvPr id="27" name="texto-136"/>
-          <p:cNvSpPr txBox="1"/>
-          <p:nvPr/>
-        </p:nvSpPr>
-        <p:spPr>
-          <a:xfrm>
-            <a:off x="640080" y="4160520"/>
-            <a:ext cx="2240280" cy="228600"/>
-          </a:xfrm>
-          <a:prstGeom prst="rect">
-            <a:avLst/>
-          </a:prstGeom>
-          <a:noFill/>
-          <a:ln/>
-        </p:spPr>
-        <p:txBody>
-          <a:bodyPr wrap="square" lIns="0" tIns="0" rIns="0" bIns="0" rtlCol="0" anchor="ctr"/>
-          <a:lstStyle/>
-          <a:p>
-            <a:pPr indent="0" marL="0">
-              <a:buNone/>
-            </a:pPr>
-            <a:r>
-              <a:rPr lang="en-US" sz="1100" b="1" dirty="0">
-                <a:solidFill>
-                  <a:schemeClr val="accent3"/>
-                </a:solidFill>
-              </a:rPr>
-              <a:t>RF06</a:t>
-            </a:r>
-            <a:endParaRPr lang="en-US" sz="1100" dirty="0"/>
-          </a:p>
-        </p:txBody>
-      </p:sp>
-      <p:sp>
-        <p:nvSpPr>
-          <p:cNvPr id="28" name="tarjeta-137"/>
+              <a:t>Cómo está armado</a:t>
+            </a:r>
+            <a:endParaRPr lang="en-US" sz="1600" dirty="0"/>
+          </a:p>
+        </p:txBody>
+      </p:sp>
+      <p:sp>
+        <p:nvSpPr>
+          <p:cNvPr id="21" name="circulo-130"/>
           <p:cNvSpPr/>
           <p:nvPr/>
         </p:nvSpPr>
         <p:spPr>
           <a:xfrm>
-            <a:off x="3291840" y="2926080"/>
-            <a:ext cx="2560320" cy="1554480"/>
-          </a:xfrm>
-          <a:prstGeom prst="roundRect">
-            <a:avLst>
-              <a:gd name="adj" fmla="val 5882"/>
-            </a:avLst>
+            <a:off x="5715000" y="1645920"/>
+            <a:ext cx="384048" cy="384048"/>
+          </a:xfrm>
+          <a:prstGeom prst="ellipse">
+            <a:avLst/>
           </a:prstGeom>
           <a:solidFill>
-            <a:schemeClr val="bg2"/>
-          </a:solidFill>
-          <a:ln/>
-        </p:spPr>
-      </p:sp>
-      <p:sp>
-        <p:nvSpPr>
-          <p:cNvPr id="29" name="circulo-138"/>
-          <p:cNvSpPr/>
-          <p:nvPr/>
-        </p:nvSpPr>
-        <p:spPr>
-          <a:xfrm>
-            <a:off x="3474720" y="3108960"/>
-            <a:ext cx="411480" cy="411480"/>
-          </a:xfrm>
-          <a:prstGeom prst="ellipse">
-            <a:avLst/>
-          </a:prstGeom>
-          <a:solidFill>
-            <a:schemeClr val="accent4"/>
+            <a:schemeClr val="accent1"/>
           </a:solidFill>
           <a:ln/>
         </p:spPr>
       </p:sp>
       <p:pic>
         <p:nvPicPr>
-          <p:cNvPr id="30" name="icono-139" descr="preencoded.png">    </p:cNvPr>
+          <p:cNvPr id="22" name="icono-131" descr="preencoded.png">    </p:cNvPr>
           <p:cNvPicPr>
             <a:picLocks noChangeAspect="1"/>
           </p:cNvPicPr>
@@ -11035,8 +11830,8 @@
         </p:blipFill>
         <p:spPr>
           <a:xfrm>
-            <a:off x="3565246" y="3199486"/>
-            <a:ext cx="230429" cy="230429"/>
+            <a:off x="5799491" y="1730411"/>
+            <a:ext cx="215067" cy="215067"/>
           </a:xfrm>
           <a:prstGeom prst="rect">
             <a:avLst/>
@@ -11045,14 +11840,14 @@
       </p:pic>
       <p:sp>
         <p:nvSpPr>
-          <p:cNvPr id="31" name="texto-140"/>
+          <p:cNvPr id="23" name="texto-132"/>
           <p:cNvSpPr txBox="1"/>
           <p:nvPr/>
         </p:nvSpPr>
         <p:spPr>
           <a:xfrm>
-            <a:off x="4005072" y="3108960"/>
-            <a:ext cx="1783080" cy="411480"/>
+            <a:off x="6236208" y="1554480"/>
+            <a:ext cx="2450592" cy="585216"/>
           </a:xfrm>
           <a:prstGeom prst="rect">
             <a:avLst/>
@@ -11068,12 +11863,12 @@
               <a:buNone/>
             </a:pPr>
             <a:r>
-              <a:rPr lang="en-US" sz="1400" b="1" dirty="0">
+              <a:rPr lang="en-US" sz="1400" dirty="0">
                 <a:solidFill>
                   <a:schemeClr val="tx1"/>
                 </a:solidFill>
               </a:rPr>
-              <a:t>persistence.py</a:t>
+              <a:t>Un proceso de firmware por equipo</a:t>
             </a:r>
             <a:endParaRPr lang="en-US" sz="1400" dirty="0"/>
           </a:p>
@@ -11081,121 +11876,27 @@
       </p:sp>
       <p:sp>
         <p:nvSpPr>
-          <p:cNvPr id="32" name="texto-141"/>
-          <p:cNvSpPr txBox="1"/>
-          <p:nvPr/>
-        </p:nvSpPr>
-        <p:spPr>
-          <a:xfrm>
-            <a:off x="3474720" y="3611880"/>
-            <a:ext cx="2240280" cy="548640"/>
-          </a:xfrm>
-          <a:prstGeom prst="rect">
-            <a:avLst/>
-          </a:prstGeom>
-          <a:noFill/>
-          <a:ln/>
-        </p:spPr>
-        <p:txBody>
-          <a:bodyPr wrap="square" lIns="0" tIns="0" rIns="0" bIns="0" rtlCol="0" anchor="t"/>
-          <a:lstStyle/>
-          <a:p>
-            <a:pPr indent="0" marL="0">
-              <a:buNone/>
-            </a:pPr>
-            <a:r>
-              <a:rPr lang="en-US" sz="1400" dirty="0">
-                <a:solidFill>
-                  <a:schemeClr val="tx1"/>
-                </a:solidFill>
-              </a:rPr>
-              <a:t>CSV de lecturas y reporte JSON</a:t>
-            </a:r>
-            <a:endParaRPr lang="en-US" sz="1400" dirty="0"/>
-          </a:p>
-        </p:txBody>
-      </p:sp>
-      <p:sp>
-        <p:nvSpPr>
-          <p:cNvPr id="33" name="texto-142"/>
-          <p:cNvSpPr txBox="1"/>
-          <p:nvPr/>
-        </p:nvSpPr>
-        <p:spPr>
-          <a:xfrm>
-            <a:off x="3474720" y="4160520"/>
-            <a:ext cx="2240280" cy="228600"/>
-          </a:xfrm>
-          <a:prstGeom prst="rect">
-            <a:avLst/>
-          </a:prstGeom>
-          <a:noFill/>
-          <a:ln/>
-        </p:spPr>
-        <p:txBody>
-          <a:bodyPr wrap="square" lIns="0" tIns="0" rIns="0" bIns="0" rtlCol="0" anchor="ctr"/>
-          <a:lstStyle/>
-          <a:p>
-            <a:pPr indent="0" marL="0">
-              <a:buNone/>
-            </a:pPr>
-            <a:r>
-              <a:rPr lang="en-US" sz="1100" b="1" dirty="0">
-                <a:solidFill>
-                  <a:schemeClr val="accent4"/>
-                </a:solidFill>
-              </a:rPr>
-              <a:t>RF07 · RF08</a:t>
-            </a:r>
-            <a:endParaRPr lang="en-US" sz="1100" dirty="0"/>
-          </a:p>
-        </p:txBody>
-      </p:sp>
-      <p:sp>
-        <p:nvSpPr>
-          <p:cNvPr id="34" name="tarjeta-143"/>
+          <p:cNvPr id="24" name="circulo-133"/>
           <p:cNvSpPr/>
           <p:nvPr/>
         </p:nvSpPr>
         <p:spPr>
           <a:xfrm>
-            <a:off x="6126480" y="2926080"/>
-            <a:ext cx="2560320" cy="1554480"/>
-          </a:xfrm>
-          <a:prstGeom prst="roundRect">
-            <a:avLst>
-              <a:gd name="adj" fmla="val 5882"/>
-            </a:avLst>
+            <a:off x="5715000" y="2377440"/>
+            <a:ext cx="384048" cy="384048"/>
+          </a:xfrm>
+          <a:prstGeom prst="ellipse">
+            <a:avLst/>
           </a:prstGeom>
           <a:solidFill>
-            <a:schemeClr val="bg2"/>
-          </a:solidFill>
-          <a:ln/>
-        </p:spPr>
-      </p:sp>
-      <p:sp>
-        <p:nvSpPr>
-          <p:cNvPr id="35" name="circulo-144"/>
-          <p:cNvSpPr/>
-          <p:nvPr/>
-        </p:nvSpPr>
-        <p:spPr>
-          <a:xfrm>
-            <a:off x="6309360" y="3108960"/>
-            <a:ext cx="411480" cy="411480"/>
-          </a:xfrm>
-          <a:prstGeom prst="ellipse">
-            <a:avLst/>
-          </a:prstGeom>
-          <a:solidFill>
-            <a:schemeClr val="accent1"/>
+            <a:schemeClr val="accent3"/>
           </a:solidFill>
           <a:ln/>
         </p:spPr>
       </p:sp>
       <p:pic>
         <p:nvPicPr>
-          <p:cNvPr id="36" name="icono-145" descr="preencoded.png">    </p:cNvPr>
+          <p:cNvPr id="25" name="icono-134" descr="preencoded.png">    </p:cNvPr>
           <p:cNvPicPr>
             <a:picLocks noChangeAspect="1"/>
           </p:cNvPicPr>
@@ -11209,8 +11910,8 @@
         </p:blipFill>
         <p:spPr>
           <a:xfrm>
-            <a:off x="6399886" y="3199486"/>
-            <a:ext cx="230429" cy="230429"/>
+            <a:off x="5799491" y="2461931"/>
+            <a:ext cx="215067" cy="215067"/>
           </a:xfrm>
           <a:prstGeom prst="rect">
             <a:avLst/>
@@ -11219,14 +11920,14 @@
       </p:pic>
       <p:sp>
         <p:nvSpPr>
-          <p:cNvPr id="37" name="texto-146"/>
+          <p:cNvPr id="26" name="texto-135"/>
           <p:cNvSpPr txBox="1"/>
           <p:nvPr/>
         </p:nvSpPr>
         <p:spPr>
           <a:xfrm>
-            <a:off x="6839712" y="3108960"/>
-            <a:ext cx="1783080" cy="411480"/>
+            <a:off x="6236208" y="2286000"/>
+            <a:ext cx="2450592" cy="585216"/>
           </a:xfrm>
           <a:prstGeom prst="rect">
             <a:avLst/>
@@ -11242,12 +11943,12 @@
               <a:buNone/>
             </a:pPr>
             <a:r>
-              <a:rPr lang="en-US" sz="1400" b="1" dirty="0">
+              <a:rPr lang="en-US" sz="1400" dirty="0">
                 <a:solidFill>
                   <a:schemeClr val="tx1"/>
                 </a:solidFill>
               </a:rPr>
-              <a:t>app.py</a:t>
+              <a:t>Un socket y un hilo por equipo, con su propio CSV</a:t>
             </a:r>
             <a:endParaRPr lang="en-US" sz="1400" dirty="0"/>
           </a:p>
@@ -11255,14 +11956,58 @@
       </p:sp>
       <p:sp>
         <p:nvSpPr>
-          <p:cNvPr id="38" name="texto-147"/>
+          <p:cNvPr id="27" name="circulo-136"/>
+          <p:cNvSpPr/>
+          <p:nvPr/>
+        </p:nvSpPr>
+        <p:spPr>
+          <a:xfrm>
+            <a:off x="5715000" y="3108960"/>
+            <a:ext cx="384048" cy="384048"/>
+          </a:xfrm>
+          <a:prstGeom prst="ellipse">
+            <a:avLst/>
+          </a:prstGeom>
+          <a:solidFill>
+            <a:schemeClr val="accent2"/>
+          </a:solidFill>
+          <a:ln/>
+        </p:spPr>
+      </p:sp>
+      <p:pic>
+        <p:nvPicPr>
+          <p:cNvPr id="28" name="icono-137" descr="preencoded.png">    </p:cNvPr>
+          <p:cNvPicPr>
+            <a:picLocks noChangeAspect="1"/>
+          </p:cNvPicPr>
+          <p:nvPr/>
+        </p:nvPicPr>
+        <p:blipFill>
+          <a:blip r:embed="rId7"/>
+          <a:stretch>
+            <a:fillRect/>
+          </a:stretch>
+        </p:blipFill>
+        <p:spPr>
+          <a:xfrm>
+            <a:off x="5799491" y="3193451"/>
+            <a:ext cx="215067" cy="215067"/>
+          </a:xfrm>
+          <a:prstGeom prst="rect">
+            <a:avLst/>
+          </a:prstGeom>
+        </p:spPr>
+      </p:pic>
+      <p:sp>
+        <p:nvSpPr>
+          <p:cNvPr id="29" name="texto-138"/>
           <p:cNvSpPr txBox="1"/>
           <p:nvPr/>
         </p:nvSpPr>
         <p:spPr>
           <a:xfrm>
-            <a:off x="6309360" y="3611880"/>
-            <a:ext cx="2240280" cy="548640"/>
+            <a:off x="6236208" y="3017520"/>
+            <a:ext cx="2450592" cy="585216"/>
           </a:xfrm>
           <a:prstGeom prst="rect">
             <a:avLst/>
@@ -11271,7 +12016,7 @@
           <a:ln/>
         </p:spPr>
         <p:txBody>
-          <a:bodyPr wrap="square" lIns="0" tIns="0" rIns="0" bIns="0" rtlCol="0" anchor="t"/>
+          <a:bodyPr wrap="square" lIns="0" tIns="0" rIns="0" bIns="0" rtlCol="0" anchor="ctr"/>
           <a:lstStyle/>
           <a:p>
             <a:pPr indent="0" marL="0">
@@ -11283,7 +12028,7 @@
                   <a:schemeClr val="tx1"/>
                 </a:solidFill>
               </a:rPr>
-              <a:t>Orquesta el ciclo sin caerse ante fallas</a:t>
+              <a:t>Una capa de flota suma las métricas</a:t>
             </a:r>
             <a:endParaRPr lang="en-US" sz="1400" dirty="0"/>
           </a:p>
@@ -11291,14 +12036,58 @@
       </p:sp>
       <p:sp>
         <p:nvSpPr>
-          <p:cNvPr id="39" name="texto-148"/>
+          <p:cNvPr id="30" name="circulo-139"/>
+          <p:cNvSpPr/>
+          <p:nvPr/>
+        </p:nvSpPr>
+        <p:spPr>
+          <a:xfrm>
+            <a:off x="5715000" y="3840480"/>
+            <a:ext cx="384048" cy="384048"/>
+          </a:xfrm>
+          <a:prstGeom prst="ellipse">
+            <a:avLst/>
+          </a:prstGeom>
+          <a:solidFill>
+            <a:schemeClr val="accent4"/>
+          </a:solidFill>
+          <a:ln/>
+        </p:spPr>
+      </p:sp>
+      <p:pic>
+        <p:nvPicPr>
+          <p:cNvPr id="31" name="icono-140" descr="preencoded.png">    </p:cNvPr>
+          <p:cNvPicPr>
+            <a:picLocks noChangeAspect="1"/>
+          </p:cNvPicPr>
+          <p:nvPr/>
+        </p:nvPicPr>
+        <p:blipFill>
+          <a:blip r:embed="rId8"/>
+          <a:stretch>
+            <a:fillRect/>
+          </a:stretch>
+        </p:blipFill>
+        <p:spPr>
+          <a:xfrm>
+            <a:off x="5799491" y="3924971"/>
+            <a:ext cx="215067" cy="215067"/>
+          </a:xfrm>
+          <a:prstGeom prst="rect">
+            <a:avLst/>
+          </a:prstGeom>
+        </p:spPr>
+      </p:pic>
+      <p:sp>
+        <p:nvSpPr>
+          <p:cNvPr id="32" name="texto-141"/>
           <p:cNvSpPr txBox="1"/>
           <p:nvPr/>
         </p:nvSpPr>
         <p:spPr>
           <a:xfrm>
-            <a:off x="6309360" y="4160520"/>
-            <a:ext cx="2240280" cy="228600"/>
+            <a:off x="6236208" y="3749040"/>
+            <a:ext cx="2450592" cy="585216"/>
           </a:xfrm>
           <a:prstGeom prst="rect">
             <a:avLst/>
@@ -11314,14 +12103,14 @@
               <a:buNone/>
             </a:pPr>
             <a:r>
-              <a:rPr lang="en-US" sz="1100" b="1" dirty="0">
-                <a:solidFill>
-                  <a:schemeClr val="accent1"/>
-                </a:solidFill>
-              </a:rPr>
-              <a:t>RF05 · RF09 · RF10</a:t>
-            </a:r>
-            <a:endParaRPr lang="en-US" sz="1100" dirty="0"/>
+              <a:rPr lang="en-US" sz="1400" dirty="0">
+                <a:solidFill>
+                  <a:schemeClr val="tx1"/>
+                </a:solidFill>
+              </a:rPr>
+              <a:t>Dashboard: vista General y una pestaña por equipo</a:t>
+            </a:r>
+            <a:endParaRPr lang="en-US" sz="1400" dirty="0"/>
           </a:p>
         </p:txBody>
       </p:sp>
@@ -11427,6 +12216,1158 @@
                   <a:schemeClr val="tx1"/>
                 </a:solidFill>
               </a:rPr>
+              <a:t>Aplicación Python modular</a:t>
+            </a:r>
+            <a:endParaRPr lang="en-US" sz="3600" dirty="0"/>
+          </a:p>
+        </p:txBody>
+      </p:sp>
+      <p:sp>
+        <p:nvSpPr>
+          <p:cNvPr id="4" name="tarjeta-142"/>
+          <p:cNvSpPr/>
+          <p:nvPr/>
+        </p:nvSpPr>
+        <p:spPr>
+          <a:xfrm>
+            <a:off x="457200" y="1143000"/>
+            <a:ext cx="2560320" cy="1554480"/>
+          </a:xfrm>
+          <a:prstGeom prst="roundRect">
+            <a:avLst>
+              <a:gd name="adj" fmla="val 5882"/>
+            </a:avLst>
+          </a:prstGeom>
+          <a:solidFill>
+            <a:schemeClr val="bg2"/>
+          </a:solidFill>
+          <a:ln/>
+        </p:spPr>
+      </p:sp>
+      <p:sp>
+        <p:nvSpPr>
+          <p:cNvPr id="5" name="circulo-143"/>
+          <p:cNvSpPr/>
+          <p:nvPr/>
+        </p:nvSpPr>
+        <p:spPr>
+          <a:xfrm>
+            <a:off x="640080" y="1325880"/>
+            <a:ext cx="411480" cy="411480"/>
+          </a:xfrm>
+          <a:prstGeom prst="ellipse">
+            <a:avLst/>
+          </a:prstGeom>
+          <a:solidFill>
+            <a:schemeClr val="accent2"/>
+          </a:solidFill>
+          <a:ln/>
+        </p:spPr>
+      </p:sp>
+      <p:pic>
+        <p:nvPicPr>
+          <p:cNvPr id="6" name="icono-144" descr="preencoded.png">    </p:cNvPr>
+          <p:cNvPicPr>
+            <a:picLocks noChangeAspect="1"/>
+          </p:cNvPicPr>
+          <p:nvPr/>
+        </p:nvPicPr>
+        <p:blipFill>
+          <a:blip r:embed="rId1"/>
+          <a:stretch>
+            <a:fillRect/>
+          </a:stretch>
+        </p:blipFill>
+        <p:spPr>
+          <a:xfrm>
+            <a:off x="730606" y="1416406"/>
+            <a:ext cx="230429" cy="230429"/>
+          </a:xfrm>
+          <a:prstGeom prst="rect">
+            <a:avLst/>
+          </a:prstGeom>
+        </p:spPr>
+      </p:pic>
+      <p:sp>
+        <p:nvSpPr>
+          <p:cNvPr id="7" name="texto-145"/>
+          <p:cNvSpPr txBox="1"/>
+          <p:nvPr/>
+        </p:nvSpPr>
+        <p:spPr>
+          <a:xfrm>
+            <a:off x="1170432" y="1325880"/>
+            <a:ext cx="1783080" cy="411480"/>
+          </a:xfrm>
+          <a:prstGeom prst="rect">
+            <a:avLst/>
+          </a:prstGeom>
+          <a:noFill/>
+          <a:ln/>
+        </p:spPr>
+        <p:txBody>
+          <a:bodyPr wrap="square" lIns="0" tIns="0" rIns="0" bIns="0" rtlCol="0" anchor="ctr"/>
+          <a:lstStyle/>
+          <a:p>
+            <a:pPr indent="0" marL="0">
+              <a:buNone/>
+            </a:pPr>
+            <a:r>
+              <a:rPr lang="en-US" sz="1400" b="1" dirty="0">
+                <a:solidFill>
+                  <a:schemeClr val="tx1"/>
+                </a:solidFill>
+              </a:rPr>
+              <a:t>acquisition.py</a:t>
+            </a:r>
+            <a:endParaRPr lang="en-US" sz="1400" dirty="0"/>
+          </a:p>
+        </p:txBody>
+      </p:sp>
+      <p:sp>
+        <p:nvSpPr>
+          <p:cNvPr id="8" name="texto-146"/>
+          <p:cNvSpPr txBox="1"/>
+          <p:nvPr/>
+        </p:nvSpPr>
+        <p:spPr>
+          <a:xfrm>
+            <a:off x="640080" y="1828800"/>
+            <a:ext cx="2240280" cy="548640"/>
+          </a:xfrm>
+          <a:prstGeom prst="rect">
+            <a:avLst/>
+          </a:prstGeom>
+          <a:noFill/>
+          <a:ln/>
+        </p:spPr>
+        <p:txBody>
+          <a:bodyPr wrap="square" lIns="0" tIns="0" rIns="0" bIns="0" rtlCol="0" anchor="t"/>
+          <a:lstStyle/>
+          <a:p>
+            <a:pPr indent="0" marL="0">
+              <a:buNone/>
+            </a:pPr>
+            <a:r>
+              <a:rPr lang="en-US" sz="1400" dirty="0">
+                <a:solidFill>
+                  <a:schemeClr val="tx1"/>
+                </a:solidFill>
+              </a:rPr>
+              <a:t>Cliente TCP con reconexión y backoff</a:t>
+            </a:r>
+            <a:endParaRPr lang="en-US" sz="1400" dirty="0"/>
+          </a:p>
+        </p:txBody>
+      </p:sp>
+      <p:sp>
+        <p:nvSpPr>
+          <p:cNvPr id="9" name="texto-147"/>
+          <p:cNvSpPr txBox="1"/>
+          <p:nvPr/>
+        </p:nvSpPr>
+        <p:spPr>
+          <a:xfrm>
+            <a:off x="640080" y="2377440"/>
+            <a:ext cx="2240280" cy="228600"/>
+          </a:xfrm>
+          <a:prstGeom prst="rect">
+            <a:avLst/>
+          </a:prstGeom>
+          <a:noFill/>
+          <a:ln/>
+        </p:spPr>
+        <p:txBody>
+          <a:bodyPr wrap="square" lIns="0" tIns="0" rIns="0" bIns="0" rtlCol="0" anchor="ctr"/>
+          <a:lstStyle/>
+          <a:p>
+            <a:pPr indent="0" marL="0">
+              <a:buNone/>
+            </a:pPr>
+            <a:r>
+              <a:rPr lang="en-US" sz="1100" b="1" dirty="0">
+                <a:solidFill>
+                  <a:schemeClr val="accent2"/>
+                </a:solidFill>
+              </a:rPr>
+              <a:t>RF02 · RF09</a:t>
+            </a:r>
+            <a:endParaRPr lang="en-US" sz="1100" dirty="0"/>
+          </a:p>
+        </p:txBody>
+      </p:sp>
+      <p:sp>
+        <p:nvSpPr>
+          <p:cNvPr id="10" name="tarjeta-148"/>
+          <p:cNvSpPr/>
+          <p:nvPr/>
+        </p:nvSpPr>
+        <p:spPr>
+          <a:xfrm>
+            <a:off x="3291840" y="1143000"/>
+            <a:ext cx="2560320" cy="1554480"/>
+          </a:xfrm>
+          <a:prstGeom prst="roundRect">
+            <a:avLst>
+              <a:gd name="adj" fmla="val 5882"/>
+            </a:avLst>
+          </a:prstGeom>
+          <a:solidFill>
+            <a:schemeClr val="bg2"/>
+          </a:solidFill>
+          <a:ln/>
+        </p:spPr>
+      </p:sp>
+      <p:sp>
+        <p:nvSpPr>
+          <p:cNvPr id="11" name="circulo-149"/>
+          <p:cNvSpPr/>
+          <p:nvPr/>
+        </p:nvSpPr>
+        <p:spPr>
+          <a:xfrm>
+            <a:off x="3474720" y="1325880"/>
+            <a:ext cx="411480" cy="411480"/>
+          </a:xfrm>
+          <a:prstGeom prst="ellipse">
+            <a:avLst/>
+          </a:prstGeom>
+          <a:solidFill>
+            <a:schemeClr val="accent2"/>
+          </a:solidFill>
+          <a:ln/>
+        </p:spPr>
+      </p:sp>
+      <p:pic>
+        <p:nvPicPr>
+          <p:cNvPr id="12" name="icono-150" descr="preencoded.png">    </p:cNvPr>
+          <p:cNvPicPr>
+            <a:picLocks noChangeAspect="1"/>
+          </p:cNvPicPr>
+          <p:nvPr/>
+        </p:nvPicPr>
+        <p:blipFill>
+          <a:blip r:embed="rId2"/>
+          <a:stretch>
+            <a:fillRect/>
+          </a:stretch>
+        </p:blipFill>
+        <p:spPr>
+          <a:xfrm>
+            <a:off x="3565246" y="1416406"/>
+            <a:ext cx="230429" cy="230429"/>
+          </a:xfrm>
+          <a:prstGeom prst="rect">
+            <a:avLst/>
+          </a:prstGeom>
+        </p:spPr>
+      </p:pic>
+      <p:sp>
+        <p:nvSpPr>
+          <p:cNvPr id="13" name="texto-151"/>
+          <p:cNvSpPr txBox="1"/>
+          <p:nvPr/>
+        </p:nvSpPr>
+        <p:spPr>
+          <a:xfrm>
+            <a:off x="4005072" y="1325880"/>
+            <a:ext cx="1783080" cy="411480"/>
+          </a:xfrm>
+          <a:prstGeom prst="rect">
+            <a:avLst/>
+          </a:prstGeom>
+          <a:noFill/>
+          <a:ln/>
+        </p:spPr>
+        <p:txBody>
+          <a:bodyPr wrap="square" lIns="0" tIns="0" rIns="0" bIns="0" rtlCol="0" anchor="ctr"/>
+          <a:lstStyle/>
+          <a:p>
+            <a:pPr indent="0" marL="0">
+              <a:buNone/>
+            </a:pPr>
+            <a:r>
+              <a:rPr lang="en-US" sz="1400" b="1" dirty="0">
+                <a:solidFill>
+                  <a:schemeClr val="tx1"/>
+                </a:solidFill>
+              </a:rPr>
+              <a:t>validation.py</a:t>
+            </a:r>
+            <a:endParaRPr lang="en-US" sz="1400" dirty="0"/>
+          </a:p>
+        </p:txBody>
+      </p:sp>
+      <p:sp>
+        <p:nvSpPr>
+          <p:cNvPr id="14" name="texto-152"/>
+          <p:cNvSpPr txBox="1"/>
+          <p:nvPr/>
+        </p:nvSpPr>
+        <p:spPr>
+          <a:xfrm>
+            <a:off x="3474720" y="1828800"/>
+            <a:ext cx="2240280" cy="548640"/>
+          </a:xfrm>
+          <a:prstGeom prst="rect">
+            <a:avLst/>
+          </a:prstGeom>
+          <a:noFill/>
+          <a:ln/>
+        </p:spPr>
+        <p:txBody>
+          <a:bodyPr wrap="square" lIns="0" tIns="0" rIns="0" bIns="0" rtlCol="0" anchor="t"/>
+          <a:lstStyle/>
+          <a:p>
+            <a:pPr indent="0" marL="0">
+              <a:buNone/>
+            </a:pPr>
+            <a:r>
+              <a:rPr lang="en-US" sz="1400" dirty="0">
+                <a:solidFill>
+                  <a:schemeClr val="tx1"/>
+                </a:solidFill>
+              </a:rPr>
+              <a:t>Estructura, tipo y rango de cada lectura</a:t>
+            </a:r>
+            <a:endParaRPr lang="en-US" sz="1400" dirty="0"/>
+          </a:p>
+        </p:txBody>
+      </p:sp>
+      <p:sp>
+        <p:nvSpPr>
+          <p:cNvPr id="15" name="texto-153"/>
+          <p:cNvSpPr txBox="1"/>
+          <p:nvPr/>
+        </p:nvSpPr>
+        <p:spPr>
+          <a:xfrm>
+            <a:off x="3474720" y="2377440"/>
+            <a:ext cx="2240280" cy="228600"/>
+          </a:xfrm>
+          <a:prstGeom prst="rect">
+            <a:avLst/>
+          </a:prstGeom>
+          <a:noFill/>
+          <a:ln/>
+        </p:spPr>
+        <p:txBody>
+          <a:bodyPr wrap="square" lIns="0" tIns="0" rIns="0" bIns="0" rtlCol="0" anchor="ctr"/>
+          <a:lstStyle/>
+          <a:p>
+            <a:pPr indent="0" marL="0">
+              <a:buNone/>
+            </a:pPr>
+            <a:r>
+              <a:rPr lang="en-US" sz="1100" b="1" dirty="0">
+                <a:solidFill>
+                  <a:schemeClr val="accent2"/>
+                </a:solidFill>
+              </a:rPr>
+              <a:t>RF03</a:t>
+            </a:r>
+            <a:endParaRPr lang="en-US" sz="1100" dirty="0"/>
+          </a:p>
+        </p:txBody>
+      </p:sp>
+      <p:sp>
+        <p:nvSpPr>
+          <p:cNvPr id="16" name="tarjeta-154"/>
+          <p:cNvSpPr/>
+          <p:nvPr/>
+        </p:nvSpPr>
+        <p:spPr>
+          <a:xfrm>
+            <a:off x="6126480" y="1143000"/>
+            <a:ext cx="2560320" cy="1554480"/>
+          </a:xfrm>
+          <a:prstGeom prst="roundRect">
+            <a:avLst>
+              <a:gd name="adj" fmla="val 5882"/>
+            </a:avLst>
+          </a:prstGeom>
+          <a:solidFill>
+            <a:schemeClr val="bg2"/>
+          </a:solidFill>
+          <a:ln/>
+        </p:spPr>
+      </p:sp>
+      <p:sp>
+        <p:nvSpPr>
+          <p:cNvPr id="17" name="circulo-155"/>
+          <p:cNvSpPr/>
+          <p:nvPr/>
+        </p:nvSpPr>
+        <p:spPr>
+          <a:xfrm>
+            <a:off x="6309360" y="1325880"/>
+            <a:ext cx="411480" cy="411480"/>
+          </a:xfrm>
+          <a:prstGeom prst="ellipse">
+            <a:avLst/>
+          </a:prstGeom>
+          <a:solidFill>
+            <a:schemeClr val="accent2"/>
+          </a:solidFill>
+          <a:ln/>
+        </p:spPr>
+      </p:sp>
+      <p:pic>
+        <p:nvPicPr>
+          <p:cNvPr id="18" name="icono-156" descr="preencoded.png">    </p:cNvPr>
+          <p:cNvPicPr>
+            <a:picLocks noChangeAspect="1"/>
+          </p:cNvPicPr>
+          <p:nvPr/>
+        </p:nvPicPr>
+        <p:blipFill>
+          <a:blip r:embed="rId3"/>
+          <a:stretch>
+            <a:fillRect/>
+          </a:stretch>
+        </p:blipFill>
+        <p:spPr>
+          <a:xfrm>
+            <a:off x="6399886" y="1416406"/>
+            <a:ext cx="230429" cy="230429"/>
+          </a:xfrm>
+          <a:prstGeom prst="rect">
+            <a:avLst/>
+          </a:prstGeom>
+        </p:spPr>
+      </p:pic>
+      <p:sp>
+        <p:nvSpPr>
+          <p:cNvPr id="19" name="texto-157"/>
+          <p:cNvSpPr txBox="1"/>
+          <p:nvPr/>
+        </p:nvSpPr>
+        <p:spPr>
+          <a:xfrm>
+            <a:off x="6839712" y="1325880"/>
+            <a:ext cx="1783080" cy="411480"/>
+          </a:xfrm>
+          <a:prstGeom prst="rect">
+            <a:avLst/>
+          </a:prstGeom>
+          <a:noFill/>
+          <a:ln/>
+        </p:spPr>
+        <p:txBody>
+          <a:bodyPr wrap="square" lIns="0" tIns="0" rIns="0" bIns="0" rtlCol="0" anchor="ctr"/>
+          <a:lstStyle/>
+          <a:p>
+            <a:pPr indent="0" marL="0">
+              <a:buNone/>
+            </a:pPr>
+            <a:r>
+              <a:rPr lang="en-US" sz="1400" b="1" dirty="0">
+                <a:solidFill>
+                  <a:schemeClr val="tx1"/>
+                </a:solidFill>
+              </a:rPr>
+              <a:t>processing.py</a:t>
+            </a:r>
+            <a:endParaRPr lang="en-US" sz="1400" dirty="0"/>
+          </a:p>
+        </p:txBody>
+      </p:sp>
+      <p:sp>
+        <p:nvSpPr>
+          <p:cNvPr id="20" name="texto-158"/>
+          <p:cNvSpPr txBox="1"/>
+          <p:nvPr/>
+        </p:nvSpPr>
+        <p:spPr>
+          <a:xfrm>
+            <a:off x="6309360" y="1828800"/>
+            <a:ext cx="2240280" cy="548640"/>
+          </a:xfrm>
+          <a:prstGeom prst="rect">
+            <a:avLst/>
+          </a:prstGeom>
+          <a:noFill/>
+          <a:ln/>
+        </p:spPr>
+        <p:txBody>
+          <a:bodyPr wrap="square" lIns="0" tIns="0" rIns="0" bIns="0" rtlCol="0" anchor="t"/>
+          <a:lstStyle/>
+          <a:p>
+            <a:pPr indent="0" marL="0">
+              <a:buNone/>
+            </a:pPr>
+            <a:r>
+              <a:rPr lang="en-US" sz="1400" dirty="0">
+                <a:solidFill>
+                  <a:schemeClr val="tx1"/>
+                </a:solidFill>
+              </a:rPr>
+              <a:t>Clasifica normal o anómala por umbrales</a:t>
+            </a:r>
+            <a:endParaRPr lang="en-US" sz="1400" dirty="0"/>
+          </a:p>
+        </p:txBody>
+      </p:sp>
+      <p:sp>
+        <p:nvSpPr>
+          <p:cNvPr id="21" name="texto-159"/>
+          <p:cNvSpPr txBox="1"/>
+          <p:nvPr/>
+        </p:nvSpPr>
+        <p:spPr>
+          <a:xfrm>
+            <a:off x="6309360" y="2377440"/>
+            <a:ext cx="2240280" cy="228600"/>
+          </a:xfrm>
+          <a:prstGeom prst="rect">
+            <a:avLst/>
+          </a:prstGeom>
+          <a:noFill/>
+          <a:ln/>
+        </p:spPr>
+        <p:txBody>
+          <a:bodyPr wrap="square" lIns="0" tIns="0" rIns="0" bIns="0" rtlCol="0" anchor="ctr"/>
+          <a:lstStyle/>
+          <a:p>
+            <a:pPr indent="0" marL="0">
+              <a:buNone/>
+            </a:pPr>
+            <a:r>
+              <a:rPr lang="en-US" sz="1100" b="1" dirty="0">
+                <a:solidFill>
+                  <a:schemeClr val="accent2"/>
+                </a:solidFill>
+              </a:rPr>
+              <a:t>RF04</a:t>
+            </a:r>
+            <a:endParaRPr lang="en-US" sz="1100" dirty="0"/>
+          </a:p>
+        </p:txBody>
+      </p:sp>
+      <p:sp>
+        <p:nvSpPr>
+          <p:cNvPr id="22" name="tarjeta-160"/>
+          <p:cNvSpPr/>
+          <p:nvPr/>
+        </p:nvSpPr>
+        <p:spPr>
+          <a:xfrm>
+            <a:off x="457200" y="2926080"/>
+            <a:ext cx="2560320" cy="1554480"/>
+          </a:xfrm>
+          <a:prstGeom prst="roundRect">
+            <a:avLst>
+              <a:gd name="adj" fmla="val 5882"/>
+            </a:avLst>
+          </a:prstGeom>
+          <a:solidFill>
+            <a:schemeClr val="bg2"/>
+          </a:solidFill>
+          <a:ln/>
+        </p:spPr>
+      </p:sp>
+      <p:sp>
+        <p:nvSpPr>
+          <p:cNvPr id="23" name="circulo-161"/>
+          <p:cNvSpPr/>
+          <p:nvPr/>
+        </p:nvSpPr>
+        <p:spPr>
+          <a:xfrm>
+            <a:off x="640080" y="3108960"/>
+            <a:ext cx="411480" cy="411480"/>
+          </a:xfrm>
+          <a:prstGeom prst="ellipse">
+            <a:avLst/>
+          </a:prstGeom>
+          <a:solidFill>
+            <a:schemeClr val="accent3"/>
+          </a:solidFill>
+          <a:ln/>
+        </p:spPr>
+      </p:sp>
+      <p:pic>
+        <p:nvPicPr>
+          <p:cNvPr id="24" name="icono-162" descr="preencoded.png">    </p:cNvPr>
+          <p:cNvPicPr>
+            <a:picLocks noChangeAspect="1"/>
+          </p:cNvPicPr>
+          <p:nvPr/>
+        </p:nvPicPr>
+        <p:blipFill>
+          <a:blip r:embed="rId4"/>
+          <a:stretch>
+            <a:fillRect/>
+          </a:stretch>
+        </p:blipFill>
+        <p:spPr>
+          <a:xfrm>
+            <a:off x="730606" y="3199486"/>
+            <a:ext cx="230429" cy="230429"/>
+          </a:xfrm>
+          <a:prstGeom prst="rect">
+            <a:avLst/>
+          </a:prstGeom>
+        </p:spPr>
+      </p:pic>
+      <p:sp>
+        <p:nvSpPr>
+          <p:cNvPr id="25" name="texto-163"/>
+          <p:cNvSpPr txBox="1"/>
+          <p:nvPr/>
+        </p:nvSpPr>
+        <p:spPr>
+          <a:xfrm>
+            <a:off x="1170432" y="3108960"/>
+            <a:ext cx="1783080" cy="411480"/>
+          </a:xfrm>
+          <a:prstGeom prst="rect">
+            <a:avLst/>
+          </a:prstGeom>
+          <a:noFill/>
+          <a:ln/>
+        </p:spPr>
+        <p:txBody>
+          <a:bodyPr wrap="square" lIns="0" tIns="0" rIns="0" bIns="0" rtlCol="0" anchor="ctr"/>
+          <a:lstStyle/>
+          <a:p>
+            <a:pPr indent="0" marL="0">
+              <a:buNone/>
+            </a:pPr>
+            <a:r>
+              <a:rPr lang="en-US" sz="1400" b="1" dirty="0">
+                <a:solidFill>
+                  <a:schemeClr val="tx1"/>
+                </a:solidFill>
+              </a:rPr>
+              <a:t>os_resources.py</a:t>
+            </a:r>
+            <a:endParaRPr lang="en-US" sz="1400" dirty="0"/>
+          </a:p>
+        </p:txBody>
+      </p:sp>
+      <p:sp>
+        <p:nvSpPr>
+          <p:cNvPr id="26" name="texto-164"/>
+          <p:cNvSpPr txBox="1"/>
+          <p:nvPr/>
+        </p:nvSpPr>
+        <p:spPr>
+          <a:xfrm>
+            <a:off x="640080" y="3611880"/>
+            <a:ext cx="2240280" cy="548640"/>
+          </a:xfrm>
+          <a:prstGeom prst="rect">
+            <a:avLst/>
+          </a:prstGeom>
+          <a:noFill/>
+          <a:ln/>
+        </p:spPr>
+        <p:txBody>
+          <a:bodyPr wrap="square" lIns="0" tIns="0" rIns="0" bIns="0" rtlCol="0" anchor="t"/>
+          <a:lstStyle/>
+          <a:p>
+            <a:pPr indent="0" marL="0">
+              <a:buNone/>
+            </a:pPr>
+            <a:r>
+              <a:rPr lang="en-US" sz="1400" dirty="0">
+                <a:solidFill>
+                  <a:schemeClr val="tx1"/>
+                </a:solidFill>
+              </a:rPr>
+              <a:t>CPU, memoria, disco, PID y entorno</a:t>
+            </a:r>
+            <a:endParaRPr lang="en-US" sz="1400" dirty="0"/>
+          </a:p>
+        </p:txBody>
+      </p:sp>
+      <p:sp>
+        <p:nvSpPr>
+          <p:cNvPr id="27" name="texto-165"/>
+          <p:cNvSpPr txBox="1"/>
+          <p:nvPr/>
+        </p:nvSpPr>
+        <p:spPr>
+          <a:xfrm>
+            <a:off x="640080" y="4160520"/>
+            <a:ext cx="2240280" cy="228600"/>
+          </a:xfrm>
+          <a:prstGeom prst="rect">
+            <a:avLst/>
+          </a:prstGeom>
+          <a:noFill/>
+          <a:ln/>
+        </p:spPr>
+        <p:txBody>
+          <a:bodyPr wrap="square" lIns="0" tIns="0" rIns="0" bIns="0" rtlCol="0" anchor="ctr"/>
+          <a:lstStyle/>
+          <a:p>
+            <a:pPr indent="0" marL="0">
+              <a:buNone/>
+            </a:pPr>
+            <a:r>
+              <a:rPr lang="en-US" sz="1100" b="1" dirty="0">
+                <a:solidFill>
+                  <a:schemeClr val="accent3"/>
+                </a:solidFill>
+              </a:rPr>
+              <a:t>RF06</a:t>
+            </a:r>
+            <a:endParaRPr lang="en-US" sz="1100" dirty="0"/>
+          </a:p>
+        </p:txBody>
+      </p:sp>
+      <p:sp>
+        <p:nvSpPr>
+          <p:cNvPr id="28" name="tarjeta-166"/>
+          <p:cNvSpPr/>
+          <p:nvPr/>
+        </p:nvSpPr>
+        <p:spPr>
+          <a:xfrm>
+            <a:off x="3291840" y="2926080"/>
+            <a:ext cx="2560320" cy="1554480"/>
+          </a:xfrm>
+          <a:prstGeom prst="roundRect">
+            <a:avLst>
+              <a:gd name="adj" fmla="val 5882"/>
+            </a:avLst>
+          </a:prstGeom>
+          <a:solidFill>
+            <a:schemeClr val="bg2"/>
+          </a:solidFill>
+          <a:ln/>
+        </p:spPr>
+      </p:sp>
+      <p:sp>
+        <p:nvSpPr>
+          <p:cNvPr id="29" name="circulo-167"/>
+          <p:cNvSpPr/>
+          <p:nvPr/>
+        </p:nvSpPr>
+        <p:spPr>
+          <a:xfrm>
+            <a:off x="3474720" y="3108960"/>
+            <a:ext cx="411480" cy="411480"/>
+          </a:xfrm>
+          <a:prstGeom prst="ellipse">
+            <a:avLst/>
+          </a:prstGeom>
+          <a:solidFill>
+            <a:schemeClr val="accent4"/>
+          </a:solidFill>
+          <a:ln/>
+        </p:spPr>
+      </p:sp>
+      <p:pic>
+        <p:nvPicPr>
+          <p:cNvPr id="30" name="icono-168" descr="preencoded.png">    </p:cNvPr>
+          <p:cNvPicPr>
+            <a:picLocks noChangeAspect="1"/>
+          </p:cNvPicPr>
+          <p:nvPr/>
+        </p:nvPicPr>
+        <p:blipFill>
+          <a:blip r:embed="rId5"/>
+          <a:stretch>
+            <a:fillRect/>
+          </a:stretch>
+        </p:blipFill>
+        <p:spPr>
+          <a:xfrm>
+            <a:off x="3565246" y="3199486"/>
+            <a:ext cx="230429" cy="230429"/>
+          </a:xfrm>
+          <a:prstGeom prst="rect">
+            <a:avLst/>
+          </a:prstGeom>
+        </p:spPr>
+      </p:pic>
+      <p:sp>
+        <p:nvSpPr>
+          <p:cNvPr id="31" name="texto-169"/>
+          <p:cNvSpPr txBox="1"/>
+          <p:nvPr/>
+        </p:nvSpPr>
+        <p:spPr>
+          <a:xfrm>
+            <a:off x="4005072" y="3108960"/>
+            <a:ext cx="1783080" cy="411480"/>
+          </a:xfrm>
+          <a:prstGeom prst="rect">
+            <a:avLst/>
+          </a:prstGeom>
+          <a:noFill/>
+          <a:ln/>
+        </p:spPr>
+        <p:txBody>
+          <a:bodyPr wrap="square" lIns="0" tIns="0" rIns="0" bIns="0" rtlCol="0" anchor="ctr"/>
+          <a:lstStyle/>
+          <a:p>
+            <a:pPr indent="0" marL="0">
+              <a:buNone/>
+            </a:pPr>
+            <a:r>
+              <a:rPr lang="en-US" sz="1400" b="1" dirty="0">
+                <a:solidFill>
+                  <a:schemeClr val="tx1"/>
+                </a:solidFill>
+              </a:rPr>
+              <a:t>persistence.py</a:t>
+            </a:r>
+            <a:endParaRPr lang="en-US" sz="1400" dirty="0"/>
+          </a:p>
+        </p:txBody>
+      </p:sp>
+      <p:sp>
+        <p:nvSpPr>
+          <p:cNvPr id="32" name="texto-170"/>
+          <p:cNvSpPr txBox="1"/>
+          <p:nvPr/>
+        </p:nvSpPr>
+        <p:spPr>
+          <a:xfrm>
+            <a:off x="3474720" y="3611880"/>
+            <a:ext cx="2240280" cy="548640"/>
+          </a:xfrm>
+          <a:prstGeom prst="rect">
+            <a:avLst/>
+          </a:prstGeom>
+          <a:noFill/>
+          <a:ln/>
+        </p:spPr>
+        <p:txBody>
+          <a:bodyPr wrap="square" lIns="0" tIns="0" rIns="0" bIns="0" rtlCol="0" anchor="t"/>
+          <a:lstStyle/>
+          <a:p>
+            <a:pPr indent="0" marL="0">
+              <a:buNone/>
+            </a:pPr>
+            <a:r>
+              <a:rPr lang="en-US" sz="1400" dirty="0">
+                <a:solidFill>
+                  <a:schemeClr val="tx1"/>
+                </a:solidFill>
+              </a:rPr>
+              <a:t>CSV de lecturas y reporte JSON</a:t>
+            </a:r>
+            <a:endParaRPr lang="en-US" sz="1400" dirty="0"/>
+          </a:p>
+        </p:txBody>
+      </p:sp>
+      <p:sp>
+        <p:nvSpPr>
+          <p:cNvPr id="33" name="texto-171"/>
+          <p:cNvSpPr txBox="1"/>
+          <p:nvPr/>
+        </p:nvSpPr>
+        <p:spPr>
+          <a:xfrm>
+            <a:off x="3474720" y="4160520"/>
+            <a:ext cx="2240280" cy="228600"/>
+          </a:xfrm>
+          <a:prstGeom prst="rect">
+            <a:avLst/>
+          </a:prstGeom>
+          <a:noFill/>
+          <a:ln/>
+        </p:spPr>
+        <p:txBody>
+          <a:bodyPr wrap="square" lIns="0" tIns="0" rIns="0" bIns="0" rtlCol="0" anchor="ctr"/>
+          <a:lstStyle/>
+          <a:p>
+            <a:pPr indent="0" marL="0">
+              <a:buNone/>
+            </a:pPr>
+            <a:r>
+              <a:rPr lang="en-US" sz="1100" b="1" dirty="0">
+                <a:solidFill>
+                  <a:schemeClr val="accent4"/>
+                </a:solidFill>
+              </a:rPr>
+              <a:t>RF07 · RF08</a:t>
+            </a:r>
+            <a:endParaRPr lang="en-US" sz="1100" dirty="0"/>
+          </a:p>
+        </p:txBody>
+      </p:sp>
+      <p:sp>
+        <p:nvSpPr>
+          <p:cNvPr id="34" name="tarjeta-172"/>
+          <p:cNvSpPr/>
+          <p:nvPr/>
+        </p:nvSpPr>
+        <p:spPr>
+          <a:xfrm>
+            <a:off x="6126480" y="2926080"/>
+            <a:ext cx="2560320" cy="1554480"/>
+          </a:xfrm>
+          <a:prstGeom prst="roundRect">
+            <a:avLst>
+              <a:gd name="adj" fmla="val 5882"/>
+            </a:avLst>
+          </a:prstGeom>
+          <a:solidFill>
+            <a:schemeClr val="bg2"/>
+          </a:solidFill>
+          <a:ln/>
+        </p:spPr>
+      </p:sp>
+      <p:sp>
+        <p:nvSpPr>
+          <p:cNvPr id="35" name="circulo-173"/>
+          <p:cNvSpPr/>
+          <p:nvPr/>
+        </p:nvSpPr>
+        <p:spPr>
+          <a:xfrm>
+            <a:off x="6309360" y="3108960"/>
+            <a:ext cx="411480" cy="411480"/>
+          </a:xfrm>
+          <a:prstGeom prst="ellipse">
+            <a:avLst/>
+          </a:prstGeom>
+          <a:solidFill>
+            <a:schemeClr val="accent1"/>
+          </a:solidFill>
+          <a:ln/>
+        </p:spPr>
+      </p:sp>
+      <p:pic>
+        <p:nvPicPr>
+          <p:cNvPr id="36" name="icono-174" descr="preencoded.png">    </p:cNvPr>
+          <p:cNvPicPr>
+            <a:picLocks noChangeAspect="1"/>
+          </p:cNvPicPr>
+          <p:nvPr/>
+        </p:nvPicPr>
+        <p:blipFill>
+          <a:blip r:embed="rId6"/>
+          <a:stretch>
+            <a:fillRect/>
+          </a:stretch>
+        </p:blipFill>
+        <p:spPr>
+          <a:xfrm>
+            <a:off x="6399886" y="3199486"/>
+            <a:ext cx="230429" cy="230429"/>
+          </a:xfrm>
+          <a:prstGeom prst="rect">
+            <a:avLst/>
+          </a:prstGeom>
+        </p:spPr>
+      </p:pic>
+      <p:sp>
+        <p:nvSpPr>
+          <p:cNvPr id="37" name="texto-175"/>
+          <p:cNvSpPr txBox="1"/>
+          <p:nvPr/>
+        </p:nvSpPr>
+        <p:spPr>
+          <a:xfrm>
+            <a:off x="6839712" y="3108960"/>
+            <a:ext cx="1783080" cy="411480"/>
+          </a:xfrm>
+          <a:prstGeom prst="rect">
+            <a:avLst/>
+          </a:prstGeom>
+          <a:noFill/>
+          <a:ln/>
+        </p:spPr>
+        <p:txBody>
+          <a:bodyPr wrap="square" lIns="0" tIns="0" rIns="0" bIns="0" rtlCol="0" anchor="ctr"/>
+          <a:lstStyle/>
+          <a:p>
+            <a:pPr indent="0" marL="0">
+              <a:buNone/>
+            </a:pPr>
+            <a:r>
+              <a:rPr lang="en-US" sz="1400" b="1" dirty="0">
+                <a:solidFill>
+                  <a:schemeClr val="tx1"/>
+                </a:solidFill>
+              </a:rPr>
+              <a:t>app.py</a:t>
+            </a:r>
+            <a:endParaRPr lang="en-US" sz="1400" dirty="0"/>
+          </a:p>
+        </p:txBody>
+      </p:sp>
+      <p:sp>
+        <p:nvSpPr>
+          <p:cNvPr id="38" name="texto-176"/>
+          <p:cNvSpPr txBox="1"/>
+          <p:nvPr/>
+        </p:nvSpPr>
+        <p:spPr>
+          <a:xfrm>
+            <a:off x="6309360" y="3611880"/>
+            <a:ext cx="2240280" cy="548640"/>
+          </a:xfrm>
+          <a:prstGeom prst="rect">
+            <a:avLst/>
+          </a:prstGeom>
+          <a:noFill/>
+          <a:ln/>
+        </p:spPr>
+        <p:txBody>
+          <a:bodyPr wrap="square" lIns="0" tIns="0" rIns="0" bIns="0" rtlCol="0" anchor="t"/>
+          <a:lstStyle/>
+          <a:p>
+            <a:pPr indent="0" marL="0">
+              <a:buNone/>
+            </a:pPr>
+            <a:r>
+              <a:rPr lang="en-US" sz="1400" dirty="0">
+                <a:solidFill>
+                  <a:schemeClr val="tx1"/>
+                </a:solidFill>
+              </a:rPr>
+              <a:t>Orquesta el ciclo sin caerse ante fallas</a:t>
+            </a:r>
+            <a:endParaRPr lang="en-US" sz="1400" dirty="0"/>
+          </a:p>
+        </p:txBody>
+      </p:sp>
+      <p:sp>
+        <p:nvSpPr>
+          <p:cNvPr id="39" name="texto-177"/>
+          <p:cNvSpPr txBox="1"/>
+          <p:nvPr/>
+        </p:nvSpPr>
+        <p:spPr>
+          <a:xfrm>
+            <a:off x="6309360" y="4160520"/>
+            <a:ext cx="2240280" cy="228600"/>
+          </a:xfrm>
+          <a:prstGeom prst="rect">
+            <a:avLst/>
+          </a:prstGeom>
+          <a:noFill/>
+          <a:ln/>
+        </p:spPr>
+        <p:txBody>
+          <a:bodyPr wrap="square" lIns="0" tIns="0" rIns="0" bIns="0" rtlCol="0" anchor="ctr"/>
+          <a:lstStyle/>
+          <a:p>
+            <a:pPr indent="0" marL="0">
+              <a:buNone/>
+            </a:pPr>
+            <a:r>
+              <a:rPr lang="en-US" sz="1100" b="1" dirty="0">
+                <a:solidFill>
+                  <a:schemeClr val="accent1"/>
+                </a:solidFill>
+              </a:rPr>
+              <a:t>RF05 · RF09 · RF10</a:t>
+            </a:r>
+            <a:endParaRPr lang="en-US" sz="1100" dirty="0"/>
+          </a:p>
+        </p:txBody>
+      </p:sp>
+      <p:sp>
+        <p:nvSpPr>
+          <p:cNvPr id="25" name="Slide Number Placeholder 0"/>
+          <p:cNvSpPr>
+            <a:spLocks noGrp="1"/>
+          </p:cNvSpPr>
+          <p:nvPr>
+            <p:ph type="sldNum" sz="quarter" idx="4294967295"/>
+          </p:nvPr>
+        </p:nvSpPr>
+        <p:spPr>
+          <a:xfrm>
+            <a:off x="8229600" y="4754880"/>
+            <a:ext cx="457200" cy="274320"/>
+          </a:xfrm>
+          <a:prstGeom prst="rect">
+            <a:avLst/>
+          </a:prstGeom>
+          <a:extLst>
+            <a:ext uri="{C572A759-6A51-4108-AA02-DFA0A04FC94B}">
+              <ma14:wrappingTextBoxFlag xmlns:ma14="http://schemas.microsoft.com/office/mac/drawingml/2011/main" val="0"/>
+            </a:ext>
+          </a:extLst>
+        </p:spPr>
+        <p:txBody>
+          <a:bodyPr/>
+          <a:lstStyle>
+            <a:lvl1pPr>
+              <a:defRPr sz="1000">
+                <a:solidFill>
+                  <a:schemeClr val="tx2"/>
+                </a:solidFill>
+              </a:defRPr>
+            </a:lvl1pPr>
+          </a:lstStyle>
+          <a:p>
+            <a:pPr algn="r"/>
+            <a:fld id="{F7021451-1387-4CA6-816F-3879F97B5CBC}" type="slidenum">
+              <a:rPr b="0" lang="en-US"/>
+              <a:t>7</a:t>
+            </a:fld>
+            <a:endParaRPr lang="en-US"/>
+          </a:p>
+        </p:txBody>
+      </p:sp>
+    </p:spTree>
+  </p:cSld>
+  <p:clrMapOvr>
+    <a:masterClrMapping/>
+  </p:clrMapOvr>
+</p:sld>
+</file>
+
+<file path=ppt/slides/slide8.xml><?xml version="1.0" encoding="utf-8"?>
+<p:sld xmlns:a="http://schemas.openxmlformats.org/drawingml/2006/main" xmlns:r="http://schemas.openxmlformats.org/officeDocument/2006/relationships" xmlns:p="http://schemas.openxmlformats.org/presentationml/2006/main">
+  <p:cSld name="Slide 8">
+    <p:spTree>
+      <p:nvGrpSpPr>
+        <p:cNvPr id="1" name=""/>
+        <p:cNvGrpSpPr/>
+        <p:nvPr/>
+      </p:nvGrpSpPr>
+      <p:grpSpPr>
+        <a:xfrm>
+          <a:off x="0" y="0"/>
+          <a:ext cx="0" cy="0"/>
+          <a:chOff x="0" y="0"/>
+          <a:chExt cx="0" cy="0"/>
+        </a:xfrm>
+      </p:grpSpPr>
+      <p:sp>
+        <p:nvSpPr>
+          <p:cNvPr id="2" name="Text 0"/>
+          <p:cNvSpPr/>
+          <p:nvPr>
+            <p:ph idx="100" type="title" hasCustomPrompt="1"/>
+          </p:nvPr>
+        </p:nvSpPr>
+        <p:spPr>
+          <a:xfrm>
+            <a:off x="457200" y="274320"/>
+            <a:ext cx="8229600" cy="685800"/>
+          </a:xfrm>
+          <a:prstGeom prst="rect">
+            <a:avLst/>
+          </a:prstGeom>
+          <a:noFill/>
+          <a:ln/>
+        </p:spPr>
+        <p:txBody>
+          <a:bodyPr wrap="square" lIns="0" tIns="0" rIns="0" bIns="0" rtlCol="0" anchor="ctr"/>
+          <a:lstStyle/>
+          <a:p>
+            <a:pPr indent="0" marL="0">
+              <a:buNone/>
+            </a:pPr>
+            <a:r>
+              <a:rPr lang="en-US" sz="3600" b="1" dirty="0">
+                <a:solidFill>
+                  <a:schemeClr val="tx1"/>
+                </a:solidFill>
+              </a:rPr>
               <a:t>Datos y reporte generados</a:t>
             </a:r>
             <a:endParaRPr lang="en-US" sz="3600" dirty="0"/>
@@ -11435,7 +13376,7 @@
       </p:sp>
       <p:sp>
         <p:nvSpPr>
-          <p:cNvPr id="4" name="tarjeta-149"/>
+          <p:cNvPr id="4" name="tarjeta-178"/>
           <p:cNvSpPr/>
           <p:nvPr/>
         </p:nvSpPr>
@@ -11457,7 +13398,7 @@
       </p:sp>
       <p:sp>
         <p:nvSpPr>
-          <p:cNvPr id="5" name="texto-150"/>
+          <p:cNvPr id="5" name="texto-179"/>
           <p:cNvSpPr txBox="1"/>
           <p:nvPr/>
         </p:nvSpPr>
@@ -11493,7 +13434,7 @@
       </p:sp>
       <p:sp>
         <p:nvSpPr>
-          <p:cNvPr id="6" name="texto-151"/>
+          <p:cNvPr id="6" name="texto-180"/>
           <p:cNvSpPr txBox="1"/>
           <p:nvPr/>
         </p:nvSpPr>
@@ -11529,7 +13470,7 @@
       </p:sp>
       <p:sp>
         <p:nvSpPr>
-          <p:cNvPr id="7" name="tarjeta-152"/>
+          <p:cNvPr id="7" name="tarjeta-181"/>
           <p:cNvSpPr/>
           <p:nvPr/>
         </p:nvSpPr>
@@ -11551,7 +13492,7 @@
       </p:sp>
       <p:sp>
         <p:nvSpPr>
-          <p:cNvPr id="8" name="texto-153"/>
+          <p:cNvPr id="8" name="texto-182"/>
           <p:cNvSpPr txBox="1"/>
           <p:nvPr/>
         </p:nvSpPr>
@@ -11587,7 +13528,7 @@
       </p:sp>
       <p:sp>
         <p:nvSpPr>
-          <p:cNvPr id="9" name="texto-154"/>
+          <p:cNvPr id="9" name="texto-183"/>
           <p:cNvSpPr txBox="1"/>
           <p:nvPr/>
         </p:nvSpPr>
@@ -11623,7 +13564,7 @@
       </p:sp>
       <p:sp>
         <p:nvSpPr>
-          <p:cNvPr id="10" name="tarjeta-155"/>
+          <p:cNvPr id="10" name="tarjeta-184"/>
           <p:cNvSpPr/>
           <p:nvPr/>
         </p:nvSpPr>
@@ -11645,7 +13586,7 @@
       </p:sp>
       <p:sp>
         <p:nvSpPr>
-          <p:cNvPr id="11" name="texto-156"/>
+          <p:cNvPr id="11" name="texto-185"/>
           <p:cNvSpPr txBox="1"/>
           <p:nvPr/>
         </p:nvSpPr>
@@ -11681,7 +13622,7 @@
       </p:sp>
       <p:sp>
         <p:nvSpPr>
-          <p:cNvPr id="12" name="texto-157"/>
+          <p:cNvPr id="12" name="texto-186"/>
           <p:cNvSpPr txBox="1"/>
           <p:nvPr/>
         </p:nvSpPr>
@@ -11717,7 +13658,7 @@
       </p:sp>
       <p:graphicFrame>
         <p:nvGraphicFramePr>
-          <p:cNvPr id="8" name="tabla-csv-158"/>
+          <p:cNvPr id="9" name="tabla-csv-187"/>
           <p:cNvGraphicFramePr>
             <a:graphicFrameLocks noGrp="1"/>
           </p:cNvGraphicFramePr>
@@ -13223,7 +15164,7 @@
       </p:graphicFrame>
       <p:sp>
         <p:nvSpPr>
-          <p:cNvPr id="14" name="texto-159"/>
+          <p:cNvPr id="14" name="texto-188"/>
           <p:cNvSpPr txBox="1"/>
           <p:nvPr/>
         </p:nvSpPr>
@@ -13296,7 +15237,7 @@
             <a:pPr algn="r"/>
             <a:fld id="{F7021451-1387-4CA6-816F-3879F97B5CBC}" type="slidenum">
               <a:rPr b="0" lang="en-US"/>
-              <a:t>7</a:t>
+              <a:t>8</a:t>
             </a:fld>
             <a:endParaRPr lang="en-US"/>
           </a:p>
@@ -13310,9 +15251,9 @@
 </p:sld>
 </file>
 
-<file path=ppt/slides/slide8.xml><?xml version="1.0" encoding="utf-8"?>
+<file path=ppt/slides/slide9.xml><?xml version="1.0" encoding="utf-8"?>
 <p:sld xmlns:a="http://schemas.openxmlformats.org/drawingml/2006/main" xmlns:r="http://schemas.openxmlformats.org/officeDocument/2006/relationships" xmlns:p="http://schemas.openxmlformats.org/presentationml/2006/main">
-  <p:cSld name="Slide 8">
+  <p:cSld name="Slide 9">
     <p:spTree>
       <p:nvGrpSpPr>
         <p:cNvPr id="1" name=""/>
@@ -13367,7 +15308,7 @@
       </p:sp>
       <p:graphicFrame>
         <p:nvGraphicFramePr>
-          <p:cNvPr id="9" name="tabla-matriz-160"/>
+          <p:cNvPr id="10" name="tabla-matriz-189"/>
           <p:cNvGraphicFramePr>
             <a:graphicFrameLocks noGrp="1"/>
           </p:cNvGraphicFramePr>
@@ -15613,7 +17554,7 @@
       </p:graphicFrame>
       <p:sp>
         <p:nvSpPr>
-          <p:cNvPr id="5" name="circulo-161"/>
+          <p:cNvPr id="5" name="circulo-190"/>
           <p:cNvSpPr/>
           <p:nvPr/>
         </p:nvSpPr>
@@ -15633,7 +17574,7 @@
       </p:sp>
       <p:pic>
         <p:nvPicPr>
-          <p:cNvPr id="6" name="icono-162" descr="preencoded.png">    </p:cNvPr>
+          <p:cNvPr id="6" name="icono-191" descr="preencoded.png">    </p:cNvPr>
           <p:cNvPicPr>
             <a:picLocks noChangeAspect="1"/>
           </p:cNvPicPr>
@@ -15657,7 +17598,7 @@
       </p:pic>
       <p:sp>
         <p:nvSpPr>
-          <p:cNvPr id="7" name="texto-163"/>
+          <p:cNvPr id="7" name="texto-192"/>
           <p:cNvSpPr txBox="1"/>
           <p:nvPr/>
         </p:nvSpPr>
@@ -15685,945 +17626,9 @@
                   <a:schemeClr val="tx1"/>
                 </a:solidFill>
               </a:rPr>
-              <a:t>64 de 64 pruebas pytest en verde · detalle completo en docs/Matriz_Pruebas.md</a:t>
+              <a:t>78 de 78 pruebas pytest en verde · detalle completo en docs/Matriz_Pruebas.md</a:t>
             </a:r>
             <a:endParaRPr lang="en-US" sz="1400" dirty="0"/>
-          </a:p>
-        </p:txBody>
-      </p:sp>
-      <p:sp>
-        <p:nvSpPr>
-          <p:cNvPr id="25" name="Slide Number Placeholder 0"/>
-          <p:cNvSpPr>
-            <a:spLocks noGrp="1"/>
-          </p:cNvSpPr>
-          <p:nvPr>
-            <p:ph type="sldNum" sz="quarter" idx="4294967295"/>
-          </p:nvPr>
-        </p:nvSpPr>
-        <p:spPr>
-          <a:xfrm>
-            <a:off x="8229600" y="4754880"/>
-            <a:ext cx="457200" cy="274320"/>
-          </a:xfrm>
-          <a:prstGeom prst="rect">
-            <a:avLst/>
-          </a:prstGeom>
-          <a:extLst>
-            <a:ext uri="{C572A759-6A51-4108-AA02-DFA0A04FC94B}">
-              <ma14:wrappingTextBoxFlag xmlns:ma14="http://schemas.microsoft.com/office/mac/drawingml/2011/main" val="0"/>
-            </a:ext>
-          </a:extLst>
-        </p:spPr>
-        <p:txBody>
-          <a:bodyPr/>
-          <a:lstStyle>
-            <a:lvl1pPr>
-              <a:defRPr sz="1000">
-                <a:solidFill>
-                  <a:schemeClr val="tx2"/>
-                </a:solidFill>
-              </a:defRPr>
-            </a:lvl1pPr>
-          </a:lstStyle>
-          <a:p>
-            <a:pPr algn="r"/>
-            <a:fld id="{F7021451-1387-4CA6-816F-3879F97B5CBC}" type="slidenum">
-              <a:rPr b="0" lang="en-US"/>
-              <a:t>8</a:t>
-            </a:fld>
-            <a:endParaRPr lang="en-US"/>
-          </a:p>
-        </p:txBody>
-      </p:sp>
-    </p:spTree>
-  </p:cSld>
-  <p:clrMapOvr>
-    <a:masterClrMapping/>
-  </p:clrMapOvr>
-</p:sld>
-</file>
-
-<file path=ppt/slides/slide9.xml><?xml version="1.0" encoding="utf-8"?>
-<p:sld xmlns:a="http://schemas.openxmlformats.org/drawingml/2006/main" xmlns:r="http://schemas.openxmlformats.org/officeDocument/2006/relationships" xmlns:p="http://schemas.openxmlformats.org/presentationml/2006/main">
-  <p:cSld name="Slide 9">
-    <p:spTree>
-      <p:nvGrpSpPr>
-        <p:cNvPr id="1" name=""/>
-        <p:cNvGrpSpPr/>
-        <p:nvPr/>
-      </p:nvGrpSpPr>
-      <p:grpSpPr>
-        <a:xfrm>
-          <a:off x="0" y="0"/>
-          <a:ext cx="0" cy="0"/>
-          <a:chOff x="0" y="0"/>
-          <a:chExt cx="0" cy="0"/>
-        </a:xfrm>
-      </p:grpSpPr>
-      <p:sp>
-        <p:nvSpPr>
-          <p:cNvPr id="2" name="Text 0"/>
-          <p:cNvSpPr/>
-          <p:nvPr>
-            <p:ph idx="100" type="title" hasCustomPrompt="1"/>
-          </p:nvPr>
-        </p:nvSpPr>
-        <p:spPr>
-          <a:xfrm>
-            <a:off x="457200" y="274320"/>
-            <a:ext cx="8229600" cy="685800"/>
-          </a:xfrm>
-          <a:prstGeom prst="rect">
-            <a:avLst/>
-          </a:prstGeom>
-          <a:noFill/>
-          <a:ln/>
-        </p:spPr>
-        <p:txBody>
-          <a:bodyPr wrap="square" lIns="0" tIns="0" rIns="0" bIns="0" rtlCol="0" anchor="ctr"/>
-          <a:lstStyle/>
-          <a:p>
-            <a:pPr indent="0" marL="0">
-              <a:buNone/>
-            </a:pPr>
-            <a:r>
-              <a:rPr lang="en-US" sz="3600" b="1" dirty="0">
-                <a:solidFill>
-                  <a:schemeClr val="tx1"/>
-                </a:solidFill>
-              </a:rPr>
-              <a:t>Fallos controlados</a:t>
-            </a:r>
-            <a:endParaRPr lang="en-US" sz="3600" dirty="0"/>
-          </a:p>
-        </p:txBody>
-      </p:sp>
-      <p:sp>
-        <p:nvSpPr>
-          <p:cNvPr id="4" name="tarjeta-164"/>
-          <p:cNvSpPr/>
-          <p:nvPr/>
-        </p:nvSpPr>
-        <p:spPr>
-          <a:xfrm>
-            <a:off x="457200" y="1143000"/>
-            <a:ext cx="2560320" cy="1417320"/>
-          </a:xfrm>
-          <a:prstGeom prst="roundRect">
-            <a:avLst>
-              <a:gd name="adj" fmla="val 6452"/>
-            </a:avLst>
-          </a:prstGeom>
-          <a:solidFill>
-            <a:schemeClr val="bg2"/>
-          </a:solidFill>
-          <a:ln/>
-        </p:spPr>
-      </p:sp>
-      <p:sp>
-        <p:nvSpPr>
-          <p:cNvPr id="5" name="numero-165"/>
-          <p:cNvSpPr txBox="1"/>
-          <p:nvPr/>
-        </p:nvSpPr>
-        <p:spPr>
-          <a:xfrm>
-            <a:off x="640080" y="1325880"/>
-            <a:ext cx="411480" cy="411480"/>
-          </a:xfrm>
-          <a:prstGeom prst="ellipse">
-            <a:avLst/>
-          </a:prstGeom>
-          <a:solidFill>
-            <a:schemeClr val="accent6"/>
-          </a:solidFill>
-          <a:ln/>
-        </p:spPr>
-        <p:txBody>
-          <a:bodyPr wrap="square" lIns="0" tIns="0" rIns="0" bIns="0" rtlCol="0" anchor="ctr"/>
-          <a:lstStyle/>
-          <a:p>
-            <a:pPr algn="ctr" indent="0" marL="0">
-              <a:buNone/>
-            </a:pPr>
-            <a:r>
-              <a:rPr lang="en-US" sz="1400" b="1" dirty="0">
-                <a:solidFill>
-                  <a:schemeClr val="bg1"/>
-                </a:solidFill>
-              </a:rPr>
-              <a:t>1</a:t>
-            </a:r>
-            <a:endParaRPr lang="en-US" sz="1400" dirty="0"/>
-          </a:p>
-        </p:txBody>
-      </p:sp>
-      <p:sp>
-        <p:nvSpPr>
-          <p:cNvPr id="6" name="texto-166"/>
-          <p:cNvSpPr txBox="1"/>
-          <p:nvPr/>
-        </p:nvSpPr>
-        <p:spPr>
-          <a:xfrm>
-            <a:off x="1170432" y="1325880"/>
-            <a:ext cx="1737360" cy="411480"/>
-          </a:xfrm>
-          <a:prstGeom prst="rect">
-            <a:avLst/>
-          </a:prstGeom>
-          <a:noFill/>
-          <a:ln/>
-        </p:spPr>
-        <p:txBody>
-          <a:bodyPr wrap="square" lIns="0" tIns="0" rIns="0" bIns="0" rtlCol="0" anchor="ctr"/>
-          <a:lstStyle/>
-          <a:p>
-            <a:pPr indent="0" marL="0">
-              <a:buNone/>
-            </a:pPr>
-            <a:r>
-              <a:rPr lang="en-US" sz="1400" b="1" dirty="0">
-                <a:solidFill>
-                  <a:schemeClr val="tx1"/>
-                </a:solidFill>
-              </a:rPr>
-              <a:t>Fuente detenida</a:t>
-            </a:r>
-            <a:endParaRPr lang="en-US" sz="1400" dirty="0"/>
-          </a:p>
-        </p:txBody>
-      </p:sp>
-      <p:sp>
-        <p:nvSpPr>
-          <p:cNvPr id="7" name="texto-167"/>
-          <p:cNvSpPr txBox="1"/>
-          <p:nvPr/>
-        </p:nvSpPr>
-        <p:spPr>
-          <a:xfrm>
-            <a:off x="640080" y="1874520"/>
-            <a:ext cx="2240280" cy="566928"/>
-          </a:xfrm>
-          <a:prstGeom prst="rect">
-            <a:avLst/>
-          </a:prstGeom>
-          <a:noFill/>
-          <a:ln/>
-        </p:spPr>
-        <p:txBody>
-          <a:bodyPr wrap="square" lIns="0" tIns="0" rIns="0" bIns="0" rtlCol="0" anchor="t"/>
-          <a:lstStyle/>
-          <a:p>
-            <a:pPr indent="0" marL="0">
-              <a:buNone/>
-            </a:pPr>
-            <a:r>
-              <a:rPr lang="en-US" sz="1400" dirty="0">
-                <a:solidFill>
-                  <a:schemeClr val="tx1"/>
-                </a:solidFill>
-              </a:rPr>
-              <a:t>3 intentos fallidos y cierre controlado, sin traceback</a:t>
-            </a:r>
-            <a:endParaRPr lang="en-US" sz="1400" dirty="0"/>
-          </a:p>
-        </p:txBody>
-      </p:sp>
-      <p:sp>
-        <p:nvSpPr>
-          <p:cNvPr id="8" name="tarjeta-168"/>
-          <p:cNvSpPr/>
-          <p:nvPr/>
-        </p:nvSpPr>
-        <p:spPr>
-          <a:xfrm>
-            <a:off x="3291840" y="1143000"/>
-            <a:ext cx="2560320" cy="1417320"/>
-          </a:xfrm>
-          <a:prstGeom prst="roundRect">
-            <a:avLst>
-              <a:gd name="adj" fmla="val 6452"/>
-            </a:avLst>
-          </a:prstGeom>
-          <a:solidFill>
-            <a:schemeClr val="bg2"/>
-          </a:solidFill>
-          <a:ln/>
-        </p:spPr>
-      </p:sp>
-      <p:sp>
-        <p:nvSpPr>
-          <p:cNvPr id="9" name="numero-169"/>
-          <p:cNvSpPr txBox="1"/>
-          <p:nvPr/>
-        </p:nvSpPr>
-        <p:spPr>
-          <a:xfrm>
-            <a:off x="3474720" y="1325880"/>
-            <a:ext cx="411480" cy="411480"/>
-          </a:xfrm>
-          <a:prstGeom prst="ellipse">
-            <a:avLst/>
-          </a:prstGeom>
-          <a:solidFill>
-            <a:schemeClr val="accent6"/>
-          </a:solidFill>
-          <a:ln/>
-        </p:spPr>
-        <p:txBody>
-          <a:bodyPr wrap="square" lIns="0" tIns="0" rIns="0" bIns="0" rtlCol="0" anchor="ctr"/>
-          <a:lstStyle/>
-          <a:p>
-            <a:pPr algn="ctr" indent="0" marL="0">
-              <a:buNone/>
-            </a:pPr>
-            <a:r>
-              <a:rPr lang="en-US" sz="1400" b="1" dirty="0">
-                <a:solidFill>
-                  <a:schemeClr val="bg1"/>
-                </a:solidFill>
-              </a:rPr>
-              <a:t>2</a:t>
-            </a:r>
-            <a:endParaRPr lang="en-US" sz="1400" dirty="0"/>
-          </a:p>
-        </p:txBody>
-      </p:sp>
-      <p:sp>
-        <p:nvSpPr>
-          <p:cNvPr id="10" name="texto-170"/>
-          <p:cNvSpPr txBox="1"/>
-          <p:nvPr/>
-        </p:nvSpPr>
-        <p:spPr>
-          <a:xfrm>
-            <a:off x="4005072" y="1325880"/>
-            <a:ext cx="1737360" cy="411480"/>
-          </a:xfrm>
-          <a:prstGeom prst="rect">
-            <a:avLst/>
-          </a:prstGeom>
-          <a:noFill/>
-          <a:ln/>
-        </p:spPr>
-        <p:txBody>
-          <a:bodyPr wrap="square" lIns="0" tIns="0" rIns="0" bIns="0" rtlCol="0" anchor="ctr"/>
-          <a:lstStyle/>
-          <a:p>
-            <a:pPr indent="0" marL="0">
-              <a:buNone/>
-            </a:pPr>
-            <a:r>
-              <a:rPr lang="en-US" sz="1400" b="1" dirty="0">
-                <a:solidFill>
-                  <a:schemeClr val="tx1"/>
-                </a:solidFill>
-              </a:rPr>
-              <a:t>Dato corrupto</a:t>
-            </a:r>
-            <a:endParaRPr lang="en-US" sz="1400" dirty="0"/>
-          </a:p>
-        </p:txBody>
-      </p:sp>
-      <p:sp>
-        <p:nvSpPr>
-          <p:cNvPr id="11" name="texto-171"/>
-          <p:cNvSpPr txBox="1"/>
-          <p:nvPr/>
-        </p:nvSpPr>
-        <p:spPr>
-          <a:xfrm>
-            <a:off x="3474720" y="1874520"/>
-            <a:ext cx="2240280" cy="566928"/>
-          </a:xfrm>
-          <a:prstGeom prst="rect">
-            <a:avLst/>
-          </a:prstGeom>
-          <a:noFill/>
-          <a:ln/>
-        </p:spPr>
-        <p:txBody>
-          <a:bodyPr wrap="square" lIns="0" tIns="0" rIns="0" bIns="0" rtlCol="0" anchor="t"/>
-          <a:lstStyle/>
-          <a:p>
-            <a:pPr indent="0" marL="0">
-              <a:buNone/>
-            </a:pPr>
-            <a:r>
-              <a:rPr lang="en-US" sz="1400" dirty="0">
-                <a:solidFill>
-                  <a:schemeClr val="tx1"/>
-                </a:solidFill>
-              </a:rPr>
-              <a:t>Línea descartada; la conexión sigue leyendo</a:t>
-            </a:r>
-            <a:endParaRPr lang="en-US" sz="1400" dirty="0"/>
-          </a:p>
-        </p:txBody>
-      </p:sp>
-      <p:sp>
-        <p:nvSpPr>
-          <p:cNvPr id="12" name="tarjeta-172"/>
-          <p:cNvSpPr/>
-          <p:nvPr/>
-        </p:nvSpPr>
-        <p:spPr>
-          <a:xfrm>
-            <a:off x="6126480" y="1143000"/>
-            <a:ext cx="2560320" cy="1417320"/>
-          </a:xfrm>
-          <a:prstGeom prst="roundRect">
-            <a:avLst>
-              <a:gd name="adj" fmla="val 6452"/>
-            </a:avLst>
-          </a:prstGeom>
-          <a:solidFill>
-            <a:schemeClr val="bg2"/>
-          </a:solidFill>
-          <a:ln/>
-        </p:spPr>
-      </p:sp>
-      <p:sp>
-        <p:nvSpPr>
-          <p:cNvPr id="13" name="numero-173"/>
-          <p:cNvSpPr txBox="1"/>
-          <p:nvPr/>
-        </p:nvSpPr>
-        <p:spPr>
-          <a:xfrm>
-            <a:off x="6309360" y="1325880"/>
-            <a:ext cx="411480" cy="411480"/>
-          </a:xfrm>
-          <a:prstGeom prst="ellipse">
-            <a:avLst/>
-          </a:prstGeom>
-          <a:solidFill>
-            <a:schemeClr val="accent6"/>
-          </a:solidFill>
-          <a:ln/>
-        </p:spPr>
-        <p:txBody>
-          <a:bodyPr wrap="square" lIns="0" tIns="0" rIns="0" bIns="0" rtlCol="0" anchor="ctr"/>
-          <a:lstStyle/>
-          <a:p>
-            <a:pPr algn="ctr" indent="0" marL="0">
-              <a:buNone/>
-            </a:pPr>
-            <a:r>
-              <a:rPr lang="en-US" sz="1400" b="1" dirty="0">
-                <a:solidFill>
-                  <a:schemeClr val="bg1"/>
-                </a:solidFill>
-              </a:rPr>
-              <a:t>3</a:t>
-            </a:r>
-            <a:endParaRPr lang="en-US" sz="1400" dirty="0"/>
-          </a:p>
-        </p:txBody>
-      </p:sp>
-      <p:sp>
-        <p:nvSpPr>
-          <p:cNvPr id="14" name="texto-174"/>
-          <p:cNvSpPr txBox="1"/>
-          <p:nvPr/>
-        </p:nvSpPr>
-        <p:spPr>
-          <a:xfrm>
-            <a:off x="6839712" y="1325880"/>
-            <a:ext cx="1737360" cy="411480"/>
-          </a:xfrm>
-          <a:prstGeom prst="rect">
-            <a:avLst/>
-          </a:prstGeom>
-          <a:noFill/>
-          <a:ln/>
-        </p:spPr>
-        <p:txBody>
-          <a:bodyPr wrap="square" lIns="0" tIns="0" rIns="0" bIns="0" rtlCol="0" anchor="ctr"/>
-          <a:lstStyle/>
-          <a:p>
-            <a:pPr indent="0" marL="0">
-              <a:buNone/>
-            </a:pPr>
-            <a:r>
-              <a:rPr lang="en-US" sz="1400" b="1" dirty="0">
-                <a:solidFill>
-                  <a:schemeClr val="tx1"/>
-                </a:solidFill>
-              </a:rPr>
-              <a:t>Ruta sin permisos</a:t>
-            </a:r>
-            <a:endParaRPr lang="en-US" sz="1400" dirty="0"/>
-          </a:p>
-        </p:txBody>
-      </p:sp>
-      <p:sp>
-        <p:nvSpPr>
-          <p:cNvPr id="15" name="texto-175"/>
-          <p:cNvSpPr txBox="1"/>
-          <p:nvPr/>
-        </p:nvSpPr>
-        <p:spPr>
-          <a:xfrm>
-            <a:off x="6309360" y="1874520"/>
-            <a:ext cx="2240280" cy="566928"/>
-          </a:xfrm>
-          <a:prstGeom prst="rect">
-            <a:avLst/>
-          </a:prstGeom>
-          <a:noFill/>
-          <a:ln/>
-        </p:spPr>
-        <p:txBody>
-          <a:bodyPr wrap="square" lIns="0" tIns="0" rIns="0" bIns="0" rtlCol="0" anchor="t"/>
-          <a:lstStyle/>
-          <a:p>
-            <a:pPr indent="0" marL="0">
-              <a:buNone/>
-            </a:pPr>
-            <a:r>
-              <a:rPr lang="en-US" sz="1400" dirty="0">
-                <a:solidFill>
-                  <a:schemeClr val="tx1"/>
-                </a:solidFill>
-              </a:rPr>
-              <a:t>OSError contado; la app sigue corriendo</a:t>
-            </a:r>
-            <a:endParaRPr lang="en-US" sz="1400" dirty="0"/>
-          </a:p>
-        </p:txBody>
-      </p:sp>
-      <p:sp>
-        <p:nvSpPr>
-          <p:cNvPr id="16" name="tarjeta-176"/>
-          <p:cNvSpPr/>
-          <p:nvPr/>
-        </p:nvSpPr>
-        <p:spPr>
-          <a:xfrm>
-            <a:off x="457200" y="2788920"/>
-            <a:ext cx="2560320" cy="1417320"/>
-          </a:xfrm>
-          <a:prstGeom prst="roundRect">
-            <a:avLst>
-              <a:gd name="adj" fmla="val 6452"/>
-            </a:avLst>
-          </a:prstGeom>
-          <a:solidFill>
-            <a:schemeClr val="bg2"/>
-          </a:solidFill>
-          <a:ln/>
-        </p:spPr>
-      </p:sp>
-      <p:sp>
-        <p:nvSpPr>
-          <p:cNvPr id="17" name="numero-177"/>
-          <p:cNvSpPr txBox="1"/>
-          <p:nvPr/>
-        </p:nvSpPr>
-        <p:spPr>
-          <a:xfrm>
-            <a:off x="640080" y="2971800"/>
-            <a:ext cx="411480" cy="411480"/>
-          </a:xfrm>
-          <a:prstGeom prst="ellipse">
-            <a:avLst/>
-          </a:prstGeom>
-          <a:solidFill>
-            <a:schemeClr val="accent6"/>
-          </a:solidFill>
-          <a:ln/>
-        </p:spPr>
-        <p:txBody>
-          <a:bodyPr wrap="square" lIns="0" tIns="0" rIns="0" bIns="0" rtlCol="0" anchor="ctr"/>
-          <a:lstStyle/>
-          <a:p>
-            <a:pPr algn="ctr" indent="0" marL="0">
-              <a:buNone/>
-            </a:pPr>
-            <a:r>
-              <a:rPr lang="en-US" sz="1400" b="1" dirty="0">
-                <a:solidFill>
-                  <a:schemeClr val="bg1"/>
-                </a:solidFill>
-              </a:rPr>
-              <a:t>4</a:t>
-            </a:r>
-            <a:endParaRPr lang="en-US" sz="1400" dirty="0"/>
-          </a:p>
-        </p:txBody>
-      </p:sp>
-      <p:sp>
-        <p:nvSpPr>
-          <p:cNvPr id="18" name="texto-178"/>
-          <p:cNvSpPr txBox="1"/>
-          <p:nvPr/>
-        </p:nvSpPr>
-        <p:spPr>
-          <a:xfrm>
-            <a:off x="1170432" y="2971800"/>
-            <a:ext cx="1737360" cy="411480"/>
-          </a:xfrm>
-          <a:prstGeom prst="rect">
-            <a:avLst/>
-          </a:prstGeom>
-          <a:noFill/>
-          <a:ln/>
-        </p:spPr>
-        <p:txBody>
-          <a:bodyPr wrap="square" lIns="0" tIns="0" rIns="0" bIns="0" rtlCol="0" anchor="ctr"/>
-          <a:lstStyle/>
-          <a:p>
-            <a:pPr indent="0" marL="0">
-              <a:buNone/>
-            </a:pPr>
-            <a:r>
-              <a:rPr lang="en-US" sz="1400" b="1" dirty="0">
-                <a:solidFill>
-                  <a:schemeClr val="tx1"/>
-                </a:solidFill>
-              </a:rPr>
-              <a:t>Fuera de rango</a:t>
-            </a:r>
-            <a:endParaRPr lang="en-US" sz="1400" dirty="0"/>
-          </a:p>
-        </p:txBody>
-      </p:sp>
-      <p:sp>
-        <p:nvSpPr>
-          <p:cNvPr id="19" name="texto-179"/>
-          <p:cNvSpPr txBox="1"/>
-          <p:nvPr/>
-        </p:nvSpPr>
-        <p:spPr>
-          <a:xfrm>
-            <a:off x="640080" y="3520440"/>
-            <a:ext cx="2240280" cy="566928"/>
-          </a:xfrm>
-          <a:prstGeom prst="rect">
-            <a:avLst/>
-          </a:prstGeom>
-          <a:noFill/>
-          <a:ln/>
-        </p:spPr>
-        <p:txBody>
-          <a:bodyPr wrap="square" lIns="0" tIns="0" rIns="0" bIns="0" rtlCol="0" anchor="t"/>
-          <a:lstStyle/>
-          <a:p>
-            <a:pPr indent="0" marL="0">
-              <a:buNone/>
-            </a:pPr>
-            <a:r>
-              <a:rPr lang="en-US" sz="1400" dirty="0">
-                <a:solidFill>
-                  <a:schemeClr val="tx1"/>
-                </a:solidFill>
-              </a:rPr>
-              <a:t>Humedad de 250 % rechazada por validación</a:t>
-            </a:r>
-            <a:endParaRPr lang="en-US" sz="1400" dirty="0"/>
-          </a:p>
-        </p:txBody>
-      </p:sp>
-      <p:sp>
-        <p:nvSpPr>
-          <p:cNvPr id="20" name="tarjeta-180"/>
-          <p:cNvSpPr/>
-          <p:nvPr/>
-        </p:nvSpPr>
-        <p:spPr>
-          <a:xfrm>
-            <a:off x="3291840" y="2788920"/>
-            <a:ext cx="2560320" cy="1417320"/>
-          </a:xfrm>
-          <a:prstGeom prst="roundRect">
-            <a:avLst>
-              <a:gd name="adj" fmla="val 6452"/>
-            </a:avLst>
-          </a:prstGeom>
-          <a:solidFill>
-            <a:schemeClr val="bg2"/>
-          </a:solidFill>
-          <a:ln/>
-        </p:spPr>
-      </p:sp>
-      <p:sp>
-        <p:nvSpPr>
-          <p:cNvPr id="21" name="numero-181"/>
-          <p:cNvSpPr txBox="1"/>
-          <p:nvPr/>
-        </p:nvSpPr>
-        <p:spPr>
-          <a:xfrm>
-            <a:off x="3474720" y="2971800"/>
-            <a:ext cx="411480" cy="411480"/>
-          </a:xfrm>
-          <a:prstGeom prst="ellipse">
-            <a:avLst/>
-          </a:prstGeom>
-          <a:solidFill>
-            <a:schemeClr val="accent6"/>
-          </a:solidFill>
-          <a:ln/>
-        </p:spPr>
-        <p:txBody>
-          <a:bodyPr wrap="square" lIns="0" tIns="0" rIns="0" bIns="0" rtlCol="0" anchor="ctr"/>
-          <a:lstStyle/>
-          <a:p>
-            <a:pPr algn="ctr" indent="0" marL="0">
-              <a:buNone/>
-            </a:pPr>
-            <a:r>
-              <a:rPr lang="en-US" sz="1400" b="1" dirty="0">
-                <a:solidFill>
-                  <a:schemeClr val="bg1"/>
-                </a:solidFill>
-              </a:rPr>
-              <a:t>5</a:t>
-            </a:r>
-            <a:endParaRPr lang="en-US" sz="1400" dirty="0"/>
-          </a:p>
-        </p:txBody>
-      </p:sp>
-      <p:sp>
-        <p:nvSpPr>
-          <p:cNvPr id="22" name="texto-182"/>
-          <p:cNvSpPr txBox="1"/>
-          <p:nvPr/>
-        </p:nvSpPr>
-        <p:spPr>
-          <a:xfrm>
-            <a:off x="4005072" y="2971800"/>
-            <a:ext cx="1737360" cy="411480"/>
-          </a:xfrm>
-          <a:prstGeom prst="rect">
-            <a:avLst/>
-          </a:prstGeom>
-          <a:noFill/>
-          <a:ln/>
-        </p:spPr>
-        <p:txBody>
-          <a:bodyPr wrap="square" lIns="0" tIns="0" rIns="0" bIns="0" rtlCol="0" anchor="ctr"/>
-          <a:lstStyle/>
-          <a:p>
-            <a:pPr indent="0" marL="0">
-              <a:buNone/>
-            </a:pPr>
-            <a:r>
-              <a:rPr lang="en-US" sz="1400" b="1" dirty="0">
-                <a:solidFill>
-                  <a:schemeClr val="tx1"/>
-                </a:solidFill>
-              </a:rPr>
-              <a:t>CPU saturada</a:t>
-            </a:r>
-            <a:endParaRPr lang="en-US" sz="1400" dirty="0"/>
-          </a:p>
-        </p:txBody>
-      </p:sp>
-      <p:sp>
-        <p:nvSpPr>
-          <p:cNvPr id="23" name="texto-183"/>
-          <p:cNvSpPr txBox="1"/>
-          <p:nvPr/>
-        </p:nvSpPr>
-        <p:spPr>
-          <a:xfrm>
-            <a:off x="3474720" y="3520440"/>
-            <a:ext cx="2240280" cy="566928"/>
-          </a:xfrm>
-          <a:prstGeom prst="rect">
-            <a:avLst/>
-          </a:prstGeom>
-          <a:noFill/>
-          <a:ln/>
-        </p:spPr>
-        <p:txBody>
-          <a:bodyPr wrap="square" lIns="0" tIns="0" rIns="0" bIns="0" rtlCol="0" anchor="t"/>
-          <a:lstStyle/>
-          <a:p>
-            <a:pPr indent="0" marL="0">
-              <a:buNone/>
-            </a:pPr>
-            <a:r>
-              <a:rPr lang="en-US" sz="1400" dirty="0">
-                <a:solidFill>
-                  <a:schemeClr val="tx1"/>
-                </a:solidFill>
-              </a:rPr>
-              <a:t>25 % → 93.9 %; el SO sigue respondiendo</a:t>
-            </a:r>
-            <a:endParaRPr lang="en-US" sz="1400" dirty="0"/>
-          </a:p>
-        </p:txBody>
-      </p:sp>
-      <p:sp>
-        <p:nvSpPr>
-          <p:cNvPr id="24" name="tarjeta-184"/>
-          <p:cNvSpPr/>
-          <p:nvPr/>
-        </p:nvSpPr>
-        <p:spPr>
-          <a:xfrm>
-            <a:off x="6126480" y="2788920"/>
-            <a:ext cx="2560320" cy="1417320"/>
-          </a:xfrm>
-          <a:prstGeom prst="roundRect">
-            <a:avLst>
-              <a:gd name="adj" fmla="val 6452"/>
-            </a:avLst>
-          </a:prstGeom>
-          <a:solidFill>
-            <a:schemeClr val="accent4"/>
-          </a:solidFill>
-          <a:ln/>
-        </p:spPr>
-      </p:sp>
-      <p:sp>
-        <p:nvSpPr>
-          <p:cNvPr id="25" name="numero-185"/>
-          <p:cNvSpPr txBox="1"/>
-          <p:nvPr/>
-        </p:nvSpPr>
-        <p:spPr>
-          <a:xfrm>
-            <a:off x="6309360" y="2971800"/>
-            <a:ext cx="411480" cy="411480"/>
-          </a:xfrm>
-          <a:prstGeom prst="ellipse">
-            <a:avLst/>
-          </a:prstGeom>
-          <a:solidFill>
-            <a:schemeClr val="bg1"/>
-          </a:solidFill>
-          <a:ln/>
-        </p:spPr>
-        <p:txBody>
-          <a:bodyPr wrap="square" lIns="0" tIns="0" rIns="0" bIns="0" rtlCol="0" anchor="ctr"/>
-          <a:lstStyle/>
-          <a:p>
-            <a:pPr algn="ctr" indent="0" marL="0">
-              <a:buNone/>
-            </a:pPr>
-            <a:r>
-              <a:rPr lang="en-US" sz="1400" b="1" dirty="0">
-                <a:solidFill>
-                  <a:schemeClr val="accent4"/>
-                </a:solidFill>
-              </a:rPr>
-              <a:t>6</a:t>
-            </a:r>
-            <a:endParaRPr lang="en-US" sz="1400" dirty="0"/>
-          </a:p>
-        </p:txBody>
-      </p:sp>
-      <p:sp>
-        <p:nvSpPr>
-          <p:cNvPr id="26" name="texto-186"/>
-          <p:cNvSpPr txBox="1"/>
-          <p:nvPr/>
-        </p:nvSpPr>
-        <p:spPr>
-          <a:xfrm>
-            <a:off x="6839712" y="2971800"/>
-            <a:ext cx="1737360" cy="411480"/>
-          </a:xfrm>
-          <a:prstGeom prst="rect">
-            <a:avLst/>
-          </a:prstGeom>
-          <a:noFill/>
-          <a:ln/>
-        </p:spPr>
-        <p:txBody>
-          <a:bodyPr wrap="square" lIns="0" tIns="0" rIns="0" bIns="0" rtlCol="0" anchor="ctr"/>
-          <a:lstStyle/>
-          <a:p>
-            <a:pPr indent="0" marL="0">
-              <a:buNone/>
-            </a:pPr>
-            <a:r>
-              <a:rPr lang="en-US" sz="1400" b="1" dirty="0">
-                <a:solidFill>
-                  <a:schemeClr val="bg1"/>
-                </a:solidFill>
-              </a:rPr>
-              <a:t>Red interrumpida</a:t>
-            </a:r>
-            <a:endParaRPr lang="en-US" sz="1400" dirty="0"/>
-          </a:p>
-        </p:txBody>
-      </p:sp>
-      <p:sp>
-        <p:nvSpPr>
-          <p:cNvPr id="27" name="texto-187"/>
-          <p:cNvSpPr txBox="1"/>
-          <p:nvPr/>
-        </p:nvSpPr>
-        <p:spPr>
-          <a:xfrm>
-            <a:off x="6309360" y="3520440"/>
-            <a:ext cx="2240280" cy="566928"/>
-          </a:xfrm>
-          <a:prstGeom prst="rect">
-            <a:avLst/>
-          </a:prstGeom>
-          <a:noFill/>
-          <a:ln/>
-        </p:spPr>
-        <p:txBody>
-          <a:bodyPr wrap="square" lIns="0" tIns="0" rIns="0" bIns="0" rtlCol="0" anchor="t"/>
-          <a:lstStyle/>
-          <a:p>
-            <a:pPr indent="0" marL="0">
-              <a:buNone/>
-            </a:pPr>
-            <a:r>
-              <a:rPr lang="en-US" sz="1400" dirty="0">
-                <a:solidFill>
-                  <a:schemeClr val="bg1"/>
-                </a:solidFill>
-              </a:rPr>
-              <a:t>Reconexión en 3.57 s; 40 de 40 lecturas</a:t>
-            </a:r>
-            <a:endParaRPr lang="en-US" sz="1400" dirty="0"/>
-          </a:p>
-        </p:txBody>
-      </p:sp>
-      <p:sp>
-        <p:nvSpPr>
-          <p:cNvPr id="28" name="texto-188"/>
-          <p:cNvSpPr txBox="1"/>
-          <p:nvPr/>
-        </p:nvSpPr>
-        <p:spPr>
-          <a:xfrm>
-            <a:off x="457200" y="4434840"/>
-            <a:ext cx="8229600" cy="274320"/>
-          </a:xfrm>
-          <a:prstGeom prst="rect">
-            <a:avLst/>
-          </a:prstGeom>
-          <a:noFill/>
-          <a:ln/>
-        </p:spPr>
-        <p:txBody>
-          <a:bodyPr wrap="square" lIns="0" tIns="0" rIns="0" bIns="0" rtlCol="0" anchor="ctr"/>
-          <a:lstStyle/>
-          <a:p>
-            <a:pPr indent="0" marL="0">
-              <a:buNone/>
-            </a:pPr>
-            <a:r>
-              <a:rPr lang="en-US" sz="1100" dirty="0">
-                <a:solidFill>
-                  <a:schemeClr val="tx2"/>
-                </a:solidFill>
-              </a:rPr>
-              <a:t>Salida de consola real de cada corrida en docs/Fallos_Controlados.md</a:t>
-            </a:r>
-            <a:endParaRPr lang="en-US" sz="1100" dirty="0"/>
           </a:p>
         </p:txBody>
       </p:sp>

--- a/docs/Diapositivas_Video_SegundoCorte.pptx
+++ b/docs/Diapositivas_Video_SegundoCorte.pptx
@@ -121,18 +121,18 @@
   <p:extLst>
     <p:ext uri="{521415D9-36F7-43E2-AB2F-B90AF26B5E84}">
       <p14:sectionLst xmlns:p14="http://schemas.microsoft.com/office/powerpoint/2010/main">
-        <p14:section name="Apertura" id="{2d305e10-dce3-4d33-15aa-0f3a0098d1b7}">
+        <p14:section name="Apertura" id="{398700cc-543b-675d-9584-f56ccbbd3c3f}">
           <p14:sldIdLst>
             <p14:sldId id="256"/>
           </p14:sldIdLst>
         </p14:section>
-        <p14:section name="Arquitectura" id="{6e91371b-01a4-951f-df69-d5e966b45735}">
+        <p14:section name="Arquitectura" id="{f245be49-95b0-9ce4-60c3-3ec96454dce4}">
           <p14:sldIdLst>
             <p14:sldId id="257"/>
             <p14:sldId id="258"/>
           </p14:sldIdLst>
         </p14:section>
-        <p14:section name="Implementación" id="{c9ed07e1-af28-4d54-c5f6-a5d161f7b1db}">
+        <p14:section name="Implementación" id="{646a633e-a628-d38e-bd02-72f8542d0178}">
           <p14:sldIdLst>
             <p14:sldId id="259"/>
             <p14:sldId id="260"/>
@@ -141,20 +141,20 @@
             <p14:sldId id="263"/>
           </p14:sldIdLst>
         </p14:section>
-        <p14:section name="Validación" id="{d46972bc-dd35-f88c-7136-be19b05c8746}">
+        <p14:section name="Validación" id="{a68b80f3-980d-f14d-86d9-ac4a1a176146}">
           <p14:sldIdLst>
             <p14:sldId id="264"/>
             <p14:sldId id="265"/>
             <p14:sldId id="266"/>
           </p14:sldIdLst>
         </p14:section>
-        <p14:section name="Preguntas" id="{748c4de0-9bd0-b201-cee7-4acc17af2580}">
+        <p14:section name="Preguntas" id="{397792e8-0835-a05a-f1bb-ac5a02457d27}">
           <p14:sldIdLst>
             <p14:sldId id="267"/>
             <p14:sldId id="268"/>
           </p14:sldIdLst>
         </p14:section>
-        <p14:section name="Cierre" id="{08e35ac9-2791-a53a-2d55-dc7ba1624019}">
+        <p14:section name="Cierre" id="{4bf8bd68-d0e3-2ad4-171e-c9a177f29d78}">
           <p14:sldIdLst>
             <p14:sldId id="269"/>
             <p14:sldId id="270"/>
@@ -1376,7 +1376,7 @@
             <a:r>
               <a:rPr lang="en-US" dirty="0"/>
               <a:t>[En pantalla: github.com/Facabore/practica-hsf-segundo-corte con el README renderizado]
-Este es el repositorio en GitHub. La estructura separa claramente la aplicación en hsf_app, el firmware simulado, las pruebas, los scripts de demo, los diagramas y la documentación. El README explica cómo instalar las dependencias y cómo correr el sistema completo, con dos terminales: una para el firmware y otra para la aplicación. Todo lo que voy a mostrar en este video se puede reproducir exactamente con estos comandos, en Windows o en Linux.</a:t>
+Este es el repositorio en GitHub. La estructura separa claramente la aplicación en hsf_app, el firmware simulado, las pruebas, los scripts de demo, los diagramas y la documentación. El README explica cómo instalar las dependencias y cómo correr el sistema completo, con dos terminales: una para el firmware y otra para la aplicación. Todo lo que voy a mostrar en este video se puede reproducir exactamente con estos comandos, en Windows o en Linux. Además, el sistema quedó publicado en la nube, con HTTPS, en integration-corte2.duckdns.org: cualquiera puede verlo funcionando en vivo, en modo solo lectura.</a:t>
             </a:r>
             <a:endParaRPr lang="en-US" dirty="0"/>
           </a:p>
@@ -7580,7 +7580,21 @@
                   <a:schemeClr val="tx1"/>
                 </a:solidFill>
               </a:rPr>
-              <a:t>Código, pruebas, evidencia y documento técnico: github.com/Facabore/practica-hsf-segundo-corte</a:t>
+              <a:t>Código y documento técnico: github.com/Facabore/practica-hsf-segundo-corte</a:t>
+            </a:r>
+            <a:endParaRPr lang="en-US" sz="1400" dirty="0"/>
+          </a:p>
+          <a:p>
+            <a:pPr indent="0" marL="0">
+              <a:buNone/>
+            </a:pPr>
+            <a:r>
+              <a:rPr lang="en-US" sz="1400" b="1" dirty="0">
+                <a:solidFill>
+                  <a:schemeClr val="tx1"/>
+                </a:solidFill>
+              </a:rPr>
+              <a:t>Demo en vivo en la nube: https://integration-corte2.duckdns.org</a:t>
             </a:r>
             <a:endParaRPr lang="en-US" sz="1400" dirty="0"/>
           </a:p>

--- a/docs/Diapositivas_Video_SegundoCorte.pptx
+++ b/docs/Diapositivas_Video_SegundoCorte.pptx
@@ -121,18 +121,18 @@
   <p:extLst>
     <p:ext uri="{521415D9-36F7-43E2-AB2F-B90AF26B5E84}">
       <p14:sectionLst xmlns:p14="http://schemas.microsoft.com/office/powerpoint/2010/main">
-        <p14:section name="Apertura" id="{398700cc-543b-675d-9584-f56ccbbd3c3f}">
+        <p14:section name="Apertura" id="{b87cdde9-12ca-c175-ee9c-f57bf3cad8ea}">
           <p14:sldIdLst>
             <p14:sldId id="256"/>
           </p14:sldIdLst>
         </p14:section>
-        <p14:section name="Arquitectura" id="{f245be49-95b0-9ce4-60c3-3ec96454dce4}">
+        <p14:section name="Arquitectura" id="{a563c1c7-88cc-c8b4-794a-4cda50f3efcc}">
           <p14:sldIdLst>
             <p14:sldId id="257"/>
             <p14:sldId id="258"/>
           </p14:sldIdLst>
         </p14:section>
-        <p14:section name="Implementación" id="{646a633e-a628-d38e-bd02-72f8542d0178}">
+        <p14:section name="Implementación" id="{344e306b-6346-568a-c052-95355b15eaff}">
           <p14:sldIdLst>
             <p14:sldId id="259"/>
             <p14:sldId id="260"/>
@@ -141,20 +141,20 @@
             <p14:sldId id="263"/>
           </p14:sldIdLst>
         </p14:section>
-        <p14:section name="Validación" id="{a68b80f3-980d-f14d-86d9-ac4a1a176146}">
+        <p14:section name="Validación" id="{20da7408-9bb4-6ea5-b6f8-efd86be1bd8d}">
           <p14:sldIdLst>
             <p14:sldId id="264"/>
             <p14:sldId id="265"/>
             <p14:sldId id="266"/>
           </p14:sldIdLst>
         </p14:section>
-        <p14:section name="Preguntas" id="{397792e8-0835-a05a-f1bb-ac5a02457d27}">
+        <p14:section name="Preguntas" id="{fb5fb8f7-727d-c674-07d9-738f45259f0c}">
           <p14:sldIdLst>
             <p14:sldId id="267"/>
             <p14:sldId id="268"/>
           </p14:sldIdLst>
         </p14:section>
-        <p14:section name="Cierre" id="{4bf8bd68-d0e3-2ad4-171e-c9a177f29d78}">
+        <p14:section name="Cierre" id="{459247b3-ba87-39cd-bc4c-73513748137c}">
           <p14:sldIdLst>
             <p14:sldId id="269"/>
             <p14:sldId id="270"/>
@@ -654,7 +654,7 @@
             <a:r>
               <a:rPr lang="en-US" dirty="0"/>
               <a:t>[En pantalla: logs/sistema.log y el fallo 6 de docs/Fallos_Controlados.md]
-Ahora lo más importante: qué pasa cuando algo falla. Desde este panel provoco fallos reales. Fuerzo una anomalía y aparece el punto rojo. Mando un dato corrupto y un valor fuera de rango: suben los contadores, y el sistema sigue leyendo. Ahora detengo solo el firmware de la bomba: ese equipo pasa a reconectando y su línea se corta, pero el compresor y el motor siguen enviando datos sin enterarse. Lo reinicio, y la aplicación se reconecta sola, sin reiniciarla. Por último saturo la CPU: la gráfica sube casi al cien por ciento y la integración sigue funcionando. Estos seis fallos, con su salida de consola real, están documentados en el repositorio.</a:t>
+Ahora lo más importante: qué pasa cuando algo falla. Desde este panel provoco fallos reales. Fuerzo una anomalía y aparece el punto rojo. Mando un dato corrupto y un valor fuera de rango: suben los contadores, y el sistema sigue leyendo. Ahora apago solo la bomba: ese equipo pasa a reconectando y su línea se corta, pero el compresor y el motor siguen enviando datos sin enterarse. La vuelvo a encender, y la aplicación se reconecta sola, sin reiniciarla. Por último saturo la CPU: la gráfica sube casi al cien por ciento y la integración sigue funcionando. Estos seis fallos, con su salida de consola real, están documentados en el repositorio.</a:t>
             </a:r>
             <a:endParaRPr lang="en-US" dirty="0"/>
           </a:p>
@@ -1376,7 +1376,7 @@
             <a:r>
               <a:rPr lang="en-US" dirty="0"/>
               <a:t>[En pantalla: github.com/Facabore/practica-hsf-segundo-corte con el README renderizado]
-Este es el repositorio en GitHub. La estructura separa claramente la aplicación en hsf_app, el firmware simulado, las pruebas, los scripts de demo, los diagramas y la documentación. El README explica cómo instalar las dependencias y cómo correr el sistema completo, con dos terminales: una para el firmware y otra para la aplicación. Todo lo que voy a mostrar en este video se puede reproducir exactamente con estos comandos, en Windows o en Linux. Además, el sistema quedó publicado en la nube, con HTTPS, en integration-corte2.duckdns.org: cualquiera puede verlo funcionando en vivo, en modo solo lectura.</a:t>
+Este es el repositorio en GitHub. La estructura separa claramente la aplicación en hsf_app, el firmware simulado, las pruebas, los scripts de demo, los diagramas y la documentación. El README explica cómo instalar las dependencias y cómo correr el sistema completo, con dos terminales: una para el firmware y otra para la aplicación. Todo lo que voy a mostrar en este video se puede reproducir exactamente con estos comandos, en Windows o en Linux. Además, el sistema quedó publicado en la nube, con HTTPS, en integration-corte2.duckdns.org: cualquiera puede verlo funcionando en vivo.</a:t>
             </a:r>
             <a:endParaRPr lang="en-US" dirty="0"/>
           </a:p>
@@ -1820,8 +1820,8 @@
           <a:p>
             <a:r>
               <a:rPr lang="en-US" dirty="0"/>
-              <a:t>[En pantalla: terminal ejecutando "pytest tests/ -v" en vivo, 78 en verde; luego docs/Matriz_Pruebas.md]
-El proyecto tiene setenta y ocho pruebas automáticas con pytest, escritas con test primero, implementación después — es decir, TDD real. Las voy a correr ahora mismo [ejecutar pytest tests/ -v en pantalla]. Como se ve, las setenta y ocho pasan. La matriz de pruebas del documento técnico cruza cada requisito funcional con su prueba automática y, cuando corresponde, con una corrida manual real contra el sistema completo — no son pruebas teóricas, son pruebas que de verdad se ejecutaron.</a:t>
+              <a:t>[En pantalla: terminal ejecutando "pytest tests/ -v" en vivo, 85 en verde; luego docs/Matriz_Pruebas.md]
+El proyecto tiene ochenta y cinco pruebas automáticas con pytest, escritas con test primero, implementación después — es decir, TDD real. Las voy a correr ahora mismo [ejecutar pytest tests/ -v en pantalla]. Como se ve, las ochenta y cinco pasan. La matriz de pruebas del documento técnico cruza cada requisito funcional con su prueba automática y, cuando corresponde, con una corrida manual real contra el sistema completo — no son pruebas teóricas, son pruebas que de verdad se ejecutaron.</a:t>
             </a:r>
             <a:endParaRPr lang="en-US" dirty="0"/>
           </a:p>
@@ -8558,7 +8558,7 @@
                   <a:schemeClr val="tx1"/>
                 </a:solidFill>
               </a:rPr>
-              <a:t>TDD: 78 pruebas escritas antes que el código</a:t>
+              <a:t>TDD: 85 pruebas escritas antes que el código</a:t>
             </a:r>
             <a:endParaRPr lang="en-US" sz="1400" dirty="0"/>
           </a:p>
@@ -10025,7 +10025,7 @@
                 <a:ea typeface="Courier New" pitchFamily="34" charset="-122"/>
                 <a:cs typeface="Courier New" pitchFamily="34" charset="-120"/>
               </a:rPr>
-              <a:t>78 pruebas pytest</a:t>
+              <a:t>85 pruebas pytest</a:t>
             </a:r>
             <a:endParaRPr lang="en-US" sz="1300" dirty="0"/>
           </a:p>
@@ -10246,7 +10246,7 @@
                   <a:schemeClr val="accent4"/>
                 </a:solidFill>
               </a:rPr>
-              <a:t>78</a:t>
+              <a:t>85</a:t>
             </a:r>
             <a:endParaRPr lang="en-US" sz="4400" dirty="0"/>
           </a:p>
@@ -17640,7 +17640,7 @@
                   <a:schemeClr val="tx1"/>
                 </a:solidFill>
               </a:rPr>
-              <a:t>78 de 78 pruebas pytest en verde · detalle completo en docs/Matriz_Pruebas.md</a:t>
+              <a:t>85 de 85 pruebas pytest en verde · detalle completo en docs/Matriz_Pruebas.md</a:t>
             </a:r>
             <a:endParaRPr lang="en-US" sz="1400" dirty="0"/>
           </a:p>

--- a/docs/Diapositivas_Video_SegundoCorte.pptx
+++ b/docs/Diapositivas_Video_SegundoCorte.pptx
@@ -121,18 +121,18 @@
   <p:extLst>
     <p:ext uri="{521415D9-36F7-43E2-AB2F-B90AF26B5E84}">
       <p14:sectionLst xmlns:p14="http://schemas.microsoft.com/office/powerpoint/2010/main">
-        <p14:section name="Apertura" id="{b87cdde9-12ca-c175-ee9c-f57bf3cad8ea}">
+        <p14:section name="Apertura" id="{2be5a78c-e9bc-f48f-6fb7-25e3ce4d3597}">
           <p14:sldIdLst>
             <p14:sldId id="256"/>
           </p14:sldIdLst>
         </p14:section>
-        <p14:section name="Arquitectura" id="{a563c1c7-88cc-c8b4-794a-4cda50f3efcc}">
+        <p14:section name="Arquitectura" id="{ad1def62-c6ff-3d16-7ba5-511b349dd1f9}">
           <p14:sldIdLst>
             <p14:sldId id="257"/>
             <p14:sldId id="258"/>
           </p14:sldIdLst>
         </p14:section>
-        <p14:section name="Implementación" id="{344e306b-6346-568a-c052-95355b15eaff}">
+        <p14:section name="Implementación" id="{2fecbcd6-0c9d-ae9f-2b04-290828d20bc9}">
           <p14:sldIdLst>
             <p14:sldId id="259"/>
             <p14:sldId id="260"/>
@@ -141,20 +141,20 @@
             <p14:sldId id="263"/>
           </p14:sldIdLst>
         </p14:section>
-        <p14:section name="Validación" id="{20da7408-9bb4-6ea5-b6f8-efd86be1bd8d}">
+        <p14:section name="Validación" id="{3c86d1a1-eb0e-7722-3cca-fc9b4ee396f5}">
           <p14:sldIdLst>
             <p14:sldId id="264"/>
             <p14:sldId id="265"/>
             <p14:sldId id="266"/>
           </p14:sldIdLst>
         </p14:section>
-        <p14:section name="Preguntas" id="{fb5fb8f7-727d-c674-07d9-738f45259f0c}">
+        <p14:section name="Preguntas" id="{da8326fc-a82e-2c7f-147a-c18ecbef9b22}">
           <p14:sldIdLst>
             <p14:sldId id="267"/>
             <p14:sldId id="268"/>
           </p14:sldIdLst>
         </p14:section>
-        <p14:section name="Cierre" id="{459247b3-ba87-39cd-bc4c-73513748137c}">
+        <p14:section name="Cierre" id="{009c9a7b-7deb-5cc5-6620-b5e571eca4ca}">
           <p14:sldIdLst>
             <p14:sldId id="269"/>
             <p14:sldId id="270"/>
@@ -1820,7 +1820,7 @@
           <a:p>
             <a:r>
               <a:rPr lang="en-US" dirty="0"/>
-              <a:t>[En pantalla: terminal ejecutando "pytest tests/ -v" en vivo, 85 en verde; luego docs/Matriz_Pruebas.md]
+              <a:t>[En pantalla: terminal ejecutando "pytest tests/ -v" en vivo, 87 en verde; luego docs/Matriz_Pruebas.md]
 El proyecto tiene ochenta y cinco pruebas automáticas con pytest, escritas con test primero, implementación después — es decir, TDD real. Las voy a correr ahora mismo [ejecutar pytest tests/ -v en pantalla]. Como se ve, las ochenta y cinco pasan. La matriz de pruebas del documento técnico cruza cada requisito funcional con su prueba automática y, cuando corresponde, con una corrida manual real contra el sistema completo — no son pruebas teóricas, son pruebas que de verdad se ejecutaron.</a:t>
             </a:r>
             <a:endParaRPr lang="en-US" dirty="0"/>
@@ -8558,7 +8558,7 @@
                   <a:schemeClr val="tx1"/>
                 </a:solidFill>
               </a:rPr>
-              <a:t>TDD: 85 pruebas escritas antes que el código</a:t>
+              <a:t>TDD: 87 pruebas escritas antes que el código</a:t>
             </a:r>
             <a:endParaRPr lang="en-US" sz="1400" dirty="0"/>
           </a:p>
@@ -10025,7 +10025,7 @@
                 <a:ea typeface="Courier New" pitchFamily="34" charset="-122"/>
                 <a:cs typeface="Courier New" pitchFamily="34" charset="-120"/>
               </a:rPr>
-              <a:t>85 pruebas pytest</a:t>
+              <a:t>87 pruebas pytest</a:t>
             </a:r>
             <a:endParaRPr lang="en-US" sz="1300" dirty="0"/>
           </a:p>
@@ -10246,7 +10246,7 @@
                   <a:schemeClr val="accent4"/>
                 </a:solidFill>
               </a:rPr>
-              <a:t>85</a:t>
+              <a:t>87</a:t>
             </a:r>
             <a:endParaRPr lang="en-US" sz="4400" dirty="0"/>
           </a:p>
@@ -17640,7 +17640,7 @@
                   <a:schemeClr val="tx1"/>
                 </a:solidFill>
               </a:rPr>
-              <a:t>85 de 85 pruebas pytest en verde · detalle completo en docs/Matriz_Pruebas.md</a:t>
+              <a:t>87 de 87 pruebas pytest en verde · detalle completo en docs/Matriz_Pruebas.md</a:t>
             </a:r>
             <a:endParaRPr lang="en-US" sz="1400" dirty="0"/>
           </a:p>

--- a/docs/Diapositivas_Video_SegundoCorte.pptx
+++ b/docs/Diapositivas_Video_SegundoCorte.pptx
@@ -121,18 +121,18 @@
   <p:extLst>
     <p:ext uri="{521415D9-36F7-43E2-AB2F-B90AF26B5E84}">
       <p14:sectionLst xmlns:p14="http://schemas.microsoft.com/office/powerpoint/2010/main">
-        <p14:section name="Apertura" id="{2be5a78c-e9bc-f48f-6fb7-25e3ce4d3597}">
+        <p14:section name="Apertura" id="{86ca3b27-e988-094f-e72e-d697ca90b2c0}">
           <p14:sldIdLst>
             <p14:sldId id="256"/>
           </p14:sldIdLst>
         </p14:section>
-        <p14:section name="Arquitectura" id="{ad1def62-c6ff-3d16-7ba5-511b349dd1f9}">
+        <p14:section name="Arquitectura" id="{22d012e2-80c2-3e1d-0ed1-dda7880957be}">
           <p14:sldIdLst>
             <p14:sldId id="257"/>
             <p14:sldId id="258"/>
           </p14:sldIdLst>
         </p14:section>
-        <p14:section name="Implementación" id="{2fecbcd6-0c9d-ae9f-2b04-290828d20bc9}">
+        <p14:section name="Implementación" id="{6ff950a9-e9c7-390e-f951-d03447eaf7d3}">
           <p14:sldIdLst>
             <p14:sldId id="259"/>
             <p14:sldId id="260"/>
@@ -141,20 +141,20 @@
             <p14:sldId id="263"/>
           </p14:sldIdLst>
         </p14:section>
-        <p14:section name="Validación" id="{3c86d1a1-eb0e-7722-3cca-fc9b4ee396f5}">
+        <p14:section name="Validación" id="{466b6955-8b3d-db52-bfd4-be9c75160190}">
           <p14:sldIdLst>
             <p14:sldId id="264"/>
             <p14:sldId id="265"/>
             <p14:sldId id="266"/>
           </p14:sldIdLst>
         </p14:section>
-        <p14:section name="Preguntas" id="{da8326fc-a82e-2c7f-147a-c18ecbef9b22}">
+        <p14:section name="Preguntas" id="{cf556caf-2d79-3ca2-83c2-98df91e2e1b1}">
           <p14:sldIdLst>
             <p14:sldId id="267"/>
             <p14:sldId id="268"/>
           </p14:sldIdLst>
         </p14:section>
-        <p14:section name="Cierre" id="{009c9a7b-7deb-5cc5-6620-b5e571eca4ca}">
+        <p14:section name="Cierre" id="{94bd0a19-d4ad-5971-e676-cbaaee0c9364}">
           <p14:sldIdLst>
             <p14:sldId id="269"/>
             <p14:sldId id="270"/>
@@ -653,7 +653,7 @@
           <a:p>
             <a:r>
               <a:rPr lang="en-US" dirty="0"/>
-              <a:t>[En pantalla: logs/sistema.log y el fallo 6 de docs/Fallos_Controlados.md]
+              <a:t>[En pantalla: dashboard, pestaña SIM-002: Forzar una anomalía, Enviar dato corrupto, Valor fuera de rango, Apagar el equipo; volver a General; Encender el equipo; Saturar la CPU 5 s]
 Ahora lo más importante: qué pasa cuando algo falla. Desde este panel provoco fallos reales. Fuerzo una anomalía y aparece el punto rojo. Mando un dato corrupto y un valor fuera de rango: suben los contadores, y el sistema sigue leyendo. Ahora apago solo la bomba: ese equipo pasa a reconectando y su línea se corta, pero el compresor y el motor siguen enviando datos sin enterarse. La vuelvo a encender, y la aplicación se reconecta sola, sin reiniciarla. Por último saturo la CPU: la gráfica sube casi al cien por ciento y la integración sigue funcionando. Estos seis fallos, con su salida de consola real, están documentados en el repositorio.</a:t>
             </a:r>
             <a:endParaRPr lang="en-US" dirty="0"/>
@@ -1821,7 +1821,7 @@
             <a:r>
               <a:rPr lang="en-US" dirty="0"/>
               <a:t>[En pantalla: terminal ejecutando "pytest tests/ -v" en vivo, 87 en verde; luego docs/Matriz_Pruebas.md]
-El proyecto tiene ochenta y cinco pruebas automáticas con pytest, escritas con test primero, implementación después — es decir, TDD real. Las voy a correr ahora mismo [ejecutar pytest tests/ -v en pantalla]. Como se ve, las ochenta y cinco pasan. La matriz de pruebas del documento técnico cruza cada requisito funcional con su prueba automática y, cuando corresponde, con una corrida manual real contra el sistema completo — no son pruebas teóricas, son pruebas que de verdad se ejecutaron.</a:t>
+El proyecto tiene ochenta y siete pruebas automáticas con pytest, escritas con test primero, implementación después — es decir, TDD real. Las voy a correr ahora mismo [ejecutar pytest tests/ -v en pantalla]. Como se ve, las ochenta y siete pasan. La matriz de pruebas del documento técnico cruza cada requisito funcional con su prueba automática y, cuando corresponde, con una corrida manual real contra el sistema completo — no son pruebas teóricas, son pruebas que de verdad se ejecutaron.</a:t>
             </a:r>
             <a:endParaRPr lang="en-US" dirty="0"/>
           </a:p>

--- a/docs/Diapositivas_Video_SegundoCorte.pptx
+++ b/docs/Diapositivas_Video_SegundoCorte.pptx
@@ -121,18 +121,18 @@
   <p:extLst>
     <p:ext uri="{521415D9-36F7-43E2-AB2F-B90AF26B5E84}">
       <p14:sectionLst xmlns:p14="http://schemas.microsoft.com/office/powerpoint/2010/main">
-        <p14:section name="Apertura" id="{86ca3b27-e988-094f-e72e-d697ca90b2c0}">
+        <p14:section name="Apertura" id="{97d2a039-efed-410a-0dd7-c2971cf2d37c}">
           <p14:sldIdLst>
             <p14:sldId id="256"/>
           </p14:sldIdLst>
         </p14:section>
-        <p14:section name="Arquitectura" id="{22d012e2-80c2-3e1d-0ed1-dda7880957be}">
+        <p14:section name="Arquitectura" id="{5ddc1951-6a26-ee62-6756-b7a4d6882578}">
           <p14:sldIdLst>
             <p14:sldId id="257"/>
             <p14:sldId id="258"/>
           </p14:sldIdLst>
         </p14:section>
-        <p14:section name="Implementación" id="{6ff950a9-e9c7-390e-f951-d03447eaf7d3}">
+        <p14:section name="Implementación" id="{e83d367b-4cd7-81bb-2a99-d0f0a28b0587}">
           <p14:sldIdLst>
             <p14:sldId id="259"/>
             <p14:sldId id="260"/>
@@ -141,20 +141,20 @@
             <p14:sldId id="263"/>
           </p14:sldIdLst>
         </p14:section>
-        <p14:section name="Validación" id="{466b6955-8b3d-db52-bfd4-be9c75160190}">
+        <p14:section name="Validación" id="{d4de7dfc-5cd7-b560-4dfb-7f1661e7d1b9}">
           <p14:sldIdLst>
             <p14:sldId id="264"/>
             <p14:sldId id="265"/>
             <p14:sldId id="266"/>
           </p14:sldIdLst>
         </p14:section>
-        <p14:section name="Preguntas" id="{cf556caf-2d79-3ca2-83c2-98df91e2e1b1}">
+        <p14:section name="Preguntas" id="{ebaccb2d-dd8a-f119-790d-ba2622a4a8b8}">
           <p14:sldIdLst>
             <p14:sldId id="267"/>
             <p14:sldId id="268"/>
           </p14:sldIdLst>
         </p14:section>
-        <p14:section name="Cierre" id="{94bd0a19-d4ad-5971-e676-cbaaee0c9364}">
+        <p14:section name="Cierre" id="{c9541294-b7ca-74f6-7b93-d111dcd1f093}">
           <p14:sldIdLst>
             <p14:sldId id="269"/>
             <p14:sldId id="270"/>
@@ -1732,7 +1732,7 @@
             <a:r>
               <a:rPr lang="en-US" dirty="0"/>
               <a:t>[En pantalla: data/lecturas.csv y data/reporte_ejecucion.json reales]
-Esta es una corrida real de veinte lecturas. En el CSV se ve cada lectura con su marca de tiempo y su estado: la mayoría normales, y dos marcadas como anómalas, exactamente las que el firmware inyectó a propósito. Y este es el reporte de ejecución en JSON: trae las métricas agregadas — lecturas válidas, anómalas, errores — y además un snapshot real de los recursos del sistema operativo en el momento del cierre: uso de CPU, memoria, disco y el PID del proceso. Ningún dato de este reporte está inventado, es la salida real de haber corrido el sistema.</a:t>
+Esta es una corrida real de veinte lecturas. En el CSV se ve cada lectura con su marca de tiempo y su estado: la mayoría normales, y dos marcadas como anómalas, exactamente las que el firmware inyectó a propósito. Y este es el reporte de ejecución en JSON: trae las métricas agregadas — lecturas válidas, anómalas, errores — y además un snapshot real de los recursos del sistema operativo en el momento del cierre: uso de CPU, memoria, disco y el PID del proceso. Ningún dato de este reporte está inventado, es la salida real de haber corrido el sistema. Este reporte se escribe al cerrar la ejecución, pero no hace falta esperar: en el panel, el botón Descargar reporte lo genera en el momento, con los datos de los tres equipos.</a:t>
             </a:r>
             <a:endParaRPr lang="en-US" dirty="0"/>
           </a:p>
@@ -1820,8 +1820,8 @@
           <a:p>
             <a:r>
               <a:rPr lang="en-US" dirty="0"/>
-              <a:t>[En pantalla: terminal ejecutando "pytest tests/ -v" en vivo, 87 en verde; luego docs/Matriz_Pruebas.md]
-El proyecto tiene ochenta y siete pruebas automáticas con pytest, escritas con test primero, implementación después — es decir, TDD real. Las voy a correr ahora mismo [ejecutar pytest tests/ -v en pantalla]. Como se ve, las ochenta y siete pasan. La matriz de pruebas del documento técnico cruza cada requisito funcional con su prueba automática y, cuando corresponde, con una corrida manual real contra el sistema completo — no son pruebas teóricas, son pruebas que de verdad se ejecutaron.</a:t>
+              <a:t>[En pantalla: terminal ejecutando "pytest tests/ -v" en vivo, 90 en verde; luego docs/Matriz_Pruebas.md]
+El proyecto tiene noventa pruebas automáticas con pytest, escritas con test primero, implementación después — es decir, TDD real. Las voy a correr ahora mismo [ejecutar pytest tests/ -v en pantalla]. Como se ve, las noventa pasan. La matriz de pruebas del documento técnico cruza cada requisito funcional con su prueba automática y, cuando corresponde, con una corrida manual real contra el sistema completo — no son pruebas teóricas, son pruebas que de verdad se ejecutaron.</a:t>
             </a:r>
             <a:endParaRPr lang="en-US" dirty="0"/>
           </a:p>
@@ -8558,7 +8558,7 @@
                   <a:schemeClr val="tx1"/>
                 </a:solidFill>
               </a:rPr>
-              <a:t>TDD: 87 pruebas escritas antes que el código</a:t>
+              <a:t>TDD: 90 pruebas escritas antes que el código</a:t>
             </a:r>
             <a:endParaRPr lang="en-US" sz="1400" dirty="0"/>
           </a:p>
@@ -10025,7 +10025,7 @@
                 <a:ea typeface="Courier New" pitchFamily="34" charset="-122"/>
                 <a:cs typeface="Courier New" pitchFamily="34" charset="-120"/>
               </a:rPr>
-              <a:t>87 pruebas pytest</a:t>
+              <a:t>90 pruebas pytest</a:t>
             </a:r>
             <a:endParaRPr lang="en-US" sz="1300" dirty="0"/>
           </a:p>
@@ -10246,7 +10246,7 @@
                   <a:schemeClr val="accent4"/>
                 </a:solidFill>
               </a:rPr>
-              <a:t>87</a:t>
+              <a:t>90</a:t>
             </a:r>
             <a:endParaRPr lang="en-US" sz="4400" dirty="0"/>
           </a:p>
@@ -17640,7 +17640,7 @@
                   <a:schemeClr val="tx1"/>
                 </a:solidFill>
               </a:rPr>
-              <a:t>87 de 87 pruebas pytest en verde · detalle completo en docs/Matriz_Pruebas.md</a:t>
+              <a:t>90 de 90 pruebas pytest en verde · detalle completo en docs/Matriz_Pruebas.md</a:t>
             </a:r>
             <a:endParaRPr lang="en-US" sz="1400" dirty="0"/>
           </a:p>

--- a/docs/Diapositivas_Video_SegundoCorte.pptx
+++ b/docs/Diapositivas_Video_SegundoCorte.pptx
@@ -121,18 +121,18 @@
   <p:extLst>
     <p:ext uri="{521415D9-36F7-43E2-AB2F-B90AF26B5E84}">
       <p14:sectionLst xmlns:p14="http://schemas.microsoft.com/office/powerpoint/2010/main">
-        <p14:section name="Apertura" id="{97d2a039-efed-410a-0dd7-c2971cf2d37c}">
+        <p14:section name="Apertura" id="{b66a639a-6323-17c9-56c5-c17af5a17547}">
           <p14:sldIdLst>
             <p14:sldId id="256"/>
           </p14:sldIdLst>
         </p14:section>
-        <p14:section name="Arquitectura" id="{5ddc1951-6a26-ee62-6756-b7a4d6882578}">
+        <p14:section name="Arquitectura" id="{3a8f8eb1-969d-da13-1a12-02a69211ec52}">
           <p14:sldIdLst>
             <p14:sldId id="257"/>
             <p14:sldId id="258"/>
           </p14:sldIdLst>
         </p14:section>
-        <p14:section name="Implementación" id="{e83d367b-4cd7-81bb-2a99-d0f0a28b0587}">
+        <p14:section name="Implementación" id="{f0918d1c-b6f6-6f9f-d69c-5c5485618372}">
           <p14:sldIdLst>
             <p14:sldId id="259"/>
             <p14:sldId id="260"/>
@@ -141,20 +141,20 @@
             <p14:sldId id="263"/>
           </p14:sldIdLst>
         </p14:section>
-        <p14:section name="Validación" id="{d4de7dfc-5cd7-b560-4dfb-7f1661e7d1b9}">
+        <p14:section name="Validación" id="{c29ee368-2095-e481-1ddc-8b06a8e649c4}">
           <p14:sldIdLst>
             <p14:sldId id="264"/>
             <p14:sldId id="265"/>
             <p14:sldId id="266"/>
           </p14:sldIdLst>
         </p14:section>
-        <p14:section name="Preguntas" id="{ebaccb2d-dd8a-f119-790d-ba2622a4a8b8}">
+        <p14:section name="Preguntas" id="{9b379b56-b654-2149-296d-dfb94d9d595d}">
           <p14:sldIdLst>
             <p14:sldId id="267"/>
             <p14:sldId id="268"/>
           </p14:sldIdLst>
         </p14:section>
-        <p14:section name="Cierre" id="{c9541294-b7ca-74f6-7b93-d111dcd1f093}">
+        <p14:section name="Cierre" id="{cba51563-3f48-fcf7-83cb-78244818cc93}">
           <p14:sldIdLst>
             <p14:sldId id="269"/>
             <p14:sldId id="270"/>
@@ -1732,7 +1732,7 @@
             <a:r>
               <a:rPr lang="en-US" dirty="0"/>
               <a:t>[En pantalla: data/lecturas.csv y data/reporte_ejecucion.json reales]
-Esta es una corrida real de veinte lecturas. En el CSV se ve cada lectura con su marca de tiempo y su estado: la mayoría normales, y dos marcadas como anómalas, exactamente las que el firmware inyectó a propósito. Y este es el reporte de ejecución en JSON: trae las métricas agregadas — lecturas válidas, anómalas, errores — y además un snapshot real de los recursos del sistema operativo en el momento del cierre: uso de CPU, memoria, disco y el PID del proceso. Ningún dato de este reporte está inventado, es la salida real de haber corrido el sistema. Este reporte se escribe al cerrar la ejecución, pero no hace falta esperar: en el panel, el botón Descargar reporte lo genera en el momento, con los datos de los tres equipos.</a:t>
+Esta es una corrida real de veinte lecturas. En el CSV se ve cada lectura con su marca de tiempo y su estado: la mayoría normales, y dos marcadas como anómalas, exactamente las que el firmware inyectó a propósito. Y este es el reporte de ejecución en JSON: trae las métricas agregadas — lecturas válidas, anómalas, errores — y además un snapshot real de los recursos del sistema operativo en el momento del cierre: uso de CPU, memoria, disco y el PID del proceso. Ningún dato de este reporte está inventado, es la salida real de haber corrido el sistema. Este reporte se escribe al cerrar la ejecución, pero no hace falta esperar: en el panel, el botón Descargar reporte lo genera en el momento, en JSON o en CSV para abrirlo en Excel, con los datos de los tres equipos.</a:t>
             </a:r>
             <a:endParaRPr lang="en-US" dirty="0"/>
           </a:p>
@@ -1820,8 +1820,8 @@
           <a:p>
             <a:r>
               <a:rPr lang="en-US" dirty="0"/>
-              <a:t>[En pantalla: terminal ejecutando "pytest tests/ -v" en vivo, 90 en verde; luego docs/Matriz_Pruebas.md]
-El proyecto tiene noventa pruebas automáticas con pytest, escritas con test primero, implementación después — es decir, TDD real. Las voy a correr ahora mismo [ejecutar pytest tests/ -v en pantalla]. Como se ve, las noventa pasan. La matriz de pruebas del documento técnico cruza cada requisito funcional con su prueba automática y, cuando corresponde, con una corrida manual real contra el sistema completo — no son pruebas teóricas, son pruebas que de verdad se ejecutaron.</a:t>
+              <a:t>[En pantalla: terminal ejecutando "pytest tests/ -v" en vivo, 95 en verde; luego docs/Matriz_Pruebas.md]
+El proyecto tiene noventa y cinco pruebas automáticas con pytest, escritas con test primero, implementación después — es decir, TDD real. Las voy a correr ahora mismo [ejecutar pytest tests/ -v en pantalla]. Como se ve, las noventa y cinco pasan. La matriz de pruebas del documento técnico cruza cada requisito funcional con su prueba automática y, cuando corresponde, con una corrida manual real contra el sistema completo — no son pruebas teóricas, son pruebas que de verdad se ejecutaron.</a:t>
             </a:r>
             <a:endParaRPr lang="en-US" dirty="0"/>
           </a:p>
@@ -8558,7 +8558,7 @@
                   <a:schemeClr val="tx1"/>
                 </a:solidFill>
               </a:rPr>
-              <a:t>TDD: 90 pruebas escritas antes que el código</a:t>
+              <a:t>TDD: 95 pruebas escritas antes que el código</a:t>
             </a:r>
             <a:endParaRPr lang="en-US" sz="1400" dirty="0"/>
           </a:p>
@@ -10025,7 +10025,7 @@
                 <a:ea typeface="Courier New" pitchFamily="34" charset="-122"/>
                 <a:cs typeface="Courier New" pitchFamily="34" charset="-120"/>
               </a:rPr>
-              <a:t>90 pruebas pytest</a:t>
+              <a:t>95 pruebas pytest</a:t>
             </a:r>
             <a:endParaRPr lang="en-US" sz="1300" dirty="0"/>
           </a:p>
@@ -10246,7 +10246,7 @@
                   <a:schemeClr val="accent4"/>
                 </a:solidFill>
               </a:rPr>
-              <a:t>90</a:t>
+              <a:t>95</a:t>
             </a:r>
             <a:endParaRPr lang="en-US" sz="4400" dirty="0"/>
           </a:p>
@@ -17640,7 +17640,7 @@
                   <a:schemeClr val="tx1"/>
                 </a:solidFill>
               </a:rPr>
-              <a:t>90 de 90 pruebas pytest en verde · detalle completo en docs/Matriz_Pruebas.md</a:t>
+              <a:t>95 de 95 pruebas pytest en verde · detalle completo en docs/Matriz_Pruebas.md</a:t>
             </a:r>
             <a:endParaRPr lang="en-US" sz="1400" dirty="0"/>
           </a:p>
